--- a/UMC SEA Expansion Strategy.pptx
+++ b/UMC SEA Expansion Strategy.pptx
@@ -22,9 +22,11 @@
     <p:sldId id="270" r:id="rId16"/>
     <p:sldId id="271" r:id="rId17"/>
     <p:sldId id="272" r:id="rId18"/>
+    <p:sldId id="273" r:id="rId19"/>
+    <p:sldId id="274" r:id="rId20"/>
   </p:sldIdLst>
   <p:notesMasterIdLst>
-    <p:notesMasterId r:id="rId19"/>
+    <p:notesMasterId r:id="rId21"/>
   </p:notesMasterIdLst>
   <p:sldSz cx="12192000" cy="6858000"/>
   <p:notesSz cx="6858000" cy="12192000"/>
@@ -1510,6 +1512,182 @@
             <a:fld id="{F7021451-1387-4CA6-816F-3879F97B5CBC}" type="slidenum">
               <a:rPr lang="en-US"/>
               <a:t>17</a:t>
+            </a:fld>
+            <a:endParaRPr lang="en-US"/>
+          </a:p>
+        </p:txBody>
+      </p:sp>
+    </p:spTree>
+    <p:extLst>
+      <p:ext uri="{BB962C8B-B14F-4D97-AF65-F5344CB8AC3E}">
+        <p14:creationId xmlns:p14="http://schemas.microsoft.com/office/powerpoint/2010/main" val="1024086991"/>
+      </p:ext>
+    </p:extLst>
+  </p:cSld>
+  <p:clrMapOvr>
+    <a:masterClrMapping/>
+  </p:clrMapOvr>
+</p:notes>
+</file>
+
+<file path=ppt/notesSlides/notesSlide18.xml><?xml version="1.0" encoding="utf-8"?>
+<p:notes xmlns:a="http://schemas.openxmlformats.org/drawingml/2006/main" xmlns:r="http://schemas.openxmlformats.org/officeDocument/2006/relationships" xmlns:p="http://schemas.openxmlformats.org/presentationml/2006/main">
+  <p:cSld>
+    <p:spTree>
+      <p:nvGrpSpPr>
+        <p:cNvPr id="1" name=""/>
+        <p:cNvGrpSpPr/>
+        <p:nvPr/>
+      </p:nvGrpSpPr>
+      <p:grpSpPr>
+        <a:xfrm>
+          <a:off x="0" y="0"/>
+          <a:ext cx="0" cy="0"/>
+          <a:chOff x="0" y="0"/>
+          <a:chExt cx="0" cy="0"/>
+        </a:xfrm>
+      </p:grpSpPr>
+      <p:sp>
+        <p:nvSpPr>
+          <p:cNvPr id="2" name="Slide Image Placeholder 1"/>
+          <p:cNvSpPr>
+            <a:spLocks noGrp="1" noRot="1" noChangeAspect="1"/>
+          </p:cNvSpPr>
+          <p:nvPr>
+            <p:ph type="sldImg"/>
+          </p:nvPr>
+        </p:nvSpPr>
+        <p:spPr/>
+      </p:sp>
+      <p:sp>
+        <p:nvSpPr>
+          <p:cNvPr id="3" name="Notes Placeholder 2"/>
+          <p:cNvSpPr>
+            <a:spLocks noGrp="1"/>
+          </p:cNvSpPr>
+          <p:nvPr>
+            <p:ph type="body" idx="1"/>
+          </p:nvPr>
+        </p:nvSpPr>
+        <p:spPr/>
+        <p:txBody>
+          <a:bodyPr/>
+          <a:lstStyle/>
+          <a:p>
+            <a:r>
+              <a:rPr lang="en-US" dirty="0"/>
+              <a:t/>
+            </a:r>
+            <a:endParaRPr lang="en-US" dirty="0"/>
+          </a:p>
+        </p:txBody>
+      </p:sp>
+      <p:sp>
+        <p:nvSpPr>
+          <p:cNvPr id="4" name="Slide Number Placeholder 3"/>
+          <p:cNvSpPr>
+            <a:spLocks noGrp="1"/>
+          </p:cNvSpPr>
+          <p:nvPr>
+            <p:ph type="sldNum" sz="quarter" idx="10"/>
+          </p:nvPr>
+        </p:nvSpPr>
+        <p:spPr/>
+        <p:txBody>
+          <a:bodyPr/>
+          <a:lstStyle/>
+          <a:p>
+            <a:fld id="{F7021451-1387-4CA6-816F-3879F97B5CBC}" type="slidenum">
+              <a:rPr lang="en-US"/>
+              <a:t>18</a:t>
+            </a:fld>
+            <a:endParaRPr lang="en-US"/>
+          </a:p>
+        </p:txBody>
+      </p:sp>
+    </p:spTree>
+    <p:extLst>
+      <p:ext uri="{BB962C8B-B14F-4D97-AF65-F5344CB8AC3E}">
+        <p14:creationId xmlns:p14="http://schemas.microsoft.com/office/powerpoint/2010/main" val="1024086991"/>
+      </p:ext>
+    </p:extLst>
+  </p:cSld>
+  <p:clrMapOvr>
+    <a:masterClrMapping/>
+  </p:clrMapOvr>
+</p:notes>
+</file>
+
+<file path=ppt/notesSlides/notesSlide19.xml><?xml version="1.0" encoding="utf-8"?>
+<p:notes xmlns:a="http://schemas.openxmlformats.org/drawingml/2006/main" xmlns:r="http://schemas.openxmlformats.org/officeDocument/2006/relationships" xmlns:p="http://schemas.openxmlformats.org/presentationml/2006/main">
+  <p:cSld>
+    <p:spTree>
+      <p:nvGrpSpPr>
+        <p:cNvPr id="1" name=""/>
+        <p:cNvGrpSpPr/>
+        <p:nvPr/>
+      </p:nvGrpSpPr>
+      <p:grpSpPr>
+        <a:xfrm>
+          <a:off x="0" y="0"/>
+          <a:ext cx="0" cy="0"/>
+          <a:chOff x="0" y="0"/>
+          <a:chExt cx="0" cy="0"/>
+        </a:xfrm>
+      </p:grpSpPr>
+      <p:sp>
+        <p:nvSpPr>
+          <p:cNvPr id="2" name="Slide Image Placeholder 1"/>
+          <p:cNvSpPr>
+            <a:spLocks noGrp="1" noRot="1" noChangeAspect="1"/>
+          </p:cNvSpPr>
+          <p:nvPr>
+            <p:ph type="sldImg"/>
+          </p:nvPr>
+        </p:nvSpPr>
+        <p:spPr/>
+      </p:sp>
+      <p:sp>
+        <p:nvSpPr>
+          <p:cNvPr id="3" name="Notes Placeholder 2"/>
+          <p:cNvSpPr>
+            <a:spLocks noGrp="1"/>
+          </p:cNvSpPr>
+          <p:nvPr>
+            <p:ph type="body" idx="1"/>
+          </p:nvPr>
+        </p:nvSpPr>
+        <p:spPr/>
+        <p:txBody>
+          <a:bodyPr/>
+          <a:lstStyle/>
+          <a:p>
+            <a:r>
+              <a:rPr lang="en-US" dirty="0"/>
+              <a:t/>
+            </a:r>
+            <a:endParaRPr lang="en-US" dirty="0"/>
+          </a:p>
+        </p:txBody>
+      </p:sp>
+      <p:sp>
+        <p:nvSpPr>
+          <p:cNvPr id="4" name="Slide Number Placeholder 3"/>
+          <p:cNvSpPr>
+            <a:spLocks noGrp="1"/>
+          </p:cNvSpPr>
+          <p:nvPr>
+            <p:ph type="sldNum" sz="quarter" idx="10"/>
+          </p:nvPr>
+        </p:nvSpPr>
+        <p:spPr/>
+        <p:txBody>
+          <a:bodyPr/>
+          <a:lstStyle/>
+          <a:p>
+            <a:fld id="{F7021451-1387-4CA6-816F-3879F97B5CBC}" type="slidenum">
+              <a:rPr lang="en-US"/>
+              <a:t>19</a:t>
             </a:fld>
             <a:endParaRPr lang="en-US"/>
           </a:p>
@@ -3889,6 +4067,920 @@
     <p:bg>
       <p:bgPr>
         <a:solidFill>
+          <a:srgbClr val="0E1B33"/>
+        </a:solidFill>
+      </p:bgPr>
+    </p:bg>
+    <p:spTree>
+      <p:nvGrpSpPr>
+        <p:cNvPr id="1" name=""/>
+        <p:cNvGrpSpPr/>
+        <p:nvPr/>
+      </p:nvGrpSpPr>
+      <p:grpSpPr>
+        <a:xfrm>
+          <a:off x="0" y="0"/>
+          <a:ext cx="0" cy="0"/>
+          <a:chOff x="0" y="0"/>
+          <a:chExt cx="0" cy="0"/>
+        </a:xfrm>
+      </p:grpSpPr>
+      <p:sp>
+        <p:nvSpPr>
+          <p:cNvPr id="2" name="Text 0"/>
+          <p:cNvSpPr/>
+          <p:nvPr/>
+        </p:nvSpPr>
+        <p:spPr>
+          <a:xfrm>
+            <a:off x="548640" y="411480"/>
+            <a:ext cx="7315200" cy="274320"/>
+          </a:xfrm>
+          <a:prstGeom prst="rect">
+            <a:avLst/>
+          </a:prstGeom>
+          <a:noFill/>
+          <a:ln/>
+        </p:spPr>
+        <p:txBody>
+          <a:bodyPr wrap="square" rtlCol="0" anchor="ctr"/>
+          <a:lstStyle/>
+          <a:p>
+            <a:pPr indent="0" marL="0">
+              <a:buNone/>
+            </a:pPr>
+            <a:r>
+              <a:rPr lang="en-US" sz="1200" b="1" spc="300" kern="0" dirty="0">
+                <a:solidFill>
+                  <a:srgbClr val="37C7C0"/>
+                </a:solidFill>
+                <a:latin typeface="Noto Sans CJK TC" pitchFamily="34" charset="0"/>
+                <a:ea typeface="Noto Sans CJK TC" pitchFamily="34" charset="-122"/>
+                <a:cs typeface="Noto Sans CJK TC" pitchFamily="34" charset="-120"/>
+              </a:rPr>
+              <a:t>THE TURNKEY MODEL</a:t>
+            </a:r>
+            <a:endParaRPr lang="en-US" sz="1200" dirty="0"/>
+          </a:p>
+        </p:txBody>
+      </p:sp>
+      <p:sp>
+        <p:nvSpPr>
+          <p:cNvPr id="3" name="Text 1"/>
+          <p:cNvSpPr/>
+          <p:nvPr/>
+        </p:nvSpPr>
+        <p:spPr>
+          <a:xfrm>
+            <a:off x="548640" y="676656"/>
+            <a:ext cx="10972800" cy="640080"/>
+          </a:xfrm>
+          <a:prstGeom prst="rect">
+            <a:avLst/>
+          </a:prstGeom>
+          <a:noFill/>
+          <a:ln/>
+        </p:spPr>
+        <p:txBody>
+          <a:bodyPr wrap="square" rtlCol="0" anchor="ctr"/>
+          <a:lstStyle/>
+          <a:p>
+            <a:pPr indent="0" marL="0">
+              <a:buNone/>
+            </a:pPr>
+            <a:r>
+              <a:rPr lang="en-US" sz="2800" b="1" dirty="0">
+                <a:solidFill>
+                  <a:srgbClr val="FFFFFF"/>
+                </a:solidFill>
+                <a:latin typeface="Noto Serif CJK TC" pitchFamily="34" charset="0"/>
+                <a:ea typeface="Noto Serif CJK TC" pitchFamily="34" charset="-122"/>
+                <a:cs typeface="Noto Serif CJK TC" pitchFamily="34" charset="-120"/>
+              </a:rPr>
+              <a:t>先看 TSMC–Amkor 的合作框架長什麼樣</a:t>
+            </a:r>
+            <a:endParaRPr lang="en-US" sz="2800" dirty="0"/>
+          </a:p>
+        </p:txBody>
+      </p:sp>
+      <p:sp>
+        <p:nvSpPr>
+          <p:cNvPr id="4" name="Shape 2"/>
+          <p:cNvSpPr/>
+          <p:nvPr/>
+        </p:nvSpPr>
+        <p:spPr>
+          <a:xfrm>
+            <a:off x="822960" y="1691640"/>
+            <a:ext cx="4206240" cy="1783080"/>
+          </a:xfrm>
+          <a:prstGeom prst="roundRect">
+            <a:avLst>
+              <a:gd name="adj" fmla="val 4103"/>
+            </a:avLst>
+          </a:prstGeom>
+          <a:solidFill>
+            <a:srgbClr val="16264A"/>
+          </a:solidFill>
+          <a:ln/>
+        </p:spPr>
+      </p:sp>
+      <p:sp>
+        <p:nvSpPr>
+          <p:cNvPr id="5" name="Shape 3"/>
+          <p:cNvSpPr/>
+          <p:nvPr/>
+        </p:nvSpPr>
+        <p:spPr>
+          <a:xfrm>
+            <a:off x="1143000" y="1965960"/>
+            <a:ext cx="713232" cy="713232"/>
+          </a:xfrm>
+          <a:prstGeom prst="ellipse">
+            <a:avLst/>
+          </a:prstGeom>
+          <a:solidFill>
+            <a:srgbClr val="0E1B33"/>
+          </a:solidFill>
+          <a:ln/>
+        </p:spPr>
+      </p:sp>
+      <p:pic>
+        <p:nvPicPr>
+          <p:cNvPr id="6" name="Image 0" descr="preencoded.png">    </p:cNvPr>
+          <p:cNvPicPr>
+            <a:picLocks noChangeAspect="1"/>
+          </p:cNvPicPr>
+          <p:nvPr/>
+        </p:nvPicPr>
+        <p:blipFill>
+          <a:blip r:embed="rId1"/>
+          <a:stretch>
+            <a:fillRect/>
+          </a:stretch>
+        </p:blipFill>
+        <p:spPr>
+          <a:xfrm>
+            <a:off x="1316736" y="2139696"/>
+            <a:ext cx="365760" cy="365760"/>
+          </a:xfrm>
+          <a:prstGeom prst="rect">
+            <a:avLst/>
+          </a:prstGeom>
+        </p:spPr>
+      </p:pic>
+      <p:sp>
+        <p:nvSpPr>
+          <p:cNvPr id="7" name="Text 4"/>
+          <p:cNvSpPr/>
+          <p:nvPr/>
+        </p:nvSpPr>
+        <p:spPr>
+          <a:xfrm>
+            <a:off x="2011680" y="2011680"/>
+            <a:ext cx="2834640" cy="457200"/>
+          </a:xfrm>
+          <a:prstGeom prst="rect">
+            <a:avLst/>
+          </a:prstGeom>
+          <a:noFill/>
+          <a:ln/>
+        </p:spPr>
+        <p:txBody>
+          <a:bodyPr wrap="square" rtlCol="0" anchor="ctr"/>
+          <a:lstStyle/>
+          <a:p>
+            <a:pPr indent="0" marL="0">
+              <a:buNone/>
+            </a:pPr>
+            <a:r>
+              <a:rPr lang="en-US" sz="1800" b="1" dirty="0">
+                <a:solidFill>
+                  <a:srgbClr val="FFFFFF"/>
+                </a:solidFill>
+                <a:latin typeface="Noto Serif CJK TC" pitchFamily="34" charset="0"/>
+                <a:ea typeface="Noto Serif CJK TC" pitchFamily="34" charset="-122"/>
+                <a:cs typeface="Noto Serif CJK TC" pitchFamily="34" charset="-120"/>
+              </a:rPr>
+              <a:t>TSMC 前段 fab</a:t>
+            </a:r>
+            <a:endParaRPr lang="en-US" sz="1800" dirty="0"/>
+          </a:p>
+        </p:txBody>
+      </p:sp>
+      <p:sp>
+        <p:nvSpPr>
+          <p:cNvPr id="8" name="Text 5"/>
+          <p:cNvSpPr/>
+          <p:nvPr/>
+        </p:nvSpPr>
+        <p:spPr>
+          <a:xfrm>
+            <a:off x="1188720" y="2743200"/>
+            <a:ext cx="3566160" cy="594360"/>
+          </a:xfrm>
+          <a:prstGeom prst="rect">
+            <a:avLst/>
+          </a:prstGeom>
+          <a:noFill/>
+          <a:ln/>
+        </p:spPr>
+        <p:txBody>
+          <a:bodyPr wrap="square" rtlCol="0" anchor="t"/>
+          <a:lstStyle/>
+          <a:p>
+            <a:pPr indent="0" marL="0">
+              <a:buNone/>
+            </a:pPr>
+            <a:r>
+              <a:rPr lang="en-US" sz="1300" dirty="0">
+                <a:solidFill>
+                  <a:srgbClr val="AFC6E9"/>
+                </a:solidFill>
+                <a:latin typeface="Noto Sans CJK TC" pitchFamily="34" charset="0"/>
+                <a:ea typeface="Noto Sans CJK TC" pitchFamily="34" charset="-122"/>
+                <a:cs typeface="Noto Sans CJK TC" pitchFamily="34" charset="-120"/>
+              </a:rPr>
+              <a:t>亞利桑那 Phoenix 晶圓製造（leading-edge）</a:t>
+            </a:r>
+            <a:endParaRPr lang="en-US" sz="1300" dirty="0"/>
+          </a:p>
+        </p:txBody>
+      </p:sp>
+      <p:pic>
+        <p:nvPicPr>
+          <p:cNvPr id="9" name="Image 1" descr="preencoded.png">    </p:cNvPr>
+          <p:cNvPicPr>
+            <a:picLocks noChangeAspect="1"/>
+          </p:cNvPicPr>
+          <p:nvPr/>
+        </p:nvPicPr>
+        <p:blipFill>
+          <a:blip r:embed="rId2"/>
+          <a:stretch>
+            <a:fillRect/>
+          </a:stretch>
+        </p:blipFill>
+        <p:spPr>
+          <a:xfrm>
+            <a:off x="5852160" y="2331720"/>
+            <a:ext cx="548640" cy="548640"/>
+          </a:xfrm>
+          <a:prstGeom prst="rect">
+            <a:avLst/>
+          </a:prstGeom>
+        </p:spPr>
+      </p:pic>
+      <p:sp>
+        <p:nvSpPr>
+          <p:cNvPr id="10" name="Shape 6"/>
+          <p:cNvSpPr/>
+          <p:nvPr/>
+        </p:nvSpPr>
+        <p:spPr>
+          <a:xfrm>
+            <a:off x="6583680" y="1691640"/>
+            <a:ext cx="4206240" cy="1783080"/>
+          </a:xfrm>
+          <a:prstGeom prst="roundRect">
+            <a:avLst>
+              <a:gd name="adj" fmla="val 4103"/>
+            </a:avLst>
+          </a:prstGeom>
+          <a:solidFill>
+            <a:srgbClr val="16264A"/>
+          </a:solidFill>
+          <a:ln/>
+        </p:spPr>
+      </p:sp>
+      <p:sp>
+        <p:nvSpPr>
+          <p:cNvPr id="11" name="Shape 7"/>
+          <p:cNvSpPr/>
+          <p:nvPr/>
+        </p:nvSpPr>
+        <p:spPr>
+          <a:xfrm>
+            <a:off x="6903720" y="1965960"/>
+            <a:ext cx="713232" cy="713232"/>
+          </a:xfrm>
+          <a:prstGeom prst="ellipse">
+            <a:avLst/>
+          </a:prstGeom>
+          <a:solidFill>
+            <a:srgbClr val="0E1B33"/>
+          </a:solidFill>
+          <a:ln/>
+        </p:spPr>
+      </p:sp>
+      <p:pic>
+        <p:nvPicPr>
+          <p:cNvPr id="12" name="Image 2" descr="preencoded.png">    </p:cNvPr>
+          <p:cNvPicPr>
+            <a:picLocks noChangeAspect="1"/>
+          </p:cNvPicPr>
+          <p:nvPr/>
+        </p:nvPicPr>
+        <p:blipFill>
+          <a:blip r:embed="rId3"/>
+          <a:stretch>
+            <a:fillRect/>
+          </a:stretch>
+        </p:blipFill>
+        <p:spPr>
+          <a:xfrm>
+            <a:off x="7077456" y="2139696"/>
+            <a:ext cx="365760" cy="365760"/>
+          </a:xfrm>
+          <a:prstGeom prst="rect">
+            <a:avLst/>
+          </a:prstGeom>
+        </p:spPr>
+      </p:pic>
+      <p:sp>
+        <p:nvSpPr>
+          <p:cNvPr id="13" name="Text 8"/>
+          <p:cNvSpPr/>
+          <p:nvPr/>
+        </p:nvSpPr>
+        <p:spPr>
+          <a:xfrm>
+            <a:off x="7772400" y="2011680"/>
+            <a:ext cx="2834640" cy="457200"/>
+          </a:xfrm>
+          <a:prstGeom prst="rect">
+            <a:avLst/>
+          </a:prstGeom>
+          <a:noFill/>
+          <a:ln/>
+        </p:spPr>
+        <p:txBody>
+          <a:bodyPr wrap="square" rtlCol="0" anchor="ctr"/>
+          <a:lstStyle/>
+          <a:p>
+            <a:pPr indent="0" marL="0">
+              <a:buNone/>
+            </a:pPr>
+            <a:r>
+              <a:rPr lang="en-US" sz="1800" b="1" dirty="0">
+                <a:solidFill>
+                  <a:srgbClr val="FFFFFF"/>
+                </a:solidFill>
+                <a:latin typeface="Noto Serif CJK TC" pitchFamily="34" charset="0"/>
+                <a:ea typeface="Noto Serif CJK TC" pitchFamily="34" charset="-122"/>
+                <a:cs typeface="Noto Serif CJK TC" pitchFamily="34" charset="-120"/>
+              </a:rPr>
+              <a:t>Amkor 後段 OSAT</a:t>
+            </a:r>
+            <a:endParaRPr lang="en-US" sz="1800" dirty="0"/>
+          </a:p>
+        </p:txBody>
+      </p:sp>
+      <p:sp>
+        <p:nvSpPr>
+          <p:cNvPr id="14" name="Text 9"/>
+          <p:cNvSpPr/>
+          <p:nvPr/>
+        </p:nvSpPr>
+        <p:spPr>
+          <a:xfrm>
+            <a:off x="6949440" y="2743200"/>
+            <a:ext cx="3566160" cy="594360"/>
+          </a:xfrm>
+          <a:prstGeom prst="rect">
+            <a:avLst/>
+          </a:prstGeom>
+          <a:noFill/>
+          <a:ln/>
+        </p:spPr>
+        <p:txBody>
+          <a:bodyPr wrap="square" rtlCol="0" anchor="t"/>
+          <a:lstStyle/>
+          <a:p>
+            <a:pPr indent="0" marL="0">
+              <a:buNone/>
+            </a:pPr>
+            <a:r>
+              <a:rPr lang="en-US" sz="1300" dirty="0">
+                <a:solidFill>
+                  <a:srgbClr val="AFC6E9"/>
+                </a:solidFill>
+                <a:latin typeface="Noto Sans CJK TC" pitchFamily="34" charset="0"/>
+                <a:ea typeface="Noto Sans CJK TC" pitchFamily="34" charset="-122"/>
+                <a:cs typeface="Noto Sans CJK TC" pitchFamily="34" charset="-120"/>
+              </a:rPr>
+              <a:t>Peoria 封測 campus，turnkey 封裝 + 測試</a:t>
+            </a:r>
+            <a:endParaRPr lang="en-US" sz="1300" dirty="0"/>
+          </a:p>
+        </p:txBody>
+      </p:sp>
+      <p:sp>
+        <p:nvSpPr>
+          <p:cNvPr id="15" name="Shape 10"/>
+          <p:cNvSpPr/>
+          <p:nvPr/>
+        </p:nvSpPr>
+        <p:spPr>
+          <a:xfrm>
+            <a:off x="548640" y="3794760"/>
+            <a:ext cx="2670048" cy="2194560"/>
+          </a:xfrm>
+          <a:prstGeom prst="roundRect">
+            <a:avLst>
+              <a:gd name="adj" fmla="val 2917"/>
+            </a:avLst>
+          </a:prstGeom>
+          <a:solidFill>
+            <a:srgbClr val="16264A"/>
+          </a:solidFill>
+          <a:ln/>
+        </p:spPr>
+      </p:sp>
+      <p:sp>
+        <p:nvSpPr>
+          <p:cNvPr id="16" name="Shape 11"/>
+          <p:cNvSpPr/>
+          <p:nvPr/>
+        </p:nvSpPr>
+        <p:spPr>
+          <a:xfrm>
+            <a:off x="548640" y="3794760"/>
+            <a:ext cx="73152" cy="2194560"/>
+          </a:xfrm>
+          <a:prstGeom prst="rect">
+            <a:avLst/>
+          </a:prstGeom>
+          <a:solidFill>
+            <a:srgbClr val="37C7C0"/>
+          </a:solidFill>
+          <a:ln/>
+        </p:spPr>
+      </p:sp>
+      <p:sp>
+        <p:nvSpPr>
+          <p:cNvPr id="17" name="Text 12"/>
+          <p:cNvSpPr/>
+          <p:nvPr/>
+        </p:nvSpPr>
+        <p:spPr>
+          <a:xfrm>
+            <a:off x="822960" y="4023360"/>
+            <a:ext cx="2212848" cy="457200"/>
+          </a:xfrm>
+          <a:prstGeom prst="rect">
+            <a:avLst/>
+          </a:prstGeom>
+          <a:noFill/>
+          <a:ln/>
+        </p:spPr>
+        <p:txBody>
+          <a:bodyPr wrap="square" rtlCol="0" anchor="ctr"/>
+          <a:lstStyle/>
+          <a:p>
+            <a:pPr indent="0" marL="0">
+              <a:buNone/>
+            </a:pPr>
+            <a:r>
+              <a:rPr lang="en-US" sz="1600" b="1" dirty="0">
+                <a:solidFill>
+                  <a:srgbClr val="FFFFFF"/>
+                </a:solidFill>
+                <a:latin typeface="Noto Serif CJK TC" pitchFamily="34" charset="0"/>
+                <a:ea typeface="Noto Serif CJK TC" pitchFamily="34" charset="-122"/>
+                <a:cs typeface="Noto Serif CJK TC" pitchFamily="34" charset="-120"/>
+              </a:rPr>
+              <a:t>10 年長約</a:t>
+            </a:r>
+            <a:endParaRPr lang="en-US" sz="1600" dirty="0"/>
+          </a:p>
+        </p:txBody>
+      </p:sp>
+      <p:sp>
+        <p:nvSpPr>
+          <p:cNvPr id="18" name="Text 13"/>
+          <p:cNvSpPr/>
+          <p:nvPr/>
+        </p:nvSpPr>
+        <p:spPr>
+          <a:xfrm>
+            <a:off x="822960" y="4572000"/>
+            <a:ext cx="2167128" cy="1280160"/>
+          </a:xfrm>
+          <a:prstGeom prst="rect">
+            <a:avLst/>
+          </a:prstGeom>
+          <a:noFill/>
+          <a:ln/>
+        </p:spPr>
+        <p:txBody>
+          <a:bodyPr wrap="square" rtlCol="0" anchor="t"/>
+          <a:lstStyle/>
+          <a:p>
+            <a:pPr indent="0" marL="0">
+              <a:lnSpc>
+                <a:spcPct val="108000"/>
+              </a:lnSpc>
+              <a:buNone/>
+            </a:pPr>
+            <a:r>
+              <a:rPr lang="en-US" sz="1200" dirty="0">
+                <a:solidFill>
+                  <a:srgbClr val="AFC6E9"/>
+                </a:solidFill>
+                <a:latin typeface="Noto Sans CJK TC" pitchFamily="34" charset="0"/>
+                <a:ea typeface="Noto Sans CJK TC" pitchFamily="34" charset="-122"/>
+                <a:cs typeface="Noto Sans CJK TC" pitchFamily="34" charset="-120"/>
+              </a:rPr>
+              <a:t>2024 MOU → 2026 擴大為 10 年合作框架，TSMC 向 Amkor 採購 turnkey 封測。</a:t>
+            </a:r>
+            <a:endParaRPr lang="en-US" sz="1200" dirty="0"/>
+          </a:p>
+        </p:txBody>
+      </p:sp>
+      <p:sp>
+        <p:nvSpPr>
+          <p:cNvPr id="19" name="Shape 14"/>
+          <p:cNvSpPr/>
+          <p:nvPr/>
+        </p:nvSpPr>
+        <p:spPr>
+          <a:xfrm>
+            <a:off x="3383280" y="3794760"/>
+            <a:ext cx="2670048" cy="2194560"/>
+          </a:xfrm>
+          <a:prstGeom prst="roundRect">
+            <a:avLst>
+              <a:gd name="adj" fmla="val 2917"/>
+            </a:avLst>
+          </a:prstGeom>
+          <a:solidFill>
+            <a:srgbClr val="16264A"/>
+          </a:solidFill>
+          <a:ln/>
+        </p:spPr>
+      </p:sp>
+      <p:sp>
+        <p:nvSpPr>
+          <p:cNvPr id="20" name="Shape 15"/>
+          <p:cNvSpPr/>
+          <p:nvPr/>
+        </p:nvSpPr>
+        <p:spPr>
+          <a:xfrm>
+            <a:off x="3383280" y="3794760"/>
+            <a:ext cx="73152" cy="2194560"/>
+          </a:xfrm>
+          <a:prstGeom prst="rect">
+            <a:avLst/>
+          </a:prstGeom>
+          <a:solidFill>
+            <a:srgbClr val="37C7C0"/>
+          </a:solidFill>
+          <a:ln/>
+        </p:spPr>
+      </p:sp>
+      <p:sp>
+        <p:nvSpPr>
+          <p:cNvPr id="21" name="Text 16"/>
+          <p:cNvSpPr/>
+          <p:nvPr/>
+        </p:nvSpPr>
+        <p:spPr>
+          <a:xfrm>
+            <a:off x="3657600" y="4023360"/>
+            <a:ext cx="2212848" cy="457200"/>
+          </a:xfrm>
+          <a:prstGeom prst="rect">
+            <a:avLst/>
+          </a:prstGeom>
+          <a:noFill/>
+          <a:ln/>
+        </p:spPr>
+        <p:txBody>
+          <a:bodyPr wrap="square" rtlCol="0" anchor="ctr"/>
+          <a:lstStyle/>
+          <a:p>
+            <a:pPr indent="0" marL="0">
+              <a:buNone/>
+            </a:pPr>
+            <a:r>
+              <a:rPr lang="en-US" sz="1600" b="1" dirty="0">
+                <a:solidFill>
+                  <a:srgbClr val="FFFFFF"/>
+                </a:solidFill>
+                <a:latin typeface="Noto Serif CJK TC" pitchFamily="34" charset="0"/>
+                <a:ea typeface="Noto Serif CJK TC" pitchFamily="34" charset="-122"/>
+                <a:cs typeface="Noto Serif CJK TC" pitchFamily="34" charset="-120"/>
+              </a:rPr>
+              <a:t>前後段就近綁定</a:t>
+            </a:r>
+            <a:endParaRPr lang="en-US" sz="1600" dirty="0"/>
+          </a:p>
+        </p:txBody>
+      </p:sp>
+      <p:sp>
+        <p:nvSpPr>
+          <p:cNvPr id="22" name="Text 17"/>
+          <p:cNvSpPr/>
+          <p:nvPr/>
+        </p:nvSpPr>
+        <p:spPr>
+          <a:xfrm>
+            <a:off x="3657600" y="4572000"/>
+            <a:ext cx="2167128" cy="1280160"/>
+          </a:xfrm>
+          <a:prstGeom prst="rect">
+            <a:avLst/>
+          </a:prstGeom>
+          <a:noFill/>
+          <a:ln/>
+        </p:spPr>
+        <p:txBody>
+          <a:bodyPr wrap="square" rtlCol="0" anchor="t"/>
+          <a:lstStyle/>
+          <a:p>
+            <a:pPr indent="0" marL="0">
+              <a:lnSpc>
+                <a:spcPct val="108000"/>
+              </a:lnSpc>
+              <a:buNone/>
+            </a:pPr>
+            <a:r>
+              <a:rPr lang="en-US" sz="1200" dirty="0">
+                <a:solidFill>
+                  <a:srgbClr val="AFC6E9"/>
+                </a:solidFill>
+                <a:latin typeface="Noto Sans CJK TC" pitchFamily="34" charset="0"/>
+                <a:ea typeface="Noto Sans CJK TC" pitchFamily="34" charset="-122"/>
+                <a:cs typeface="Noto Sans CJK TC" pitchFamily="34" charset="-120"/>
+              </a:rPr>
+              <a:t>前段 fab 與後段封測廠地理相鄰，縮短整體產品週期。</a:t>
+            </a:r>
+            <a:endParaRPr lang="en-US" sz="1200" dirty="0"/>
+          </a:p>
+        </p:txBody>
+      </p:sp>
+      <p:sp>
+        <p:nvSpPr>
+          <p:cNvPr id="23" name="Shape 18"/>
+          <p:cNvSpPr/>
+          <p:nvPr/>
+        </p:nvSpPr>
+        <p:spPr>
+          <a:xfrm>
+            <a:off x="6217920" y="3794760"/>
+            <a:ext cx="2670048" cy="2194560"/>
+          </a:xfrm>
+          <a:prstGeom prst="roundRect">
+            <a:avLst>
+              <a:gd name="adj" fmla="val 2917"/>
+            </a:avLst>
+          </a:prstGeom>
+          <a:solidFill>
+            <a:srgbClr val="16264A"/>
+          </a:solidFill>
+          <a:ln/>
+        </p:spPr>
+      </p:sp>
+      <p:sp>
+        <p:nvSpPr>
+          <p:cNvPr id="24" name="Shape 19"/>
+          <p:cNvSpPr/>
+          <p:nvPr/>
+        </p:nvSpPr>
+        <p:spPr>
+          <a:xfrm>
+            <a:off x="6217920" y="3794760"/>
+            <a:ext cx="73152" cy="2194560"/>
+          </a:xfrm>
+          <a:prstGeom prst="rect">
+            <a:avLst/>
+          </a:prstGeom>
+          <a:solidFill>
+            <a:srgbClr val="E0A458"/>
+          </a:solidFill>
+          <a:ln/>
+        </p:spPr>
+      </p:sp>
+      <p:sp>
+        <p:nvSpPr>
+          <p:cNvPr id="25" name="Text 20"/>
+          <p:cNvSpPr/>
+          <p:nvPr/>
+        </p:nvSpPr>
+        <p:spPr>
+          <a:xfrm>
+            <a:off x="6492240" y="4023360"/>
+            <a:ext cx="2212848" cy="457200"/>
+          </a:xfrm>
+          <a:prstGeom prst="rect">
+            <a:avLst/>
+          </a:prstGeom>
+          <a:noFill/>
+          <a:ln/>
+        </p:spPr>
+        <p:txBody>
+          <a:bodyPr wrap="square" rtlCol="0" anchor="ctr"/>
+          <a:lstStyle/>
+          <a:p>
+            <a:pPr indent="0" marL="0">
+              <a:buNone/>
+            </a:pPr>
+            <a:r>
+              <a:rPr lang="en-US" sz="1600" b="1" dirty="0">
+                <a:solidFill>
+                  <a:srgbClr val="FFFFFF"/>
+                </a:solidFill>
+                <a:latin typeface="Noto Serif CJK TC" pitchFamily="34" charset="0"/>
+                <a:ea typeface="Noto Serif CJK TC" pitchFamily="34" charset="-122"/>
+                <a:cs typeface="Noto Serif CJK TC" pitchFamily="34" charset="-120"/>
+              </a:rPr>
+              <a:t>標的是高階封裝</a:t>
+            </a:r>
+            <a:endParaRPr lang="en-US" sz="1600" dirty="0"/>
+          </a:p>
+        </p:txBody>
+      </p:sp>
+      <p:sp>
+        <p:nvSpPr>
+          <p:cNvPr id="26" name="Text 21"/>
+          <p:cNvSpPr/>
+          <p:nvPr/>
+        </p:nvSpPr>
+        <p:spPr>
+          <a:xfrm>
+            <a:off x="6492240" y="4572000"/>
+            <a:ext cx="2167128" cy="1280160"/>
+          </a:xfrm>
+          <a:prstGeom prst="rect">
+            <a:avLst/>
+          </a:prstGeom>
+          <a:noFill/>
+          <a:ln/>
+        </p:spPr>
+        <p:txBody>
+          <a:bodyPr wrap="square" rtlCol="0" anchor="t"/>
+          <a:lstStyle/>
+          <a:p>
+            <a:pPr indent="0" marL="0">
+              <a:lnSpc>
+                <a:spcPct val="108000"/>
+              </a:lnSpc>
+              <a:buNone/>
+            </a:pPr>
+            <a:r>
+              <a:rPr lang="en-US" sz="1200" dirty="0">
+                <a:solidFill>
+                  <a:srgbClr val="AFC6E9"/>
+                </a:solidFill>
+                <a:latin typeface="Noto Sans CJK TC" pitchFamily="34" charset="0"/>
+                <a:ea typeface="Noto Sans CJK TC" pitchFamily="34" charset="-122"/>
+                <a:cs typeface="Noto Sans CJK TC" pitchFamily="34" charset="-120"/>
+              </a:rPr>
+              <a:t>CoWoS / InFO，服務 HPC / AI 高效能運算客戶。</a:t>
+            </a:r>
+            <a:endParaRPr lang="en-US" sz="1200" dirty="0"/>
+          </a:p>
+        </p:txBody>
+      </p:sp>
+      <p:sp>
+        <p:nvSpPr>
+          <p:cNvPr id="27" name="Shape 22"/>
+          <p:cNvSpPr/>
+          <p:nvPr/>
+        </p:nvSpPr>
+        <p:spPr>
+          <a:xfrm>
+            <a:off x="9052560" y="3794760"/>
+            <a:ext cx="2670048" cy="2194560"/>
+          </a:xfrm>
+          <a:prstGeom prst="roundRect">
+            <a:avLst>
+              <a:gd name="adj" fmla="val 2917"/>
+            </a:avLst>
+          </a:prstGeom>
+          <a:solidFill>
+            <a:srgbClr val="16264A"/>
+          </a:solidFill>
+          <a:ln/>
+        </p:spPr>
+      </p:sp>
+      <p:sp>
+        <p:nvSpPr>
+          <p:cNvPr id="28" name="Shape 23"/>
+          <p:cNvSpPr/>
+          <p:nvPr/>
+        </p:nvSpPr>
+        <p:spPr>
+          <a:xfrm>
+            <a:off x="9052560" y="3794760"/>
+            <a:ext cx="73152" cy="2194560"/>
+          </a:xfrm>
+          <a:prstGeom prst="rect">
+            <a:avLst/>
+          </a:prstGeom>
+          <a:solidFill>
+            <a:srgbClr val="E0A458"/>
+          </a:solidFill>
+          <a:ln/>
+        </p:spPr>
+      </p:sp>
+      <p:sp>
+        <p:nvSpPr>
+          <p:cNvPr id="29" name="Text 24"/>
+          <p:cNvSpPr/>
+          <p:nvPr/>
+        </p:nvSpPr>
+        <p:spPr>
+          <a:xfrm>
+            <a:off x="9326880" y="4023360"/>
+            <a:ext cx="2212848" cy="457200"/>
+          </a:xfrm>
+          <a:prstGeom prst="rect">
+            <a:avLst/>
+          </a:prstGeom>
+          <a:noFill/>
+          <a:ln/>
+        </p:spPr>
+        <p:txBody>
+          <a:bodyPr wrap="square" rtlCol="0" anchor="ctr"/>
+          <a:lstStyle/>
+          <a:p>
+            <a:pPr indent="0" marL="0">
+              <a:buNone/>
+            </a:pPr>
+            <a:r>
+              <a:rPr lang="en-US" sz="1600" b="1" dirty="0">
+                <a:solidFill>
+                  <a:srgbClr val="FFFFFF"/>
+                </a:solidFill>
+                <a:latin typeface="Noto Serif CJK TC" pitchFamily="34" charset="0"/>
+                <a:ea typeface="Noto Serif CJK TC" pitchFamily="34" charset="-122"/>
+                <a:cs typeface="Noto Serif CJK TC" pitchFamily="34" charset="-120"/>
+              </a:rPr>
+              <a:t>全美供應鏈訴求</a:t>
+            </a:r>
+            <a:endParaRPr lang="en-US" sz="1600" dirty="0"/>
+          </a:p>
+        </p:txBody>
+      </p:sp>
+      <p:sp>
+        <p:nvSpPr>
+          <p:cNvPr id="30" name="Text 25"/>
+          <p:cNvSpPr/>
+          <p:nvPr/>
+        </p:nvSpPr>
+        <p:spPr>
+          <a:xfrm>
+            <a:off x="9326880" y="4572000"/>
+            <a:ext cx="2167128" cy="1280160"/>
+          </a:xfrm>
+          <a:prstGeom prst="rect">
+            <a:avLst/>
+          </a:prstGeom>
+          <a:noFill/>
+          <a:ln/>
+        </p:spPr>
+        <p:txBody>
+          <a:bodyPr wrap="square" rtlCol="0" anchor="t"/>
+          <a:lstStyle/>
+          <a:p>
+            <a:pPr indent="0" marL="0">
+              <a:lnSpc>
+                <a:spcPct val="108000"/>
+              </a:lnSpc>
+              <a:buNone/>
+            </a:pPr>
+            <a:r>
+              <a:rPr lang="en-US" sz="1200" dirty="0">
+                <a:solidFill>
+                  <a:srgbClr val="AFC6E9"/>
+                </a:solidFill>
+                <a:latin typeface="Noto Sans CJK TC" pitchFamily="34" charset="0"/>
+                <a:ea typeface="Noto Sans CJK TC" pitchFamily="34" charset="-122"/>
+                <a:cs typeface="Noto Sans CJK TC" pitchFamily="34" charset="-120"/>
+              </a:rPr>
+              <a:t>矽到封測不出境，回應客戶對 geographic flexibility 的需求。</a:t>
+            </a:r>
+            <a:endParaRPr lang="en-US" sz="1200" dirty="0"/>
+          </a:p>
+        </p:txBody>
+      </p:sp>
+    </p:spTree>
+  </p:cSld>
+  <p:clrMapOvr>
+    <a:masterClrMapping/>
+  </p:clrMapOvr>
+</p:sld>
+</file>
+
+<file path=ppt/slides/slide11.xml><?xml version="1.0" encoding="utf-8"?>
+<p:sld xmlns:a="http://schemas.openxmlformats.org/drawingml/2006/main" xmlns:r="http://schemas.openxmlformats.org/officeDocument/2006/relationships" xmlns:p="http://schemas.openxmlformats.org/presentationml/2006/main">
+  <p:cSld name="Slide 11">
+    <p:bg>
+      <p:bgPr>
+        <a:solidFill>
           <a:srgbClr val="F4F6FA"/>
         </a:solidFill>
       </p:bgPr>
@@ -3987,7 +5079,7 @@
       </p:sp>
       <p:graphicFrame>
         <p:nvGraphicFramePr>
-          <p:cNvPr id="11" name="Table 0"/>
+          <p:cNvPr id="12" name="Table 0"/>
           <p:cNvGraphicFramePr>
             <a:graphicFrameLocks noGrp="1"/>
           </p:cNvGraphicFramePr>
@@ -5196,9 +6288,9 @@
 </p:sld>
 </file>
 
-<file path=ppt/slides/slide11.xml><?xml version="1.0" encoding="utf-8"?>
+<file path=ppt/slides/slide12.xml><?xml version="1.0" encoding="utf-8"?>
 <p:sld xmlns:a="http://schemas.openxmlformats.org/drawingml/2006/main" xmlns:r="http://schemas.openxmlformats.org/officeDocument/2006/relationships" xmlns:p="http://schemas.openxmlformats.org/presentationml/2006/main">
-  <p:cSld name="Slide 11">
+  <p:cSld name="Slide 12">
     <p:bg>
       <p:bgPr>
         <a:solidFill>
@@ -5253,7 +6345,7 @@
                 <a:ea typeface="Noto Sans CJK TC" pitchFamily="34" charset="-122"/>
                 <a:cs typeface="Noto Sans CJK TC" pitchFamily="34" charset="-120"/>
               </a:rPr>
-              <a:t>INTEL × ECOSYSTEM</a:t>
+              <a:t>INTEL × UMC</a:t>
             </a:r>
             <a:endParaRPr lang="en-US" sz="1200" dirty="0"/>
           </a:p>
@@ -5292,7 +6384,7 @@
                 <a:ea typeface="Noto Serif CJK TC" pitchFamily="34" charset="-122"/>
                 <a:cs typeface="Noto Serif CJK TC" pitchFamily="34" charset="-120"/>
               </a:rPr>
-              <a:t>Intel 目前的合作方式：同時是客戶，也是對手</a:t>
+              <a:t>Intel 找 UMC，補的不是「會不會做晶圓」</a:t>
             </a:r>
             <a:endParaRPr lang="en-US" sz="2800" dirty="0"/>
           </a:p>
@@ -5300,18 +6392,57 @@
       </p:sp>
       <p:sp>
         <p:nvSpPr>
-          <p:cNvPr id="4" name="Shape 2"/>
-          <p:cNvSpPr/>
-          <p:nvPr/>
-        </p:nvSpPr>
-        <p:spPr>
-          <a:xfrm>
-            <a:off x="548640" y="1600200"/>
-            <a:ext cx="5440680" cy="3703320"/>
+          <p:cNvPr id="4" name="Text 2"/>
+          <p:cNvSpPr/>
+          <p:nvPr/>
+        </p:nvSpPr>
+        <p:spPr>
+          <a:xfrm>
+            <a:off x="548640" y="1371600"/>
+            <a:ext cx="11064240" cy="502920"/>
+          </a:xfrm>
+          <a:prstGeom prst="rect">
+            <a:avLst/>
+          </a:prstGeom>
+          <a:noFill/>
+          <a:ln/>
+        </p:spPr>
+        <p:txBody>
+          <a:bodyPr wrap="square" rtlCol="0" anchor="ctr"/>
+          <a:lstStyle/>
+          <a:p>
+            <a:pPr indent="0" marL="0">
+              <a:buNone/>
+            </a:pPr>
+            <a:r>
+              <a:rPr lang="en-US" sz="1400" dirty="0">
+                <a:solidFill>
+                  <a:srgbClr val="AFC6E9"/>
+                </a:solidFill>
+                <a:latin typeface="Noto Sans CJK TC" pitchFamily="34" charset="0"/>
+                <a:ea typeface="Noto Sans CJK TC" pitchFamily="34" charset="-122"/>
+                <a:cs typeface="Noto Sans CJK TC" pitchFamily="34" charset="-120"/>
+              </a:rPr>
+              <a:t>Intel 是很會做高難度製程的製造巨人，但還在學怎麼當純 foundry；UMC 是成熟的純 foundry，但沒有 Intel 的先進製程與美國製造資產。</a:t>
+            </a:r>
+            <a:endParaRPr lang="en-US" sz="1400" dirty="0"/>
+          </a:p>
+        </p:txBody>
+      </p:sp>
+      <p:sp>
+        <p:nvSpPr>
+          <p:cNvPr id="5" name="Shape 3"/>
+          <p:cNvSpPr/>
+          <p:nvPr/>
+        </p:nvSpPr>
+        <p:spPr>
+          <a:xfrm>
+            <a:off x="548640" y="2011680"/>
+            <a:ext cx="5440680" cy="2743200"/>
           </a:xfrm>
           <a:prstGeom prst="roundRect">
             <a:avLst>
-              <a:gd name="adj" fmla="val 1975"/>
+              <a:gd name="adj" fmla="val 2667"/>
             </a:avLst>
           </a:prstGeom>
           <a:solidFill>
@@ -5322,58 +6453,389 @@
       </p:sp>
       <p:sp>
         <p:nvSpPr>
-          <p:cNvPr id="5" name="Shape 3"/>
-          <p:cNvSpPr/>
-          <p:nvPr/>
-        </p:nvSpPr>
-        <p:spPr>
-          <a:xfrm>
-            <a:off x="914400" y="1965960"/>
-            <a:ext cx="713232" cy="713232"/>
-          </a:xfrm>
-          <a:prstGeom prst="ellipse">
-            <a:avLst/>
+          <p:cNvPr id="6" name="Text 4"/>
+          <p:cNvSpPr/>
+          <p:nvPr/>
+        </p:nvSpPr>
+        <p:spPr>
+          <a:xfrm>
+            <a:off x="914400" y="2240280"/>
+            <a:ext cx="4709160" cy="457200"/>
+          </a:xfrm>
+          <a:prstGeom prst="rect">
+            <a:avLst/>
+          </a:prstGeom>
+          <a:noFill/>
+          <a:ln/>
+        </p:spPr>
+        <p:txBody>
+          <a:bodyPr wrap="square" rtlCol="0" anchor="ctr"/>
+          <a:lstStyle/>
+          <a:p>
+            <a:pPr indent="0" marL="0">
+              <a:buNone/>
+            </a:pPr>
+            <a:r>
+              <a:rPr lang="en-US" sz="1900" b="1" dirty="0">
+                <a:solidFill>
+                  <a:srgbClr val="FFFFFF"/>
+                </a:solidFill>
+                <a:latin typeface="Noto Serif CJK TC" pitchFamily="34" charset="0"/>
+                <a:ea typeface="Noto Serif CJK TC" pitchFamily="34" charset="-122"/>
+                <a:cs typeface="Noto Serif CJK TC" pitchFamily="34" charset="-120"/>
+              </a:rPr>
+              <a:t>Intel 補 UMC</a:t>
+            </a:r>
+            <a:endParaRPr lang="en-US" sz="1900" dirty="0"/>
+          </a:p>
+        </p:txBody>
+      </p:sp>
+      <p:sp>
+        <p:nvSpPr>
+          <p:cNvPr id="7" name="Text 5"/>
+          <p:cNvSpPr/>
+          <p:nvPr/>
+        </p:nvSpPr>
+        <p:spPr>
+          <a:xfrm>
+            <a:off x="914400" y="2697480"/>
+            <a:ext cx="4709160" cy="320040"/>
+          </a:xfrm>
+          <a:prstGeom prst="rect">
+            <a:avLst/>
+          </a:prstGeom>
+          <a:noFill/>
+          <a:ln/>
+        </p:spPr>
+        <p:txBody>
+          <a:bodyPr wrap="square" rtlCol="0" anchor="ctr"/>
+          <a:lstStyle/>
+          <a:p>
+            <a:pPr indent="0" marL="0">
+              <a:buNone/>
+            </a:pPr>
+            <a:r>
+              <a:rPr lang="en-US" sz="1250" b="1" dirty="0">
+                <a:solidFill>
+                  <a:srgbClr val="37C7C0"/>
+                </a:solidFill>
+                <a:latin typeface="Noto Sans CJK TC" pitchFamily="34" charset="0"/>
+                <a:ea typeface="Noto Sans CJK TC" pitchFamily="34" charset="-122"/>
+                <a:cs typeface="Noto Sans CJK TC" pitchFamily="34" charset="-120"/>
+              </a:rPr>
+              <a:t>Intel → UMC</a:t>
+            </a:r>
+            <a:endParaRPr lang="en-US" sz="1250" dirty="0"/>
+          </a:p>
+        </p:txBody>
+      </p:sp>
+      <p:sp>
+        <p:nvSpPr>
+          <p:cNvPr id="8" name="Text 6"/>
+          <p:cNvSpPr/>
+          <p:nvPr/>
+        </p:nvSpPr>
+        <p:spPr>
+          <a:xfrm>
+            <a:off x="960120" y="3154680"/>
+            <a:ext cx="4663440" cy="1463040"/>
+          </a:xfrm>
+          <a:prstGeom prst="rect">
+            <a:avLst/>
+          </a:prstGeom>
+          <a:noFill/>
+          <a:ln/>
+        </p:spPr>
+        <p:txBody>
+          <a:bodyPr wrap="square" rtlCol="0" anchor="t"/>
+          <a:lstStyle/>
+          <a:p>
+            <a:pPr marL="177800" indent="-177800">
+              <a:spcAft>
+                <a:spcPts val="1000"/>
+              </a:spcAft>
+              <a:buSzPct val="100000"/>
+              <a:buChar char="•"/>
+            </a:pPr>
+            <a:r>
+              <a:rPr lang="en-US" sz="1300" dirty="0">
+                <a:solidFill>
+                  <a:srgbClr val="AFC6E9"/>
+                </a:solidFill>
+                <a:latin typeface="Noto Sans CJK TC" pitchFamily="34" charset="0"/>
+                <a:ea typeface="Noto Sans CJK TC" pitchFamily="34" charset="-122"/>
+                <a:cs typeface="Noto Sans CJK TC" pitchFamily="34" charset="-120"/>
+              </a:rPr>
+              <a:t>先進製造能力、美國 fab 資產</a:t>
+            </a:r>
+            <a:endParaRPr lang="en-US" sz="1300" dirty="0"/>
+          </a:p>
+          <a:p>
+            <a:pPr marL="177800" indent="-177800">
+              <a:spcAft>
+                <a:spcPts val="1000"/>
+              </a:spcAft>
+              <a:buSzPct val="100000"/>
+              <a:buChar char="•"/>
+            </a:pPr>
+            <a:r>
+              <a:rPr lang="en-US" sz="1300" dirty="0">
+                <a:solidFill>
+                  <a:srgbClr val="AFC6E9"/>
+                </a:solidFill>
+                <a:latin typeface="Noto Sans CJK TC" pitchFamily="34" charset="0"/>
+                <a:ea typeface="Noto Sans CJK TC" pitchFamily="34" charset="-122"/>
+                <a:cs typeface="Noto Sans CJK TC" pitchFamily="34" charset="-120"/>
+              </a:rPr>
+              <a:t>FinFET / EUV / 未來先進節點</a:t>
+            </a:r>
+            <a:endParaRPr lang="en-US" sz="1300" dirty="0"/>
+          </a:p>
+          <a:p>
+            <a:pPr marL="177800" indent="-177800">
+              <a:spcAft>
+                <a:spcPts val="1000"/>
+              </a:spcAft>
+              <a:buSzPct val="100000"/>
+              <a:buChar char="•"/>
+            </a:pPr>
+            <a:r>
+              <a:rPr lang="en-US" sz="1300" dirty="0">
+                <a:solidFill>
+                  <a:srgbClr val="AFC6E9"/>
+                </a:solidFill>
+                <a:latin typeface="Noto Sans CJK TC" pitchFamily="34" charset="0"/>
+                <a:ea typeface="Noto Sans CJK TC" pitchFamily="34" charset="-122"/>
+                <a:cs typeface="Noto Sans CJK TC" pitchFamily="34" charset="-120"/>
+              </a:rPr>
+              <a:t>先進封裝（EMIB / Foveros）</a:t>
+            </a:r>
+            <a:endParaRPr lang="en-US" sz="1300" dirty="0"/>
+          </a:p>
+        </p:txBody>
+      </p:sp>
+      <p:sp>
+        <p:nvSpPr>
+          <p:cNvPr id="9" name="Shape 7"/>
+          <p:cNvSpPr/>
+          <p:nvPr/>
+        </p:nvSpPr>
+        <p:spPr>
+          <a:xfrm>
+            <a:off x="6172200" y="2011680"/>
+            <a:ext cx="5440680" cy="2743200"/>
+          </a:xfrm>
+          <a:prstGeom prst="roundRect">
+            <a:avLst>
+              <a:gd name="adj" fmla="val 2667"/>
+            </a:avLst>
+          </a:prstGeom>
+          <a:solidFill>
+            <a:srgbClr val="16264A"/>
+          </a:solidFill>
+          <a:ln/>
+        </p:spPr>
+      </p:sp>
+      <p:sp>
+        <p:nvSpPr>
+          <p:cNvPr id="10" name="Text 8"/>
+          <p:cNvSpPr/>
+          <p:nvPr/>
+        </p:nvSpPr>
+        <p:spPr>
+          <a:xfrm>
+            <a:off x="6537960" y="2240280"/>
+            <a:ext cx="4709160" cy="457200"/>
+          </a:xfrm>
+          <a:prstGeom prst="rect">
+            <a:avLst/>
+          </a:prstGeom>
+          <a:noFill/>
+          <a:ln/>
+        </p:spPr>
+        <p:txBody>
+          <a:bodyPr wrap="square" rtlCol="0" anchor="ctr"/>
+          <a:lstStyle/>
+          <a:p>
+            <a:pPr indent="0" marL="0">
+              <a:buNone/>
+            </a:pPr>
+            <a:r>
+              <a:rPr lang="en-US" sz="1900" b="1" dirty="0">
+                <a:solidFill>
+                  <a:srgbClr val="FFFFFF"/>
+                </a:solidFill>
+                <a:latin typeface="Noto Serif CJK TC" pitchFamily="34" charset="0"/>
+                <a:ea typeface="Noto Serif CJK TC" pitchFamily="34" charset="-122"/>
+                <a:cs typeface="Noto Serif CJK TC" pitchFamily="34" charset="-120"/>
+              </a:rPr>
+              <a:t>UMC 補 Intel</a:t>
+            </a:r>
+            <a:endParaRPr lang="en-US" sz="1900" dirty="0"/>
+          </a:p>
+        </p:txBody>
+      </p:sp>
+      <p:sp>
+        <p:nvSpPr>
+          <p:cNvPr id="11" name="Text 9"/>
+          <p:cNvSpPr/>
+          <p:nvPr/>
+        </p:nvSpPr>
+        <p:spPr>
+          <a:xfrm>
+            <a:off x="6537960" y="2697480"/>
+            <a:ext cx="4709160" cy="320040"/>
+          </a:xfrm>
+          <a:prstGeom prst="rect">
+            <a:avLst/>
+          </a:prstGeom>
+          <a:noFill/>
+          <a:ln/>
+        </p:spPr>
+        <p:txBody>
+          <a:bodyPr wrap="square" rtlCol="0" anchor="ctr"/>
+          <a:lstStyle/>
+          <a:p>
+            <a:pPr indent="0" marL="0">
+              <a:buNone/>
+            </a:pPr>
+            <a:r>
+              <a:rPr lang="en-US" sz="1250" b="1" dirty="0">
+                <a:solidFill>
+                  <a:srgbClr val="E0A458"/>
+                </a:solidFill>
+                <a:latin typeface="Noto Sans CJK TC" pitchFamily="34" charset="0"/>
+                <a:ea typeface="Noto Sans CJK TC" pitchFamily="34" charset="-122"/>
+                <a:cs typeface="Noto Sans CJK TC" pitchFamily="34" charset="-120"/>
+              </a:rPr>
+              <a:t>UMC → Intel</a:t>
+            </a:r>
+            <a:endParaRPr lang="en-US" sz="1250" dirty="0"/>
+          </a:p>
+        </p:txBody>
+      </p:sp>
+      <p:sp>
+        <p:nvSpPr>
+          <p:cNvPr id="12" name="Text 10"/>
+          <p:cNvSpPr/>
+          <p:nvPr/>
+        </p:nvSpPr>
+        <p:spPr>
+          <a:xfrm>
+            <a:off x="6583680" y="3154680"/>
+            <a:ext cx="4663440" cy="1463040"/>
+          </a:xfrm>
+          <a:prstGeom prst="rect">
+            <a:avLst/>
+          </a:prstGeom>
+          <a:noFill/>
+          <a:ln/>
+        </p:spPr>
+        <p:txBody>
+          <a:bodyPr wrap="square" rtlCol="0" anchor="t"/>
+          <a:lstStyle/>
+          <a:p>
+            <a:pPr marL="177800" indent="-177800">
+              <a:spcAft>
+                <a:spcPts val="1000"/>
+              </a:spcAft>
+              <a:buSzPct val="100000"/>
+              <a:buChar char="•"/>
+            </a:pPr>
+            <a:r>
+              <a:rPr lang="en-US" sz="1300" dirty="0">
+                <a:solidFill>
+                  <a:srgbClr val="AFC6E9"/>
+                </a:solidFill>
+                <a:latin typeface="Noto Sans CJK TC" pitchFamily="34" charset="0"/>
+                <a:ea typeface="Noto Sans CJK TC" pitchFamily="34" charset="-122"/>
+                <a:cs typeface="Noto Sans CJK TC" pitchFamily="34" charset="-120"/>
+              </a:rPr>
+              <a:t>成熟 foundry service 與客戶導入</a:t>
+            </a:r>
+            <a:endParaRPr lang="en-US" sz="1300" dirty="0"/>
+          </a:p>
+          <a:p>
+            <a:pPr marL="177800" indent="-177800">
+              <a:spcAft>
+                <a:spcPts val="1000"/>
+              </a:spcAft>
+              <a:buSzPct val="100000"/>
+              <a:buChar char="•"/>
+            </a:pPr>
+            <a:r>
+              <a:rPr lang="en-US" sz="1300" dirty="0">
+                <a:solidFill>
+                  <a:srgbClr val="AFC6E9"/>
+                </a:solidFill>
+                <a:latin typeface="Noto Sans CJK TC" pitchFamily="34" charset="0"/>
+                <a:ea typeface="Noto Sans CJK TC" pitchFamily="34" charset="-122"/>
+                <a:cs typeface="Noto Sans CJK TC" pitchFamily="34" charset="-120"/>
+              </a:rPr>
+              <a:t>PDK / EDA / IP 生態系協調</a:t>
+            </a:r>
+            <a:endParaRPr lang="en-US" sz="1300" dirty="0"/>
+          </a:p>
+          <a:p>
+            <a:pPr marL="177800" indent="-177800">
+              <a:spcAft>
+                <a:spcPts val="1000"/>
+              </a:spcAft>
+              <a:buSzPct val="100000"/>
+              <a:buChar char="•"/>
+            </a:pPr>
+            <a:r>
+              <a:rPr lang="en-US" sz="1300" dirty="0">
+                <a:solidFill>
+                  <a:srgbClr val="AFC6E9"/>
+                </a:solidFill>
+                <a:latin typeface="Noto Sans CJK TC" pitchFamily="34" charset="0"/>
+                <a:ea typeface="Noto Sans CJK TC" pitchFamily="34" charset="-122"/>
+                <a:cs typeface="Noto Sans CJK TC" pitchFamily="34" charset="-120"/>
+              </a:rPr>
+              <a:t>外部客戶量產與成熟節點商業化經驗</a:t>
+            </a:r>
+            <a:endParaRPr lang="en-US" sz="1300" dirty="0"/>
+          </a:p>
+        </p:txBody>
+      </p:sp>
+      <p:sp>
+        <p:nvSpPr>
+          <p:cNvPr id="13" name="Shape 11"/>
+          <p:cNvSpPr/>
+          <p:nvPr/>
+        </p:nvSpPr>
+        <p:spPr>
+          <a:xfrm>
+            <a:off x="548640" y="4937760"/>
+            <a:ext cx="11064240" cy="1097280"/>
+          </a:xfrm>
+          <a:prstGeom prst="roundRect">
+            <a:avLst>
+              <a:gd name="adj" fmla="val 5833"/>
+            </a:avLst>
           </a:prstGeom>
           <a:solidFill>
             <a:srgbClr val="0E1B33"/>
           </a:solidFill>
-          <a:ln/>
-        </p:spPr>
-      </p:sp>
-      <p:pic>
-        <p:nvPicPr>
-          <p:cNvPr id="6" name="Image 0" descr="preencoded.png">    </p:cNvPr>
-          <p:cNvPicPr>
-            <a:picLocks noChangeAspect="1"/>
-          </p:cNvPicPr>
-          <p:nvPr/>
-        </p:nvPicPr>
-        <p:blipFill>
-          <a:blip r:embed="rId1"/>
-          <a:stretch>
-            <a:fillRect/>
-          </a:stretch>
-        </p:blipFill>
-        <p:spPr>
-          <a:xfrm>
-            <a:off x="1078992" y="2130552"/>
-            <a:ext cx="384048" cy="384048"/>
-          </a:xfrm>
-          <a:prstGeom prst="rect">
-            <a:avLst/>
-          </a:prstGeom>
-        </p:spPr>
-      </p:pic>
-      <p:sp>
-        <p:nvSpPr>
-          <p:cNvPr id="7" name="Text 4"/>
-          <p:cNvSpPr/>
-          <p:nvPr/>
-        </p:nvSpPr>
-        <p:spPr>
-          <a:xfrm>
-            <a:off x="1783080" y="2011680"/>
-            <a:ext cx="4023360" cy="411480"/>
+          <a:ln w="12700">
+            <a:solidFill>
+              <a:srgbClr val="274472"/>
+            </a:solidFill>
+            <a:prstDash val="solid"/>
+          </a:ln>
+        </p:spPr>
+      </p:sp>
+      <p:sp>
+        <p:nvSpPr>
+          <p:cNvPr id="14" name="Text 12"/>
+          <p:cNvSpPr/>
+          <p:nvPr/>
+        </p:nvSpPr>
+        <p:spPr>
+          <a:xfrm>
+            <a:off x="914400" y="4937760"/>
+            <a:ext cx="10332720" cy="1097280"/>
           </a:xfrm>
           <a:prstGeom prst="rect">
             <a:avLst/>
@@ -5389,46 +6851,7 @@
               <a:buNone/>
             </a:pPr>
             <a:r>
-              <a:rPr lang="en-US" sz="1900" b="1" dirty="0">
-                <a:solidFill>
-                  <a:srgbClr val="FFFFFF"/>
-                </a:solidFill>
-                <a:latin typeface="Noto Serif CJK TC" pitchFamily="34" charset="0"/>
-                <a:ea typeface="Noto Serif CJK TC" pitchFamily="34" charset="-122"/>
-                <a:cs typeface="Noto Serif CJK TC" pitchFamily="34" charset="-120"/>
-              </a:rPr>
-              <a:t>身份一：Amkor 的客戶</a:t>
-            </a:r>
-            <a:endParaRPr lang="en-US" sz="1900" dirty="0"/>
-          </a:p>
-        </p:txBody>
-      </p:sp>
-      <p:sp>
-        <p:nvSpPr>
-          <p:cNvPr id="8" name="Text 5"/>
-          <p:cNvSpPr/>
-          <p:nvPr/>
-        </p:nvSpPr>
-        <p:spPr>
-          <a:xfrm>
-            <a:off x="1783080" y="2450592"/>
-            <a:ext cx="4023360" cy="320040"/>
-          </a:xfrm>
-          <a:prstGeom prst="rect">
-            <a:avLst/>
-          </a:prstGeom>
-          <a:noFill/>
-          <a:ln/>
-        </p:spPr>
-        <p:txBody>
-          <a:bodyPr wrap="square" rtlCol="0" anchor="ctr"/>
-          <a:lstStyle/>
-          <a:p>
-            <a:pPr indent="0" marL="0">
-              <a:buNone/>
-            </a:pPr>
-            <a:r>
-              <a:rPr lang="en-US" sz="1250" b="1" dirty="0">
+              <a:rPr lang="en-US" sz="1400" b="1" dirty="0">
                 <a:solidFill>
                   <a:srgbClr val="37C7C0"/>
                 </a:solidFill>
@@ -5436,42 +6859,13 @@
                 <a:ea typeface="Noto Sans CJK TC" pitchFamily="34" charset="-122"/>
                 <a:cs typeface="Noto Sans CJK TC" pitchFamily="34" charset="-120"/>
               </a:rPr>
-              <a:t>Outsourced packaging</a:t>
-            </a:r>
-            <a:endParaRPr lang="en-US" sz="1250" dirty="0"/>
-          </a:p>
-        </p:txBody>
-      </p:sp>
-      <p:sp>
-        <p:nvSpPr>
-          <p:cNvPr id="9" name="Text 6"/>
-          <p:cNvSpPr/>
-          <p:nvPr/>
-        </p:nvSpPr>
-        <p:spPr>
-          <a:xfrm>
-            <a:off x="960120" y="2971800"/>
-            <a:ext cx="4663440" cy="2194560"/>
-          </a:xfrm>
-          <a:prstGeom prst="rect">
-            <a:avLst/>
-          </a:prstGeom>
-          <a:noFill/>
-          <a:ln/>
-        </p:spPr>
-        <p:txBody>
-          <a:bodyPr wrap="square" rtlCol="0" anchor="t"/>
-          <a:lstStyle/>
-          <a:p>
-            <a:pPr marL="177800" indent="-177800">
-              <a:spcAft>
-                <a:spcPts val="1300"/>
-              </a:spcAft>
-              <a:buSzPct val="100000"/>
-              <a:buChar char="•"/>
-            </a:pPr>
-            <a:r>
-              <a:rPr lang="en-US" sz="1350" dirty="0">
+              <a:t>比喻：  </a:t>
+            </a:r>
+            <a:pPr indent="0" marL="0">
+              <a:buNone/>
+            </a:pPr>
+            <a:r>
+              <a:rPr lang="en-US" sz="1400" dirty="0">
                 <a:solidFill>
                   <a:srgbClr val="AFC6E9"/>
                 </a:solidFill>
@@ -5479,969 +6873,9 @@
                 <a:ea typeface="Noto Sans CJK TC" pitchFamily="34" charset="-122"/>
                 <a:cs typeface="Noto Sans CJK TC" pitchFamily="34" charset="-120"/>
               </a:rPr>
-              <a:t>首度把 EMIB 封裝外包給 Amkor</a:t>
-            </a:r>
-            <a:endParaRPr lang="en-US" sz="1350" dirty="0"/>
-          </a:p>
-          <a:p>
-            <a:pPr marL="177800" indent="-177800">
-              <a:spcAft>
-                <a:spcPts val="1300"/>
-              </a:spcAft>
-              <a:buSzPct val="100000"/>
-              <a:buChar char="•"/>
-            </a:pPr>
-            <a:r>
-              <a:rPr lang="en-US" sz="1350" dirty="0">
-                <a:solidFill>
-                  <a:srgbClr val="AFC6E9"/>
-                </a:solidFill>
-                <a:latin typeface="Noto Sans CJK TC" pitchFamily="34" charset="0"/>
-                <a:ea typeface="Noto Sans CJK TC" pitchFamily="34" charset="-122"/>
-                <a:cs typeface="Noto Sans CJK TC" pitchFamily="34" charset="-120"/>
-              </a:rPr>
-              <a:t>據點：南韓 Songdo、葡萄牙、亞利桑那</a:t>
-            </a:r>
-            <a:endParaRPr lang="en-US" sz="1350" dirty="0"/>
-          </a:p>
-          <a:p>
-            <a:pPr marL="177800" indent="-177800">
-              <a:spcAft>
-                <a:spcPts val="1300"/>
-              </a:spcAft>
-              <a:buSzPct val="100000"/>
-              <a:buChar char="•"/>
-            </a:pPr>
-            <a:r>
-              <a:rPr lang="en-US" sz="1350" dirty="0">
-                <a:solidFill>
-                  <a:srgbClr val="AFC6E9"/>
-                </a:solidFill>
-                <a:latin typeface="Noto Sans CJK TC" pitchFamily="34" charset="0"/>
-                <a:ea typeface="Noto Sans CJK TC" pitchFamily="34" charset="-122"/>
-                <a:cs typeface="Noto Sans CJK TC" pitchFamily="34" charset="-120"/>
-              </a:rPr>
-              <a:t>目的：快速擴產、避免晶圓出海做後段</a:t>
-            </a:r>
-            <a:endParaRPr lang="en-US" sz="1350" dirty="0"/>
-          </a:p>
-        </p:txBody>
-      </p:sp>
-      <p:sp>
-        <p:nvSpPr>
-          <p:cNvPr id="10" name="Shape 7"/>
-          <p:cNvSpPr/>
-          <p:nvPr/>
-        </p:nvSpPr>
-        <p:spPr>
-          <a:xfrm>
-            <a:off x="6172200" y="1600200"/>
-            <a:ext cx="5440680" cy="3703320"/>
-          </a:xfrm>
-          <a:prstGeom prst="roundRect">
-            <a:avLst>
-              <a:gd name="adj" fmla="val 1975"/>
-            </a:avLst>
-          </a:prstGeom>
-          <a:solidFill>
-            <a:srgbClr val="16264A"/>
-          </a:solidFill>
-          <a:ln/>
-        </p:spPr>
-      </p:sp>
-      <p:sp>
-        <p:nvSpPr>
-          <p:cNvPr id="11" name="Shape 8"/>
-          <p:cNvSpPr/>
-          <p:nvPr/>
-        </p:nvSpPr>
-        <p:spPr>
-          <a:xfrm>
-            <a:off x="6537960" y="1965960"/>
-            <a:ext cx="713232" cy="713232"/>
-          </a:xfrm>
-          <a:prstGeom prst="ellipse">
-            <a:avLst/>
-          </a:prstGeom>
-          <a:solidFill>
-            <a:srgbClr val="0E1B33"/>
-          </a:solidFill>
-          <a:ln/>
-        </p:spPr>
-      </p:sp>
-      <p:pic>
-        <p:nvPicPr>
-          <p:cNvPr id="12" name="Image 1" descr="preencoded.png">    </p:cNvPr>
-          <p:cNvPicPr>
-            <a:picLocks noChangeAspect="1"/>
-          </p:cNvPicPr>
-          <p:nvPr/>
-        </p:nvPicPr>
-        <p:blipFill>
-          <a:blip r:embed="rId2"/>
-          <a:stretch>
-            <a:fillRect/>
-          </a:stretch>
-        </p:blipFill>
-        <p:spPr>
-          <a:xfrm>
-            <a:off x="6702552" y="2130552"/>
-            <a:ext cx="384048" cy="384048"/>
-          </a:xfrm>
-          <a:prstGeom prst="rect">
-            <a:avLst/>
-          </a:prstGeom>
-        </p:spPr>
-      </p:pic>
-      <p:sp>
-        <p:nvSpPr>
-          <p:cNvPr id="13" name="Text 9"/>
-          <p:cNvSpPr/>
-          <p:nvPr/>
-        </p:nvSpPr>
-        <p:spPr>
-          <a:xfrm>
-            <a:off x="7406640" y="2011680"/>
-            <a:ext cx="4023360" cy="411480"/>
-          </a:xfrm>
-          <a:prstGeom prst="rect">
-            <a:avLst/>
-          </a:prstGeom>
-          <a:noFill/>
-          <a:ln/>
-        </p:spPr>
-        <p:txBody>
-          <a:bodyPr wrap="square" rtlCol="0" anchor="ctr"/>
-          <a:lstStyle/>
-          <a:p>
-            <a:pPr indent="0" marL="0">
-              <a:buNone/>
-            </a:pPr>
-            <a:r>
-              <a:rPr lang="en-US" sz="1900" b="1" dirty="0">
-                <a:solidFill>
-                  <a:srgbClr val="FFFFFF"/>
-                </a:solidFill>
-                <a:latin typeface="Noto Serif CJK TC" pitchFamily="34" charset="0"/>
-                <a:ea typeface="Noto Serif CJK TC" pitchFamily="34" charset="-122"/>
-                <a:cs typeface="Noto Serif CJK TC" pitchFamily="34" charset="-120"/>
-              </a:rPr>
-              <a:t>身份二：封裝市場競爭者</a:t>
-            </a:r>
-            <a:endParaRPr lang="en-US" sz="1900" dirty="0"/>
-          </a:p>
-        </p:txBody>
-      </p:sp>
-      <p:sp>
-        <p:nvSpPr>
-          <p:cNvPr id="14" name="Text 10"/>
-          <p:cNvSpPr/>
-          <p:nvPr/>
-        </p:nvSpPr>
-        <p:spPr>
-          <a:xfrm>
-            <a:off x="7406640" y="2450592"/>
-            <a:ext cx="4023360" cy="320040"/>
-          </a:xfrm>
-          <a:prstGeom prst="rect">
-            <a:avLst/>
-          </a:prstGeom>
-          <a:noFill/>
-          <a:ln/>
-        </p:spPr>
-        <p:txBody>
-          <a:bodyPr wrap="square" rtlCol="0" anchor="ctr"/>
-          <a:lstStyle/>
-          <a:p>
-            <a:pPr indent="0" marL="0">
-              <a:buNone/>
-            </a:pPr>
-            <a:r>
-              <a:rPr lang="en-US" sz="1250" b="1" dirty="0">
-                <a:solidFill>
-                  <a:srgbClr val="E0A458"/>
-                </a:solidFill>
-                <a:latin typeface="Noto Sans CJK TC" pitchFamily="34" charset="0"/>
-                <a:ea typeface="Noto Sans CJK TC" pitchFamily="34" charset="-122"/>
-                <a:cs typeface="Noto Sans CJK TC" pitchFamily="34" charset="-120"/>
-              </a:rPr>
-              <a:t>Intel Foundry packaging</a:t>
-            </a:r>
-            <a:endParaRPr lang="en-US" sz="1250" dirty="0"/>
-          </a:p>
-        </p:txBody>
-      </p:sp>
-      <p:sp>
-        <p:nvSpPr>
-          <p:cNvPr id="15" name="Text 11"/>
-          <p:cNvSpPr/>
-          <p:nvPr/>
-        </p:nvSpPr>
-        <p:spPr>
-          <a:xfrm>
-            <a:off x="6583680" y="2971800"/>
-            <a:ext cx="4663440" cy="2194560"/>
-          </a:xfrm>
-          <a:prstGeom prst="rect">
-            <a:avLst/>
-          </a:prstGeom>
-          <a:noFill/>
-          <a:ln/>
-        </p:spPr>
-        <p:txBody>
-          <a:bodyPr wrap="square" rtlCol="0" anchor="t"/>
-          <a:lstStyle/>
-          <a:p>
-            <a:pPr marL="177800" indent="-177800">
-              <a:spcAft>
-                <a:spcPts val="1300"/>
-              </a:spcAft>
-              <a:buSzPct val="100000"/>
-              <a:buChar char="•"/>
-            </a:pPr>
-            <a:r>
-              <a:rPr lang="en-US" sz="1350" dirty="0">
-                <a:solidFill>
-                  <a:srgbClr val="AFC6E9"/>
-                </a:solidFill>
-                <a:latin typeface="Noto Sans CJK TC" pitchFamily="34" charset="0"/>
-                <a:ea typeface="Noto Sans CJK TC" pitchFamily="34" charset="-122"/>
-                <a:cs typeface="Noto Sans CJK TC" pitchFamily="34" charset="-120"/>
-              </a:rPr>
-              <a:t>EMIB / Foveros / EMIB-T 對外銷售</a:t>
-            </a:r>
-            <a:endParaRPr lang="en-US" sz="1350" dirty="0"/>
-          </a:p>
-          <a:p>
-            <a:pPr marL="177800" indent="-177800">
-              <a:spcAft>
-                <a:spcPts val="1300"/>
-              </a:spcAft>
-              <a:buSzPct val="100000"/>
-              <a:buChar char="•"/>
-            </a:pPr>
-            <a:r>
-              <a:rPr lang="en-US" sz="1350" dirty="0">
-                <a:solidFill>
-                  <a:srgbClr val="AFC6E9"/>
-                </a:solidFill>
-                <a:latin typeface="Noto Sans CJK TC" pitchFamily="34" charset="0"/>
-                <a:ea typeface="Noto Sans CJK TC" pitchFamily="34" charset="-122"/>
-                <a:cs typeface="Noto Sans CJK TC" pitchFamily="34" charset="-120"/>
-              </a:rPr>
-              <a:t>傳聞客戶：Google、Amazon（AI ASIC）</a:t>
-            </a:r>
-            <a:endParaRPr lang="en-US" sz="1350" dirty="0"/>
-          </a:p>
-          <a:p>
-            <a:pPr marL="177800" indent="-177800">
-              <a:spcAft>
-                <a:spcPts val="1300"/>
-              </a:spcAft>
-              <a:buSzPct val="100000"/>
-              <a:buChar char="•"/>
-            </a:pPr>
-            <a:r>
-              <a:rPr lang="en-US" sz="1350" dirty="0">
-                <a:solidFill>
-                  <a:srgbClr val="AFC6E9"/>
-                </a:solidFill>
-                <a:latin typeface="Noto Sans CJK TC" pitchFamily="34" charset="0"/>
-                <a:ea typeface="Noto Sans CJK TC" pitchFamily="34" charset="-122"/>
-                <a:cs typeface="Noto Sans CJK TC" pitchFamily="34" charset="-120"/>
-              </a:rPr>
-              <a:t>把封裝當 foundry 切入點，挑戰 CoWoS</a:t>
-            </a:r>
-            <a:endParaRPr lang="en-US" sz="1350" dirty="0"/>
-          </a:p>
-        </p:txBody>
-      </p:sp>
-      <p:sp>
-        <p:nvSpPr>
-          <p:cNvPr id="16" name="Text 12"/>
-          <p:cNvSpPr/>
-          <p:nvPr/>
-        </p:nvSpPr>
-        <p:spPr>
-          <a:xfrm>
-            <a:off x="548640" y="5486400"/>
-            <a:ext cx="10972800" cy="320040"/>
-          </a:xfrm>
-          <a:prstGeom prst="rect">
-            <a:avLst/>
-          </a:prstGeom>
-          <a:noFill/>
-          <a:ln/>
-        </p:spPr>
-        <p:txBody>
-          <a:bodyPr wrap="square" rtlCol="0" anchor="ctr"/>
-          <a:lstStyle/>
-          <a:p>
-            <a:pPr indent="0" marL="0">
-              <a:buNone/>
-            </a:pPr>
-            <a:r>
-              <a:rPr lang="en-US" sz="1050" i="1" dirty="0">
-                <a:solidFill>
-                  <a:srgbClr val="6B7894"/>
-                </a:solidFill>
-                <a:latin typeface="Noto Sans CJK TC" pitchFamily="34" charset="0"/>
-                <a:ea typeface="Noto Sans CJK TC" pitchFamily="34" charset="-122"/>
-                <a:cs typeface="Noto Sans CJK TC" pitchFamily="34" charset="-120"/>
-              </a:rPr>
-              <a:t>資料：2025–2026 公開報導（Amkor IR、Intel Foundry、Tom's Hardware、DigiTimes 等）</a:t>
-            </a:r>
-            <a:endParaRPr lang="en-US" sz="1050" dirty="0"/>
-          </a:p>
-        </p:txBody>
-      </p:sp>
-    </p:spTree>
-  </p:cSld>
-  <p:clrMapOvr>
-    <a:masterClrMapping/>
-  </p:clrMapOvr>
-</p:sld>
-</file>
-
-<file path=ppt/slides/slide12.xml><?xml version="1.0" encoding="utf-8"?>
-<p:sld xmlns:a="http://schemas.openxmlformats.org/drawingml/2006/main" xmlns:r="http://schemas.openxmlformats.org/officeDocument/2006/relationships" xmlns:p="http://schemas.openxmlformats.org/presentationml/2006/main">
-  <p:cSld name="Slide 12">
-    <p:bg>
-      <p:bgPr>
-        <a:solidFill>
-          <a:srgbClr val="F4F6FA"/>
-        </a:solidFill>
-      </p:bgPr>
-    </p:bg>
-    <p:spTree>
-      <p:nvGrpSpPr>
-        <p:cNvPr id="1" name=""/>
-        <p:cNvGrpSpPr/>
-        <p:nvPr/>
-      </p:nvGrpSpPr>
-      <p:grpSpPr>
-        <a:xfrm>
-          <a:off x="0" y="0"/>
-          <a:ext cx="0" cy="0"/>
-          <a:chOff x="0" y="0"/>
-          <a:chExt cx="0" cy="0"/>
-        </a:xfrm>
-      </p:grpSpPr>
-      <p:sp>
-        <p:nvSpPr>
-          <p:cNvPr id="2" name="Text 0"/>
-          <p:cNvSpPr/>
-          <p:nvPr/>
-        </p:nvSpPr>
-        <p:spPr>
-          <a:xfrm>
-            <a:off x="548640" y="411480"/>
-            <a:ext cx="10058400" cy="274320"/>
-          </a:xfrm>
-          <a:prstGeom prst="rect">
-            <a:avLst/>
-          </a:prstGeom>
-          <a:noFill/>
-          <a:ln/>
-        </p:spPr>
-        <p:txBody>
-          <a:bodyPr wrap="square" rtlCol="0" anchor="ctr"/>
-          <a:lstStyle/>
-          <a:p>
-            <a:pPr indent="0" marL="0">
-              <a:buNone/>
-            </a:pPr>
-            <a:r>
-              <a:rPr lang="en-US" sz="1200" b="1" spc="300" kern="0" dirty="0">
-                <a:solidFill>
-                  <a:srgbClr val="37C7C0"/>
-                </a:solidFill>
-                <a:latin typeface="Noto Sans CJK TC" pitchFamily="34" charset="0"/>
-                <a:ea typeface="Noto Sans CJK TC" pitchFamily="34" charset="-122"/>
-                <a:cs typeface="Noto Sans CJK TC" pitchFamily="34" charset="-120"/>
-              </a:rPr>
-              <a:t>PRECONDITIONS</a:t>
-            </a:r>
-            <a:endParaRPr lang="en-US" sz="1200" dirty="0"/>
-          </a:p>
-        </p:txBody>
-      </p:sp>
-      <p:sp>
-        <p:nvSpPr>
-          <p:cNvPr id="3" name="Text 1"/>
-          <p:cNvSpPr/>
-          <p:nvPr/>
-        </p:nvSpPr>
-        <p:spPr>
-          <a:xfrm>
-            <a:off x="548640" y="676656"/>
-            <a:ext cx="11064240" cy="640080"/>
-          </a:xfrm>
-          <a:prstGeom prst="rect">
-            <a:avLst/>
-          </a:prstGeom>
-          <a:noFill/>
-          <a:ln/>
-        </p:spPr>
-        <p:txBody>
-          <a:bodyPr wrap="square" rtlCol="0" anchor="ctr"/>
-          <a:lstStyle/>
-          <a:p>
-            <a:pPr indent="0" marL="0">
-              <a:buNone/>
-            </a:pPr>
-            <a:r>
-              <a:rPr lang="en-US" sz="3000" b="1" dirty="0">
-                <a:solidFill>
-                  <a:srgbClr val="1B2538"/>
-                </a:solidFill>
-                <a:latin typeface="Noto Serif CJK TC" pitchFamily="34" charset="0"/>
-                <a:ea typeface="Noto Serif CJK TC" pitchFamily="34" charset="-122"/>
-                <a:cs typeface="Noto Serif CJK TC" pitchFamily="34" charset="-120"/>
-              </a:rPr>
-              <a:t>UMC 東南亞擴張的前提要件</a:t>
-            </a:r>
-            <a:endParaRPr lang="en-US" sz="3000" dirty="0"/>
-          </a:p>
-        </p:txBody>
-      </p:sp>
-      <p:sp>
-        <p:nvSpPr>
-          <p:cNvPr id="4" name="Text 2"/>
-          <p:cNvSpPr/>
-          <p:nvPr/>
-        </p:nvSpPr>
-        <p:spPr>
-          <a:xfrm>
-            <a:off x="548640" y="1417320"/>
-            <a:ext cx="11064240" cy="457200"/>
-          </a:xfrm>
-          <a:prstGeom prst="rect">
-            <a:avLst/>
-          </a:prstGeom>
-          <a:noFill/>
-          <a:ln/>
-        </p:spPr>
-        <p:txBody>
-          <a:bodyPr wrap="square" rtlCol="0" anchor="ctr"/>
-          <a:lstStyle/>
-          <a:p>
-            <a:pPr indent="0" marL="0">
-              <a:buNone/>
-            </a:pPr>
-            <a:r>
-              <a:rPr lang="en-US" sz="1350" dirty="0">
-                <a:solidFill>
-                  <a:srgbClr val="44516A"/>
-                </a:solidFill>
-                <a:latin typeface="Noto Sans CJK TC" pitchFamily="34" charset="0"/>
-                <a:ea typeface="Noto Sans CJK TC" pitchFamily="34" charset="-122"/>
-                <a:cs typeface="Noto Sans CJK TC" pitchFamily="34" charset="-120"/>
-              </a:rPr>
-              <a:t>先前分析的核心結論：以新加坡為錨，前段深化、後段解耦但輕度協調。任何後段重綁定都須先通過三道驗證。</a:t>
-            </a:r>
-            <a:endParaRPr lang="en-US" sz="1350" dirty="0"/>
-          </a:p>
-        </p:txBody>
-      </p:sp>
-      <p:sp>
-        <p:nvSpPr>
-          <p:cNvPr id="5" name="Shape 3"/>
-          <p:cNvSpPr/>
-          <p:nvPr/>
-        </p:nvSpPr>
-        <p:spPr>
-          <a:xfrm>
-            <a:off x="548640" y="2011680"/>
-            <a:ext cx="11064240" cy="1188720"/>
-          </a:xfrm>
-          <a:prstGeom prst="roundRect">
-            <a:avLst>
-              <a:gd name="adj" fmla="val 5385"/>
-            </a:avLst>
-          </a:prstGeom>
-          <a:solidFill>
-            <a:srgbClr val="FFFFFF"/>
-          </a:solidFill>
-          <a:ln/>
-          <a:effectLst>
-            <a:outerShdw sx="100000" sy="100000" kx="0" ky="0" algn="bl" rotWithShape="0" blurRad="88900" dist="38100" dir="5400000">
-              <a:srgbClr val="0E1B33">
-                <a:alpha val="18000"/>
-              </a:srgbClr>
-            </a:outerShdw>
-          </a:effectLst>
-        </p:spPr>
-      </p:sp>
-      <p:sp>
-        <p:nvSpPr>
-          <p:cNvPr id="6" name="Shape 4"/>
-          <p:cNvSpPr/>
-          <p:nvPr/>
-        </p:nvSpPr>
-        <p:spPr>
-          <a:xfrm>
-            <a:off x="914400" y="2304288"/>
-            <a:ext cx="603504" cy="603504"/>
-          </a:xfrm>
-          <a:prstGeom prst="ellipse">
-            <a:avLst/>
-          </a:prstGeom>
-          <a:solidFill>
-            <a:srgbClr val="0E1B33"/>
-          </a:solidFill>
-          <a:ln/>
-        </p:spPr>
-      </p:sp>
-      <p:pic>
-        <p:nvPicPr>
-          <p:cNvPr id="7" name="Image 0" descr="preencoded.png">    </p:cNvPr>
-          <p:cNvPicPr>
-            <a:picLocks noChangeAspect="1"/>
-          </p:cNvPicPr>
-          <p:nvPr/>
-        </p:nvPicPr>
-        <p:blipFill>
-          <a:blip r:embed="rId1"/>
-          <a:stretch>
-            <a:fillRect/>
-          </a:stretch>
-        </p:blipFill>
-        <p:spPr>
-          <a:xfrm>
-            <a:off x="1069848" y="2459736"/>
-            <a:ext cx="292608" cy="292608"/>
-          </a:xfrm>
-          <a:prstGeom prst="rect">
-            <a:avLst/>
-          </a:prstGeom>
-        </p:spPr>
-      </p:pic>
-      <p:sp>
-        <p:nvSpPr>
-          <p:cNvPr id="8" name="Text 5"/>
-          <p:cNvSpPr/>
-          <p:nvPr/>
-        </p:nvSpPr>
-        <p:spPr>
-          <a:xfrm>
-            <a:off x="1783080" y="2176272"/>
-            <a:ext cx="3657600" cy="868680"/>
-          </a:xfrm>
-          <a:prstGeom prst="rect">
-            <a:avLst/>
-          </a:prstGeom>
-          <a:noFill/>
-          <a:ln/>
-        </p:spPr>
-        <p:txBody>
-          <a:bodyPr wrap="square" rtlCol="0" anchor="ctr"/>
-          <a:lstStyle/>
-          <a:p>
-            <a:pPr indent="0" marL="0">
-              <a:buNone/>
-            </a:pPr>
-            <a:r>
-              <a:rPr lang="en-US" sz="1650" b="1" dirty="0">
-                <a:solidFill>
-                  <a:srgbClr val="1B2538"/>
-                </a:solidFill>
-                <a:latin typeface="Noto Serif CJK TC" pitchFamily="34" charset="0"/>
-                <a:ea typeface="Noto Serif CJK TC" pitchFamily="34" charset="-122"/>
-                <a:cs typeface="Noto Serif CJK TC" pitchFamily="34" charset="-120"/>
-              </a:rPr>
-              <a:t>1 ｜ Anchor demand 驗證</a:t>
-            </a:r>
-            <a:endParaRPr lang="en-US" sz="1650" dirty="0"/>
-          </a:p>
-        </p:txBody>
-      </p:sp>
-      <p:sp>
-        <p:nvSpPr>
-          <p:cNvPr id="9" name="Text 6"/>
-          <p:cNvSpPr/>
-          <p:nvPr/>
-        </p:nvSpPr>
-        <p:spPr>
-          <a:xfrm>
-            <a:off x="5532120" y="2176272"/>
-            <a:ext cx="5852160" cy="868680"/>
-          </a:xfrm>
-          <a:prstGeom prst="rect">
-            <a:avLst/>
-          </a:prstGeom>
-          <a:noFill/>
-          <a:ln/>
-        </p:spPr>
-        <p:txBody>
-          <a:bodyPr wrap="square" rtlCol="0" anchor="ctr"/>
-          <a:lstStyle/>
-          <a:p>
-            <a:pPr indent="0" marL="0">
-              <a:lnSpc>
-                <a:spcPct val="105000"/>
-              </a:lnSpc>
-              <a:buNone/>
-            </a:pPr>
-            <a:r>
-              <a:rPr lang="en-US" sz="1250" dirty="0">
-                <a:solidFill>
-                  <a:srgbClr val="55617A"/>
-                </a:solidFill>
-                <a:latin typeface="Noto Sans CJK TC" pitchFamily="34" charset="0"/>
-                <a:ea typeface="Noto Sans CJK TC" pitchFamily="34" charset="-122"/>
-                <a:cs typeface="Noto Sans CJK TC" pitchFamily="34" charset="-120"/>
-              </a:rPr>
-              <a:t>既有客戶是否有具約束力的產能承諾（take-or-pay / capacity reservation）？沒有 anchor demand 就投產能，是 OSAT / 晶圓業最典型的價值陷阱。</a:t>
-            </a:r>
-            <a:endParaRPr lang="en-US" sz="1250" dirty="0"/>
-          </a:p>
-        </p:txBody>
-      </p:sp>
-      <p:sp>
-        <p:nvSpPr>
-          <p:cNvPr id="10" name="Shape 7"/>
-          <p:cNvSpPr/>
-          <p:nvPr/>
-        </p:nvSpPr>
-        <p:spPr>
-          <a:xfrm>
-            <a:off x="548640" y="3383280"/>
-            <a:ext cx="11064240" cy="1188720"/>
-          </a:xfrm>
-          <a:prstGeom prst="roundRect">
-            <a:avLst>
-              <a:gd name="adj" fmla="val 5385"/>
-            </a:avLst>
-          </a:prstGeom>
-          <a:solidFill>
-            <a:srgbClr val="FFFFFF"/>
-          </a:solidFill>
-          <a:ln/>
-          <a:effectLst>
-            <a:outerShdw sx="100000" sy="100000" kx="0" ky="0" algn="bl" rotWithShape="0" blurRad="88900" dist="38100" dir="5400000">
-              <a:srgbClr val="0E1B33">
-                <a:alpha val="18000"/>
-              </a:srgbClr>
-            </a:outerShdw>
-          </a:effectLst>
-        </p:spPr>
-      </p:sp>
-      <p:sp>
-        <p:nvSpPr>
-          <p:cNvPr id="11" name="Shape 8"/>
-          <p:cNvSpPr/>
-          <p:nvPr/>
-        </p:nvSpPr>
-        <p:spPr>
-          <a:xfrm>
-            <a:off x="914400" y="3675888"/>
-            <a:ext cx="603504" cy="603504"/>
-          </a:xfrm>
-          <a:prstGeom prst="ellipse">
-            <a:avLst/>
-          </a:prstGeom>
-          <a:solidFill>
-            <a:srgbClr val="0E1B33"/>
-          </a:solidFill>
-          <a:ln/>
-        </p:spPr>
-      </p:sp>
-      <p:pic>
-        <p:nvPicPr>
-          <p:cNvPr id="12" name="Image 1" descr="preencoded.png">    </p:cNvPr>
-          <p:cNvPicPr>
-            <a:picLocks noChangeAspect="1"/>
-          </p:cNvPicPr>
-          <p:nvPr/>
-        </p:nvPicPr>
-        <p:blipFill>
-          <a:blip r:embed="rId2"/>
-          <a:stretch>
-            <a:fillRect/>
-          </a:stretch>
-        </p:blipFill>
-        <p:spPr>
-          <a:xfrm>
-            <a:off x="1069848" y="3831336"/>
-            <a:ext cx="292608" cy="292608"/>
-          </a:xfrm>
-          <a:prstGeom prst="rect">
-            <a:avLst/>
-          </a:prstGeom>
-        </p:spPr>
-      </p:pic>
-      <p:sp>
-        <p:nvSpPr>
-          <p:cNvPr id="13" name="Text 9"/>
-          <p:cNvSpPr/>
-          <p:nvPr/>
-        </p:nvSpPr>
-        <p:spPr>
-          <a:xfrm>
-            <a:off x="1783080" y="3547872"/>
-            <a:ext cx="3657600" cy="868680"/>
-          </a:xfrm>
-          <a:prstGeom prst="rect">
-            <a:avLst/>
-          </a:prstGeom>
-          <a:noFill/>
-          <a:ln/>
-        </p:spPr>
-        <p:txBody>
-          <a:bodyPr wrap="square" rtlCol="0" anchor="ctr"/>
-          <a:lstStyle/>
-          <a:p>
-            <a:pPr indent="0" marL="0">
-              <a:buNone/>
-            </a:pPr>
-            <a:r>
-              <a:rPr lang="en-US" sz="1650" b="1" dirty="0">
-                <a:solidFill>
-                  <a:srgbClr val="1B2538"/>
-                </a:solidFill>
-                <a:latin typeface="Noto Serif CJK TC" pitchFamily="34" charset="0"/>
-                <a:ea typeface="Noto Serif CJK TC" pitchFamily="34" charset="-122"/>
-                <a:cs typeface="Noto Serif CJK TC" pitchFamily="34" charset="-120"/>
-              </a:rPr>
-              <a:t>2 ｜ 單位經濟驗證</a:t>
-            </a:r>
-            <a:endParaRPr lang="en-US" sz="1650" dirty="0"/>
-          </a:p>
-        </p:txBody>
-      </p:sp>
-      <p:sp>
-        <p:nvSpPr>
-          <p:cNvPr id="14" name="Text 10"/>
-          <p:cNvSpPr/>
-          <p:nvPr/>
-        </p:nvSpPr>
-        <p:spPr>
-          <a:xfrm>
-            <a:off x="5532120" y="3547872"/>
-            <a:ext cx="5852160" cy="868680"/>
-          </a:xfrm>
-          <a:prstGeom prst="rect">
-            <a:avLst/>
-          </a:prstGeom>
-          <a:noFill/>
-          <a:ln/>
-        </p:spPr>
-        <p:txBody>
-          <a:bodyPr wrap="square" rtlCol="0" anchor="ctr"/>
-          <a:lstStyle/>
-          <a:p>
-            <a:pPr indent="0" marL="0">
-              <a:lnSpc>
-                <a:spcPct val="105000"/>
-              </a:lnSpc>
-              <a:buNone/>
-            </a:pPr>
-            <a:r>
-              <a:rPr lang="en-US" sz="1250" dirty="0">
-                <a:solidFill>
-                  <a:srgbClr val="55617A"/>
-                </a:solidFill>
-                <a:latin typeface="Noto Sans CJK TC" pitchFamily="34" charset="0"/>
-                <a:ea typeface="Noto Sans CJK TC" pitchFamily="34" charset="-122"/>
-                <a:cs typeface="Noto Sans CJK TC" pitchFamily="34" charset="-120"/>
-              </a:rPr>
-              <a:t>在地化後的全成本（人力、稅務獎勵、物流、學習曲線）是否真的低於現有「台 / 星前段 + 既有封測」路徑？算出 break-even 良率與稼動率門檻。</a:t>
-            </a:r>
-            <a:endParaRPr lang="en-US" sz="1250" dirty="0"/>
-          </a:p>
-        </p:txBody>
-      </p:sp>
-      <p:sp>
-        <p:nvSpPr>
-          <p:cNvPr id="15" name="Shape 11"/>
-          <p:cNvSpPr/>
-          <p:nvPr/>
-        </p:nvSpPr>
-        <p:spPr>
-          <a:xfrm>
-            <a:off x="548640" y="4754880"/>
-            <a:ext cx="11064240" cy="1188720"/>
-          </a:xfrm>
-          <a:prstGeom prst="roundRect">
-            <a:avLst>
-              <a:gd name="adj" fmla="val 5385"/>
-            </a:avLst>
-          </a:prstGeom>
-          <a:solidFill>
-            <a:srgbClr val="FFFFFF"/>
-          </a:solidFill>
-          <a:ln/>
-          <a:effectLst>
-            <a:outerShdw sx="100000" sy="100000" kx="0" ky="0" algn="bl" rotWithShape="0" blurRad="88900" dist="38100" dir="5400000">
-              <a:srgbClr val="0E1B33">
-                <a:alpha val="18000"/>
-              </a:srgbClr>
-            </a:outerShdw>
-          </a:effectLst>
-        </p:spPr>
-      </p:sp>
-      <p:sp>
-        <p:nvSpPr>
-          <p:cNvPr id="16" name="Shape 12"/>
-          <p:cNvSpPr/>
-          <p:nvPr/>
-        </p:nvSpPr>
-        <p:spPr>
-          <a:xfrm>
-            <a:off x="914400" y="5047488"/>
-            <a:ext cx="603504" cy="603504"/>
-          </a:xfrm>
-          <a:prstGeom prst="ellipse">
-            <a:avLst/>
-          </a:prstGeom>
-          <a:solidFill>
-            <a:srgbClr val="0E1B33"/>
-          </a:solidFill>
-          <a:ln/>
-        </p:spPr>
-      </p:sp>
-      <p:pic>
-        <p:nvPicPr>
-          <p:cNvPr id="17" name="Image 2" descr="preencoded.png">    </p:cNvPr>
-          <p:cNvPicPr>
-            <a:picLocks noChangeAspect="1"/>
-          </p:cNvPicPr>
-          <p:nvPr/>
-        </p:nvPicPr>
-        <p:blipFill>
-          <a:blip r:embed="rId3"/>
-          <a:stretch>
-            <a:fillRect/>
-          </a:stretch>
-        </p:blipFill>
-        <p:spPr>
-          <a:xfrm>
-            <a:off x="1069848" y="5202936"/>
-            <a:ext cx="292608" cy="292608"/>
-          </a:xfrm>
-          <a:prstGeom prst="rect">
-            <a:avLst/>
-          </a:prstGeom>
-        </p:spPr>
-      </p:pic>
-      <p:sp>
-        <p:nvSpPr>
-          <p:cNvPr id="18" name="Text 13"/>
-          <p:cNvSpPr/>
-          <p:nvPr/>
-        </p:nvSpPr>
-        <p:spPr>
-          <a:xfrm>
-            <a:off x="1783080" y="4919472"/>
-            <a:ext cx="3657600" cy="868680"/>
-          </a:xfrm>
-          <a:prstGeom prst="rect">
-            <a:avLst/>
-          </a:prstGeom>
-          <a:noFill/>
-          <a:ln/>
-        </p:spPr>
-        <p:txBody>
-          <a:bodyPr wrap="square" rtlCol="0" anchor="ctr"/>
-          <a:lstStyle/>
-          <a:p>
-            <a:pPr indent="0" marL="0">
-              <a:buNone/>
-            </a:pPr>
-            <a:r>
-              <a:rPr lang="en-US" sz="1650" b="1" dirty="0">
-                <a:solidFill>
-                  <a:srgbClr val="1B2538"/>
-                </a:solidFill>
-                <a:latin typeface="Noto Serif CJK TC" pitchFamily="34" charset="0"/>
-                <a:ea typeface="Noto Serif CJK TC" pitchFamily="34" charset="-122"/>
-                <a:cs typeface="Noto Serif CJK TC" pitchFamily="34" charset="-120"/>
-              </a:rPr>
-              <a:t>3 ｜ 不可替代性（護城河）驗證</a:t>
-            </a:r>
-            <a:endParaRPr lang="en-US" sz="1650" dirty="0"/>
-          </a:p>
-        </p:txBody>
-      </p:sp>
-      <p:sp>
-        <p:nvSpPr>
-          <p:cNvPr id="19" name="Text 14"/>
-          <p:cNvSpPr/>
-          <p:nvPr/>
-        </p:nvSpPr>
-        <p:spPr>
-          <a:xfrm>
-            <a:off x="5532120" y="4919472"/>
-            <a:ext cx="5852160" cy="868680"/>
-          </a:xfrm>
-          <a:prstGeom prst="rect">
-            <a:avLst/>
-          </a:prstGeom>
-          <a:noFill/>
-          <a:ln/>
-        </p:spPr>
-        <p:txBody>
-          <a:bodyPr wrap="square" rtlCol="0" anchor="ctr"/>
-          <a:lstStyle/>
-          <a:p>
-            <a:pPr indent="0" marL="0">
-              <a:lnSpc>
-                <a:spcPct val="105000"/>
-              </a:lnSpc>
-              <a:buNone/>
-            </a:pPr>
-            <a:r>
-              <a:rPr lang="en-US" sz="1250" dirty="0">
-                <a:solidFill>
-                  <a:srgbClr val="55617A"/>
-                </a:solidFill>
-                <a:latin typeface="Noto Sans CJK TC" pitchFamily="34" charset="0"/>
-                <a:ea typeface="Noto Sans CJK TC" pitchFamily="34" charset="-122"/>
-                <a:cs typeface="Noto Sans CJK TC" pitchFamily="34" charset="-120"/>
-              </a:rPr>
-              <a:t>布局是否創造客戶難以複製的綜效（turnkey、地緣分散、節點對齊）？若客戶可輕易找其他 OSAT 達成同樣效果，則無護城河。</a:t>
-            </a:r>
-            <a:endParaRPr lang="en-US" sz="1250" dirty="0"/>
-          </a:p>
-        </p:txBody>
-      </p:sp>
-      <p:sp>
-        <p:nvSpPr>
-          <p:cNvPr id="20" name="Text 15"/>
-          <p:cNvSpPr/>
-          <p:nvPr/>
-        </p:nvSpPr>
-        <p:spPr>
-          <a:xfrm>
-            <a:off x="548640" y="6263640"/>
-            <a:ext cx="10972800" cy="320040"/>
-          </a:xfrm>
-          <a:prstGeom prst="rect">
-            <a:avLst/>
-          </a:prstGeom>
-          <a:noFill/>
-          <a:ln/>
-        </p:spPr>
-        <p:txBody>
-          <a:bodyPr wrap="square" rtlCol="0" anchor="ctr"/>
-          <a:lstStyle/>
-          <a:p>
-            <a:pPr indent="0" marL="0">
-              <a:buNone/>
-            </a:pPr>
-            <a:r>
-              <a:rPr lang="en-US" sz="1200" b="1" i="1" dirty="0">
-                <a:solidFill>
-                  <a:srgbClr val="274472"/>
-                </a:solidFill>
-                <a:latin typeface="Noto Sans CJK TC" pitchFamily="34" charset="0"/>
-                <a:ea typeface="Noto Sans CJK TC" pitchFamily="34" charset="-122"/>
-                <a:cs typeface="Noto Sans CJK TC" pitchFamily="34" charset="-120"/>
-              </a:rPr>
-              <a:t>三點同時成立才算正確策略；任一不成立就該重新界定範圍。</a:t>
-            </a:r>
-            <a:endParaRPr lang="en-US" sz="1200" dirty="0"/>
+              <a:t>Intel 比較會造引擎，UMC 比較會開計程車公司。引擎技術更高階，但要讓很多客戶放心上車、排班、收費、維修、準時抵達，UMC 的經驗更成熟。</a:t>
+            </a:r>
+            <a:endParaRPr lang="en-US" sz="1400" dirty="0"/>
           </a:p>
         </p:txBody>
       </p:sp>
@@ -6510,7 +6944,7 @@
                 <a:ea typeface="Noto Sans CJK TC" pitchFamily="34" charset="-122"/>
                 <a:cs typeface="Noto Sans CJK TC" pitchFamily="34" charset="-120"/>
               </a:rPr>
-              <a:t>EXPANSION MODEL</a:t>
+              <a:t>STRENGTH MAP</a:t>
             </a:r>
             <a:endParaRPr lang="en-US" sz="1200" dirty="0"/>
           </a:p>
@@ -6549,26 +6983,1705 @@
                 <a:ea typeface="Noto Serif CJK TC" pitchFamily="34" charset="-122"/>
                 <a:cs typeface="Noto Serif CJK TC" pitchFamily="34" charset="-120"/>
               </a:rPr>
-              <a:t>三層擴張做法 × Dashboard 的 Country × Mode 矩陣</a:t>
+              <a:t>兩者強項對照，與 12nm 為何是甜蜜點</a:t>
             </a:r>
             <a:endParaRPr lang="en-US" sz="3000" dirty="0"/>
           </a:p>
         </p:txBody>
       </p:sp>
-      <p:sp>
-        <p:nvSpPr>
-          <p:cNvPr id="4" name="Shape 2"/>
-          <p:cNvSpPr/>
-          <p:nvPr/>
-        </p:nvSpPr>
-        <p:spPr>
-          <a:xfrm>
-            <a:off x="548640" y="1691640"/>
-            <a:ext cx="3566160" cy="2880360"/>
+      <p:graphicFrame>
+        <p:nvGraphicFramePr>
+          <p:cNvPr id="14" name="Table 0"/>
+          <p:cNvGraphicFramePr>
+            <a:graphicFrameLocks noGrp="1"/>
+          </p:cNvGraphicFramePr>
+          <p:nvPr>
+            <p:extLst>
+              <p:ext uri="{D42A27DB-BD31-4B8C-83A1-F6EECF244321}">
+                <p14:modId xmlns:p14="http://schemas.microsoft.com/office/powerpoint/2010/main" val="1579011935"/>
+              </p:ext>
+            </p:extLst>
+          </p:nvPr>
+        </p:nvGraphicFramePr>
+        <p:xfrm>
+          <a:off x="548640" y="1600200"/>
+          <a:ext cx="6400800" cy="914400"/>
+        </p:xfrm>
+        <a:graphic>
+          <a:graphicData uri="http://schemas.openxmlformats.org/drawingml/2006/table">
+            <a:tbl>
+              <a:tblPr/>
+              <a:tblGrid>
+                <a:gridCol w="3291840"/>
+                <a:gridCol w="1554480"/>
+                <a:gridCol w="1554480"/>
+              </a:tblGrid>
+              <a:tr h="411480">
+                <a:tc>
+                  <a:txBody>
+                    <a:bodyPr/>
+                    <a:lstStyle/>
+                    <a:p>
+                      <a:pPr algn="l" indent="0" marL="0">
+                        <a:buNone/>
+                      </a:pPr>
+                      <a:r>
+                        <a:rPr lang="en-US" sz="1200" b="1" dirty="0">
+                          <a:solidFill>
+                            <a:srgbClr val="FFFFFF"/>
+                          </a:solidFill>
+                          <a:latin typeface="Noto Sans CJK TC" pitchFamily="34" charset="0"/>
+                          <a:ea typeface="Noto Sans CJK TC" pitchFamily="34" charset="-122"/>
+                          <a:cs typeface="Noto Sans CJK TC" pitchFamily="34" charset="-120"/>
+                        </a:rPr>
+                        <a:t> 能力項目</a:t>
+                      </a:r>
+                      <a:endParaRPr lang="en-US" sz="1200" dirty="0">
+                        <a:latin typeface="Noto Sans CJK TC" charset="0"/>
+                        <a:ea typeface="Noto Sans CJK TC" charset="0"/>
+                        <a:cs typeface="Noto Sans CJK TC" charset="0"/>
+                      </a:endParaRPr>
+                    </a:p>
+                  </a:txBody>
+                  <a:tcPr marL="91440" marR="91440" marT="45720" marB="45720" anchor="ctr">
+                    <a:lnL w="6350" cap="flat" cmpd="sng" algn="ctr">
+                      <a:solidFill>
+                        <a:srgbClr val="D8DEE9"/>
+                      </a:solidFill>
+                      <a:prstDash val="solid"/>
+                      <a:round/>
+                      <a:headEnd type="none" w="med" len="med"/>
+                      <a:tailEnd type="none" w="med" len="med"/>
+                    </a:lnL>
+                    <a:lnR w="6350" cap="flat" cmpd="sng" algn="ctr">
+                      <a:solidFill>
+                        <a:srgbClr val="D8DEE9"/>
+                      </a:solidFill>
+                      <a:prstDash val="solid"/>
+                      <a:round/>
+                      <a:headEnd type="none" w="med" len="med"/>
+                      <a:tailEnd type="none" w="med" len="med"/>
+                    </a:lnR>
+                    <a:lnT w="6350" cap="flat" cmpd="sng" algn="ctr">
+                      <a:solidFill>
+                        <a:srgbClr val="D8DEE9"/>
+                      </a:solidFill>
+                      <a:prstDash val="solid"/>
+                      <a:round/>
+                      <a:headEnd type="none" w="med" len="med"/>
+                      <a:tailEnd type="none" w="med" len="med"/>
+                    </a:lnT>
+                    <a:lnB w="6350" cap="flat" cmpd="sng" algn="ctr">
+                      <a:solidFill>
+                        <a:srgbClr val="D8DEE9"/>
+                      </a:solidFill>
+                      <a:prstDash val="solid"/>
+                      <a:round/>
+                      <a:headEnd type="none" w="med" len="med"/>
+                      <a:tailEnd type="none" w="med" len="med"/>
+                    </a:lnB>
+                    <a:solidFill>
+                      <a:srgbClr val="0E1B33"/>
+                    </a:solidFill>
+                  </a:tcPr>
+                </a:tc>
+                <a:tc>
+                  <a:txBody>
+                    <a:bodyPr/>
+                    <a:lstStyle/>
+                    <a:p>
+                      <a:pPr algn="l" indent="0" marL="0">
+                        <a:buNone/>
+                      </a:pPr>
+                      <a:r>
+                        <a:rPr lang="en-US" sz="1200" b="1" dirty="0">
+                          <a:solidFill>
+                            <a:srgbClr val="FFFFFF"/>
+                          </a:solidFill>
+                          <a:latin typeface="Noto Sans CJK TC" pitchFamily="34" charset="0"/>
+                          <a:ea typeface="Noto Sans CJK TC" pitchFamily="34" charset="-122"/>
+                          <a:cs typeface="Noto Sans CJK TC" pitchFamily="34" charset="-120"/>
+                        </a:rPr>
+                        <a:t> Intel</a:t>
+                      </a:r>
+                      <a:endParaRPr lang="en-US" sz="1200" dirty="0">
+                        <a:latin typeface="Noto Sans CJK TC" charset="0"/>
+                        <a:ea typeface="Noto Sans CJK TC" charset="0"/>
+                        <a:cs typeface="Noto Sans CJK TC" charset="0"/>
+                      </a:endParaRPr>
+                    </a:p>
+                  </a:txBody>
+                  <a:tcPr marL="91440" marR="91440" marT="45720" marB="45720" anchor="ctr">
+                    <a:lnL w="6350" cap="flat" cmpd="sng" algn="ctr">
+                      <a:solidFill>
+                        <a:srgbClr val="D8DEE9"/>
+                      </a:solidFill>
+                      <a:prstDash val="solid"/>
+                      <a:round/>
+                      <a:headEnd type="none" w="med" len="med"/>
+                      <a:tailEnd type="none" w="med" len="med"/>
+                    </a:lnL>
+                    <a:lnR w="6350" cap="flat" cmpd="sng" algn="ctr">
+                      <a:solidFill>
+                        <a:srgbClr val="D8DEE9"/>
+                      </a:solidFill>
+                      <a:prstDash val="solid"/>
+                      <a:round/>
+                      <a:headEnd type="none" w="med" len="med"/>
+                      <a:tailEnd type="none" w="med" len="med"/>
+                    </a:lnR>
+                    <a:lnT w="6350" cap="flat" cmpd="sng" algn="ctr">
+                      <a:solidFill>
+                        <a:srgbClr val="D8DEE9"/>
+                      </a:solidFill>
+                      <a:prstDash val="solid"/>
+                      <a:round/>
+                      <a:headEnd type="none" w="med" len="med"/>
+                      <a:tailEnd type="none" w="med" len="med"/>
+                    </a:lnT>
+                    <a:lnB w="6350" cap="flat" cmpd="sng" algn="ctr">
+                      <a:solidFill>
+                        <a:srgbClr val="D8DEE9"/>
+                      </a:solidFill>
+                      <a:prstDash val="solid"/>
+                      <a:round/>
+                      <a:headEnd type="none" w="med" len="med"/>
+                      <a:tailEnd type="none" w="med" len="med"/>
+                    </a:lnB>
+                    <a:solidFill>
+                      <a:srgbClr val="0E1B33"/>
+                    </a:solidFill>
+                  </a:tcPr>
+                </a:tc>
+                <a:tc>
+                  <a:txBody>
+                    <a:bodyPr/>
+                    <a:lstStyle/>
+                    <a:p>
+                      <a:pPr algn="l" indent="0" marL="0">
+                        <a:buNone/>
+                      </a:pPr>
+                      <a:r>
+                        <a:rPr lang="en-US" sz="1200" b="1" dirty="0">
+                          <a:solidFill>
+                            <a:srgbClr val="FFFFFF"/>
+                          </a:solidFill>
+                          <a:latin typeface="Noto Sans CJK TC" pitchFamily="34" charset="0"/>
+                          <a:ea typeface="Noto Sans CJK TC" pitchFamily="34" charset="-122"/>
+                          <a:cs typeface="Noto Sans CJK TC" pitchFamily="34" charset="-120"/>
+                        </a:rPr>
+                        <a:t> UMC</a:t>
+                      </a:r>
+                      <a:endParaRPr lang="en-US" sz="1200" dirty="0">
+                        <a:latin typeface="Noto Sans CJK TC" charset="0"/>
+                        <a:ea typeface="Noto Sans CJK TC" charset="0"/>
+                        <a:cs typeface="Noto Sans CJK TC" charset="0"/>
+                      </a:endParaRPr>
+                    </a:p>
+                  </a:txBody>
+                  <a:tcPr marL="91440" marR="91440" marT="45720" marB="45720" anchor="ctr">
+                    <a:lnL w="6350" cap="flat" cmpd="sng" algn="ctr">
+                      <a:solidFill>
+                        <a:srgbClr val="D8DEE9"/>
+                      </a:solidFill>
+                      <a:prstDash val="solid"/>
+                      <a:round/>
+                      <a:headEnd type="none" w="med" len="med"/>
+                      <a:tailEnd type="none" w="med" len="med"/>
+                    </a:lnL>
+                    <a:lnR w="6350" cap="flat" cmpd="sng" algn="ctr">
+                      <a:solidFill>
+                        <a:srgbClr val="D8DEE9"/>
+                      </a:solidFill>
+                      <a:prstDash val="solid"/>
+                      <a:round/>
+                      <a:headEnd type="none" w="med" len="med"/>
+                      <a:tailEnd type="none" w="med" len="med"/>
+                    </a:lnR>
+                    <a:lnT w="6350" cap="flat" cmpd="sng" algn="ctr">
+                      <a:solidFill>
+                        <a:srgbClr val="D8DEE9"/>
+                      </a:solidFill>
+                      <a:prstDash val="solid"/>
+                      <a:round/>
+                      <a:headEnd type="none" w="med" len="med"/>
+                      <a:tailEnd type="none" w="med" len="med"/>
+                    </a:lnT>
+                    <a:lnB w="6350" cap="flat" cmpd="sng" algn="ctr">
+                      <a:solidFill>
+                        <a:srgbClr val="D8DEE9"/>
+                      </a:solidFill>
+                      <a:prstDash val="solid"/>
+                      <a:round/>
+                      <a:headEnd type="none" w="med" len="med"/>
+                      <a:tailEnd type="none" w="med" len="med"/>
+                    </a:lnB>
+                    <a:solidFill>
+                      <a:srgbClr val="0E1B33"/>
+                    </a:solidFill>
+                  </a:tcPr>
+                </a:tc>
+              </a:tr>
+              <a:tr h="457200">
+                <a:tc>
+                  <a:txBody>
+                    <a:bodyPr/>
+                    <a:lstStyle/>
+                    <a:p>
+                      <a:pPr indent="0" marL="0">
+                        <a:buNone/>
+                      </a:pPr>
+                      <a:r>
+                        <a:rPr lang="en-US" sz="1150" dirty="0">
+                          <a:solidFill>
+                            <a:srgbClr val="2A3550"/>
+                          </a:solidFill>
+                          <a:latin typeface="Noto Sans CJK TC" pitchFamily="34" charset="0"/>
+                          <a:ea typeface="Noto Sans CJK TC" pitchFamily="34" charset="-122"/>
+                          <a:cs typeface="Noto Sans CJK TC" pitchFamily="34" charset="-120"/>
+                        </a:rPr>
+                        <a:t> 先進製程（18A / 14A）</a:t>
+                      </a:r>
+                      <a:endParaRPr lang="en-US" sz="1150" dirty="0">
+                        <a:latin typeface="Noto Sans CJK TC" charset="0"/>
+                        <a:ea typeface="Noto Sans CJK TC" charset="0"/>
+                        <a:cs typeface="Noto Sans CJK TC" charset="0"/>
+                      </a:endParaRPr>
+                    </a:p>
+                  </a:txBody>
+                  <a:tcPr marL="91440" marR="91440" marT="45720" marB="45720" anchor="ctr">
+                    <a:lnL w="6350" cap="flat" cmpd="sng" algn="ctr">
+                      <a:solidFill>
+                        <a:srgbClr val="D8DEE9"/>
+                      </a:solidFill>
+                      <a:prstDash val="solid"/>
+                      <a:round/>
+                      <a:headEnd type="none" w="med" len="med"/>
+                      <a:tailEnd type="none" w="med" len="med"/>
+                    </a:lnL>
+                    <a:lnR w="6350" cap="flat" cmpd="sng" algn="ctr">
+                      <a:solidFill>
+                        <a:srgbClr val="D8DEE9"/>
+                      </a:solidFill>
+                      <a:prstDash val="solid"/>
+                      <a:round/>
+                      <a:headEnd type="none" w="med" len="med"/>
+                      <a:tailEnd type="none" w="med" len="med"/>
+                    </a:lnR>
+                    <a:lnT w="6350" cap="flat" cmpd="sng" algn="ctr">
+                      <a:solidFill>
+                        <a:srgbClr val="D8DEE9"/>
+                      </a:solidFill>
+                      <a:prstDash val="solid"/>
+                      <a:round/>
+                      <a:headEnd type="none" w="med" len="med"/>
+                      <a:tailEnd type="none" w="med" len="med"/>
+                    </a:lnT>
+                    <a:lnB w="6350" cap="flat" cmpd="sng" algn="ctr">
+                      <a:solidFill>
+                        <a:srgbClr val="D8DEE9"/>
+                      </a:solidFill>
+                      <a:prstDash val="solid"/>
+                      <a:round/>
+                      <a:headEnd type="none" w="med" len="med"/>
+                      <a:tailEnd type="none" w="med" len="med"/>
+                    </a:lnB>
+                    <a:solidFill>
+                      <a:srgbClr val="FFFFFF"/>
+                    </a:solidFill>
+                  </a:tcPr>
+                </a:tc>
+                <a:tc>
+                  <a:txBody>
+                    <a:bodyPr/>
+                    <a:lstStyle/>
+                    <a:p>
+                      <a:pPr indent="0" marL="0">
+                        <a:buNone/>
+                      </a:pPr>
+                      <a:r>
+                        <a:rPr lang="en-US" sz="1150" b="1" dirty="0">
+                          <a:solidFill>
+                            <a:srgbClr val="1C8C87"/>
+                          </a:solidFill>
+                          <a:latin typeface="Noto Sans CJK TC" pitchFamily="34" charset="0"/>
+                          <a:ea typeface="Noto Sans CJK TC" pitchFamily="34" charset="-122"/>
+                          <a:cs typeface="Noto Sans CJK TC" pitchFamily="34" charset="-120"/>
+                        </a:rPr>
+                        <a:t>強</a:t>
+                      </a:r>
+                      <a:endParaRPr lang="en-US" sz="1150" dirty="0">
+                        <a:latin typeface="Noto Sans CJK TC" charset="0"/>
+                        <a:ea typeface="Noto Sans CJK TC" charset="0"/>
+                        <a:cs typeface="Noto Sans CJK TC" charset="0"/>
+                      </a:endParaRPr>
+                    </a:p>
+                  </a:txBody>
+                  <a:tcPr marL="91440" marR="91440" marT="45720" marB="45720" anchor="ctr">
+                    <a:lnL w="6350" cap="flat" cmpd="sng" algn="ctr">
+                      <a:solidFill>
+                        <a:srgbClr val="D8DEE9"/>
+                      </a:solidFill>
+                      <a:prstDash val="solid"/>
+                      <a:round/>
+                      <a:headEnd type="none" w="med" len="med"/>
+                      <a:tailEnd type="none" w="med" len="med"/>
+                    </a:lnL>
+                    <a:lnR w="6350" cap="flat" cmpd="sng" algn="ctr">
+                      <a:solidFill>
+                        <a:srgbClr val="D8DEE9"/>
+                      </a:solidFill>
+                      <a:prstDash val="solid"/>
+                      <a:round/>
+                      <a:headEnd type="none" w="med" len="med"/>
+                      <a:tailEnd type="none" w="med" len="med"/>
+                    </a:lnR>
+                    <a:lnT w="6350" cap="flat" cmpd="sng" algn="ctr">
+                      <a:solidFill>
+                        <a:srgbClr val="D8DEE9"/>
+                      </a:solidFill>
+                      <a:prstDash val="solid"/>
+                      <a:round/>
+                      <a:headEnd type="none" w="med" len="med"/>
+                      <a:tailEnd type="none" w="med" len="med"/>
+                    </a:lnT>
+                    <a:lnB w="6350" cap="flat" cmpd="sng" algn="ctr">
+                      <a:solidFill>
+                        <a:srgbClr val="D8DEE9"/>
+                      </a:solidFill>
+                      <a:prstDash val="solid"/>
+                      <a:round/>
+                      <a:headEnd type="none" w="med" len="med"/>
+                      <a:tailEnd type="none" w="med" len="med"/>
+                    </a:lnB>
+                    <a:solidFill>
+                      <a:srgbClr val="FFFFFF"/>
+                    </a:solidFill>
+                  </a:tcPr>
+                </a:tc>
+                <a:tc>
+                  <a:txBody>
+                    <a:bodyPr/>
+                    <a:lstStyle/>
+                    <a:p>
+                      <a:pPr indent="0" marL="0">
+                        <a:buNone/>
+                      </a:pPr>
+                      <a:r>
+                        <a:rPr lang="en-US" sz="1150" dirty="0">
+                          <a:solidFill>
+                            <a:srgbClr val="2A3550"/>
+                          </a:solidFill>
+                          <a:latin typeface="Noto Sans CJK TC" pitchFamily="34" charset="0"/>
+                          <a:ea typeface="Noto Sans CJK TC" pitchFamily="34" charset="-122"/>
+                          <a:cs typeface="Noto Sans CJK TC" pitchFamily="34" charset="-120"/>
+                        </a:rPr>
+                        <a:t>弱</a:t>
+                      </a:r>
+                      <a:endParaRPr lang="en-US" sz="1150" dirty="0">
+                        <a:latin typeface="Noto Sans CJK TC" charset="0"/>
+                        <a:ea typeface="Noto Sans CJK TC" charset="0"/>
+                        <a:cs typeface="Noto Sans CJK TC" charset="0"/>
+                      </a:endParaRPr>
+                    </a:p>
+                  </a:txBody>
+                  <a:tcPr marL="91440" marR="91440" marT="45720" marB="45720" anchor="ctr">
+                    <a:lnL w="6350" cap="flat" cmpd="sng" algn="ctr">
+                      <a:solidFill>
+                        <a:srgbClr val="D8DEE9"/>
+                      </a:solidFill>
+                      <a:prstDash val="solid"/>
+                      <a:round/>
+                      <a:headEnd type="none" w="med" len="med"/>
+                      <a:tailEnd type="none" w="med" len="med"/>
+                    </a:lnL>
+                    <a:lnR w="6350" cap="flat" cmpd="sng" algn="ctr">
+                      <a:solidFill>
+                        <a:srgbClr val="D8DEE9"/>
+                      </a:solidFill>
+                      <a:prstDash val="solid"/>
+                      <a:round/>
+                      <a:headEnd type="none" w="med" len="med"/>
+                      <a:tailEnd type="none" w="med" len="med"/>
+                    </a:lnR>
+                    <a:lnT w="6350" cap="flat" cmpd="sng" algn="ctr">
+                      <a:solidFill>
+                        <a:srgbClr val="D8DEE9"/>
+                      </a:solidFill>
+                      <a:prstDash val="solid"/>
+                      <a:round/>
+                      <a:headEnd type="none" w="med" len="med"/>
+                      <a:tailEnd type="none" w="med" len="med"/>
+                    </a:lnT>
+                    <a:lnB w="6350" cap="flat" cmpd="sng" algn="ctr">
+                      <a:solidFill>
+                        <a:srgbClr val="D8DEE9"/>
+                      </a:solidFill>
+                      <a:prstDash val="solid"/>
+                      <a:round/>
+                      <a:headEnd type="none" w="med" len="med"/>
+                      <a:tailEnd type="none" w="med" len="med"/>
+                    </a:lnB>
+                    <a:solidFill>
+                      <a:srgbClr val="FFFFFF"/>
+                    </a:solidFill>
+                  </a:tcPr>
+                </a:tc>
+              </a:tr>
+              <a:tr h="457200">
+                <a:tc>
+                  <a:txBody>
+                    <a:bodyPr/>
+                    <a:lstStyle/>
+                    <a:p>
+                      <a:pPr indent="0" marL="0">
+                        <a:buNone/>
+                      </a:pPr>
+                      <a:r>
+                        <a:rPr lang="en-US" sz="1150" dirty="0">
+                          <a:solidFill>
+                            <a:srgbClr val="2A3550"/>
+                          </a:solidFill>
+                          <a:latin typeface="Noto Sans CJK TC" pitchFamily="34" charset="0"/>
+                          <a:ea typeface="Noto Sans CJK TC" pitchFamily="34" charset="-122"/>
+                          <a:cs typeface="Noto Sans CJK TC" pitchFamily="34" charset="-120"/>
+                        </a:rPr>
+                        <a:t> EUV / leading-edge 製造</a:t>
+                      </a:r>
+                      <a:endParaRPr lang="en-US" sz="1150" dirty="0">
+                        <a:latin typeface="Noto Sans CJK TC" charset="0"/>
+                        <a:ea typeface="Noto Sans CJK TC" charset="0"/>
+                        <a:cs typeface="Noto Sans CJK TC" charset="0"/>
+                      </a:endParaRPr>
+                    </a:p>
+                  </a:txBody>
+                  <a:tcPr marL="91440" marR="91440" marT="45720" marB="45720" anchor="ctr">
+                    <a:lnL w="6350" cap="flat" cmpd="sng" algn="ctr">
+                      <a:solidFill>
+                        <a:srgbClr val="D8DEE9"/>
+                      </a:solidFill>
+                      <a:prstDash val="solid"/>
+                      <a:round/>
+                      <a:headEnd type="none" w="med" len="med"/>
+                      <a:tailEnd type="none" w="med" len="med"/>
+                    </a:lnL>
+                    <a:lnR w="6350" cap="flat" cmpd="sng" algn="ctr">
+                      <a:solidFill>
+                        <a:srgbClr val="D8DEE9"/>
+                      </a:solidFill>
+                      <a:prstDash val="solid"/>
+                      <a:round/>
+                      <a:headEnd type="none" w="med" len="med"/>
+                      <a:tailEnd type="none" w="med" len="med"/>
+                    </a:lnR>
+                    <a:lnT w="6350" cap="flat" cmpd="sng" algn="ctr">
+                      <a:solidFill>
+                        <a:srgbClr val="D8DEE9"/>
+                      </a:solidFill>
+                      <a:prstDash val="solid"/>
+                      <a:round/>
+                      <a:headEnd type="none" w="med" len="med"/>
+                      <a:tailEnd type="none" w="med" len="med"/>
+                    </a:lnT>
+                    <a:lnB w="6350" cap="flat" cmpd="sng" algn="ctr">
+                      <a:solidFill>
+                        <a:srgbClr val="D8DEE9"/>
+                      </a:solidFill>
+                      <a:prstDash val="solid"/>
+                      <a:round/>
+                      <a:headEnd type="none" w="med" len="med"/>
+                      <a:tailEnd type="none" w="med" len="med"/>
+                    </a:lnB>
+                    <a:solidFill>
+                      <a:srgbClr val="FFFFFF"/>
+                    </a:solidFill>
+                  </a:tcPr>
+                </a:tc>
+                <a:tc>
+                  <a:txBody>
+                    <a:bodyPr/>
+                    <a:lstStyle/>
+                    <a:p>
+                      <a:pPr indent="0" marL="0">
+                        <a:buNone/>
+                      </a:pPr>
+                      <a:r>
+                        <a:rPr lang="en-US" sz="1150" b="1" dirty="0">
+                          <a:solidFill>
+                            <a:srgbClr val="1C8C87"/>
+                          </a:solidFill>
+                          <a:latin typeface="Noto Sans CJK TC" pitchFamily="34" charset="0"/>
+                          <a:ea typeface="Noto Sans CJK TC" pitchFamily="34" charset="-122"/>
+                          <a:cs typeface="Noto Sans CJK TC" pitchFamily="34" charset="-120"/>
+                        </a:rPr>
+                        <a:t>強</a:t>
+                      </a:r>
+                      <a:endParaRPr lang="en-US" sz="1150" dirty="0">
+                        <a:latin typeface="Noto Sans CJK TC" charset="0"/>
+                        <a:ea typeface="Noto Sans CJK TC" charset="0"/>
+                        <a:cs typeface="Noto Sans CJK TC" charset="0"/>
+                      </a:endParaRPr>
+                    </a:p>
+                  </a:txBody>
+                  <a:tcPr marL="91440" marR="91440" marT="45720" marB="45720" anchor="ctr">
+                    <a:lnL w="6350" cap="flat" cmpd="sng" algn="ctr">
+                      <a:solidFill>
+                        <a:srgbClr val="D8DEE9"/>
+                      </a:solidFill>
+                      <a:prstDash val="solid"/>
+                      <a:round/>
+                      <a:headEnd type="none" w="med" len="med"/>
+                      <a:tailEnd type="none" w="med" len="med"/>
+                    </a:lnL>
+                    <a:lnR w="6350" cap="flat" cmpd="sng" algn="ctr">
+                      <a:solidFill>
+                        <a:srgbClr val="D8DEE9"/>
+                      </a:solidFill>
+                      <a:prstDash val="solid"/>
+                      <a:round/>
+                      <a:headEnd type="none" w="med" len="med"/>
+                      <a:tailEnd type="none" w="med" len="med"/>
+                    </a:lnR>
+                    <a:lnT w="6350" cap="flat" cmpd="sng" algn="ctr">
+                      <a:solidFill>
+                        <a:srgbClr val="D8DEE9"/>
+                      </a:solidFill>
+                      <a:prstDash val="solid"/>
+                      <a:round/>
+                      <a:headEnd type="none" w="med" len="med"/>
+                      <a:tailEnd type="none" w="med" len="med"/>
+                    </a:lnT>
+                    <a:lnB w="6350" cap="flat" cmpd="sng" algn="ctr">
+                      <a:solidFill>
+                        <a:srgbClr val="D8DEE9"/>
+                      </a:solidFill>
+                      <a:prstDash val="solid"/>
+                      <a:round/>
+                      <a:headEnd type="none" w="med" len="med"/>
+                      <a:tailEnd type="none" w="med" len="med"/>
+                    </a:lnB>
+                    <a:solidFill>
+                      <a:srgbClr val="FFFFFF"/>
+                    </a:solidFill>
+                  </a:tcPr>
+                </a:tc>
+                <a:tc>
+                  <a:txBody>
+                    <a:bodyPr/>
+                    <a:lstStyle/>
+                    <a:p>
+                      <a:pPr indent="0" marL="0">
+                        <a:buNone/>
+                      </a:pPr>
+                      <a:r>
+                        <a:rPr lang="en-US" sz="1150" dirty="0">
+                          <a:solidFill>
+                            <a:srgbClr val="2A3550"/>
+                          </a:solidFill>
+                          <a:latin typeface="Noto Sans CJK TC" pitchFamily="34" charset="0"/>
+                          <a:ea typeface="Noto Sans CJK TC" pitchFamily="34" charset="-122"/>
+                          <a:cs typeface="Noto Sans CJK TC" pitchFamily="34" charset="-120"/>
+                        </a:rPr>
+                        <a:t>非主戰場</a:t>
+                      </a:r>
+                      <a:endParaRPr lang="en-US" sz="1150" dirty="0">
+                        <a:latin typeface="Noto Sans CJK TC" charset="0"/>
+                        <a:ea typeface="Noto Sans CJK TC" charset="0"/>
+                        <a:cs typeface="Noto Sans CJK TC" charset="0"/>
+                      </a:endParaRPr>
+                    </a:p>
+                  </a:txBody>
+                  <a:tcPr marL="91440" marR="91440" marT="45720" marB="45720" anchor="ctr">
+                    <a:lnL w="6350" cap="flat" cmpd="sng" algn="ctr">
+                      <a:solidFill>
+                        <a:srgbClr val="D8DEE9"/>
+                      </a:solidFill>
+                      <a:prstDash val="solid"/>
+                      <a:round/>
+                      <a:headEnd type="none" w="med" len="med"/>
+                      <a:tailEnd type="none" w="med" len="med"/>
+                    </a:lnL>
+                    <a:lnR w="6350" cap="flat" cmpd="sng" algn="ctr">
+                      <a:solidFill>
+                        <a:srgbClr val="D8DEE9"/>
+                      </a:solidFill>
+                      <a:prstDash val="solid"/>
+                      <a:round/>
+                      <a:headEnd type="none" w="med" len="med"/>
+                      <a:tailEnd type="none" w="med" len="med"/>
+                    </a:lnR>
+                    <a:lnT w="6350" cap="flat" cmpd="sng" algn="ctr">
+                      <a:solidFill>
+                        <a:srgbClr val="D8DEE9"/>
+                      </a:solidFill>
+                      <a:prstDash val="solid"/>
+                      <a:round/>
+                      <a:headEnd type="none" w="med" len="med"/>
+                      <a:tailEnd type="none" w="med" len="med"/>
+                    </a:lnT>
+                    <a:lnB w="6350" cap="flat" cmpd="sng" algn="ctr">
+                      <a:solidFill>
+                        <a:srgbClr val="D8DEE9"/>
+                      </a:solidFill>
+                      <a:prstDash val="solid"/>
+                      <a:round/>
+                      <a:headEnd type="none" w="med" len="med"/>
+                      <a:tailEnd type="none" w="med" len="med"/>
+                    </a:lnB>
+                    <a:solidFill>
+                      <a:srgbClr val="FFFFFF"/>
+                    </a:solidFill>
+                  </a:tcPr>
+                </a:tc>
+              </a:tr>
+              <a:tr h="457200">
+                <a:tc>
+                  <a:txBody>
+                    <a:bodyPr/>
+                    <a:lstStyle/>
+                    <a:p>
+                      <a:pPr indent="0" marL="0">
+                        <a:buNone/>
+                      </a:pPr>
+                      <a:r>
+                        <a:rPr lang="en-US" sz="1150" dirty="0">
+                          <a:solidFill>
+                            <a:srgbClr val="2A3550"/>
+                          </a:solidFill>
+                          <a:latin typeface="Noto Sans CJK TC" pitchFamily="34" charset="0"/>
+                          <a:ea typeface="Noto Sans CJK TC" pitchFamily="34" charset="-122"/>
+                          <a:cs typeface="Noto Sans CJK TC" pitchFamily="34" charset="-120"/>
+                        </a:rPr>
+                        <a:t> 美國先進製造基地</a:t>
+                      </a:r>
+                      <a:endParaRPr lang="en-US" sz="1150" dirty="0">
+                        <a:latin typeface="Noto Sans CJK TC" charset="0"/>
+                        <a:ea typeface="Noto Sans CJK TC" charset="0"/>
+                        <a:cs typeface="Noto Sans CJK TC" charset="0"/>
+                      </a:endParaRPr>
+                    </a:p>
+                  </a:txBody>
+                  <a:tcPr marL="91440" marR="91440" marT="45720" marB="45720" anchor="ctr">
+                    <a:lnL w="6350" cap="flat" cmpd="sng" algn="ctr">
+                      <a:solidFill>
+                        <a:srgbClr val="D8DEE9"/>
+                      </a:solidFill>
+                      <a:prstDash val="solid"/>
+                      <a:round/>
+                      <a:headEnd type="none" w="med" len="med"/>
+                      <a:tailEnd type="none" w="med" len="med"/>
+                    </a:lnL>
+                    <a:lnR w="6350" cap="flat" cmpd="sng" algn="ctr">
+                      <a:solidFill>
+                        <a:srgbClr val="D8DEE9"/>
+                      </a:solidFill>
+                      <a:prstDash val="solid"/>
+                      <a:round/>
+                      <a:headEnd type="none" w="med" len="med"/>
+                      <a:tailEnd type="none" w="med" len="med"/>
+                    </a:lnR>
+                    <a:lnT w="6350" cap="flat" cmpd="sng" algn="ctr">
+                      <a:solidFill>
+                        <a:srgbClr val="D8DEE9"/>
+                      </a:solidFill>
+                      <a:prstDash val="solid"/>
+                      <a:round/>
+                      <a:headEnd type="none" w="med" len="med"/>
+                      <a:tailEnd type="none" w="med" len="med"/>
+                    </a:lnT>
+                    <a:lnB w="6350" cap="flat" cmpd="sng" algn="ctr">
+                      <a:solidFill>
+                        <a:srgbClr val="D8DEE9"/>
+                      </a:solidFill>
+                      <a:prstDash val="solid"/>
+                      <a:round/>
+                      <a:headEnd type="none" w="med" len="med"/>
+                      <a:tailEnd type="none" w="med" len="med"/>
+                    </a:lnB>
+                    <a:solidFill>
+                      <a:srgbClr val="FFFFFF"/>
+                    </a:solidFill>
+                  </a:tcPr>
+                </a:tc>
+                <a:tc>
+                  <a:txBody>
+                    <a:bodyPr/>
+                    <a:lstStyle/>
+                    <a:p>
+                      <a:pPr indent="0" marL="0">
+                        <a:buNone/>
+                      </a:pPr>
+                      <a:r>
+                        <a:rPr lang="en-US" sz="1150" b="1" dirty="0">
+                          <a:solidFill>
+                            <a:srgbClr val="1C8C87"/>
+                          </a:solidFill>
+                          <a:latin typeface="Noto Sans CJK TC" pitchFamily="34" charset="0"/>
+                          <a:ea typeface="Noto Sans CJK TC" pitchFamily="34" charset="-122"/>
+                          <a:cs typeface="Noto Sans CJK TC" pitchFamily="34" charset="-120"/>
+                        </a:rPr>
+                        <a:t>強</a:t>
+                      </a:r>
+                      <a:endParaRPr lang="en-US" sz="1150" dirty="0">
+                        <a:latin typeface="Noto Sans CJK TC" charset="0"/>
+                        <a:ea typeface="Noto Sans CJK TC" charset="0"/>
+                        <a:cs typeface="Noto Sans CJK TC" charset="0"/>
+                      </a:endParaRPr>
+                    </a:p>
+                  </a:txBody>
+                  <a:tcPr marL="91440" marR="91440" marT="45720" marB="45720" anchor="ctr">
+                    <a:lnL w="6350" cap="flat" cmpd="sng" algn="ctr">
+                      <a:solidFill>
+                        <a:srgbClr val="D8DEE9"/>
+                      </a:solidFill>
+                      <a:prstDash val="solid"/>
+                      <a:round/>
+                      <a:headEnd type="none" w="med" len="med"/>
+                      <a:tailEnd type="none" w="med" len="med"/>
+                    </a:lnL>
+                    <a:lnR w="6350" cap="flat" cmpd="sng" algn="ctr">
+                      <a:solidFill>
+                        <a:srgbClr val="D8DEE9"/>
+                      </a:solidFill>
+                      <a:prstDash val="solid"/>
+                      <a:round/>
+                      <a:headEnd type="none" w="med" len="med"/>
+                      <a:tailEnd type="none" w="med" len="med"/>
+                    </a:lnR>
+                    <a:lnT w="6350" cap="flat" cmpd="sng" algn="ctr">
+                      <a:solidFill>
+                        <a:srgbClr val="D8DEE9"/>
+                      </a:solidFill>
+                      <a:prstDash val="solid"/>
+                      <a:round/>
+                      <a:headEnd type="none" w="med" len="med"/>
+                      <a:tailEnd type="none" w="med" len="med"/>
+                    </a:lnT>
+                    <a:lnB w="6350" cap="flat" cmpd="sng" algn="ctr">
+                      <a:solidFill>
+                        <a:srgbClr val="D8DEE9"/>
+                      </a:solidFill>
+                      <a:prstDash val="solid"/>
+                      <a:round/>
+                      <a:headEnd type="none" w="med" len="med"/>
+                      <a:tailEnd type="none" w="med" len="med"/>
+                    </a:lnB>
+                    <a:solidFill>
+                      <a:srgbClr val="FFFFFF"/>
+                    </a:solidFill>
+                  </a:tcPr>
+                </a:tc>
+                <a:tc>
+                  <a:txBody>
+                    <a:bodyPr/>
+                    <a:lstStyle/>
+                    <a:p>
+                      <a:pPr indent="0" marL="0">
+                        <a:buNone/>
+                      </a:pPr>
+                      <a:r>
+                        <a:rPr lang="en-US" sz="1150" dirty="0">
+                          <a:solidFill>
+                            <a:srgbClr val="2A3550"/>
+                          </a:solidFill>
+                          <a:latin typeface="Noto Sans CJK TC" pitchFamily="34" charset="0"/>
+                          <a:ea typeface="Noto Sans CJK TC" pitchFamily="34" charset="-122"/>
+                          <a:cs typeface="Noto Sans CJK TC" pitchFamily="34" charset="-120"/>
+                        </a:rPr>
+                        <a:t>相對沒有</a:t>
+                      </a:r>
+                      <a:endParaRPr lang="en-US" sz="1150" dirty="0">
+                        <a:latin typeface="Noto Sans CJK TC" charset="0"/>
+                        <a:ea typeface="Noto Sans CJK TC" charset="0"/>
+                        <a:cs typeface="Noto Sans CJK TC" charset="0"/>
+                      </a:endParaRPr>
+                    </a:p>
+                  </a:txBody>
+                  <a:tcPr marL="91440" marR="91440" marT="45720" marB="45720" anchor="ctr">
+                    <a:lnL w="6350" cap="flat" cmpd="sng" algn="ctr">
+                      <a:solidFill>
+                        <a:srgbClr val="D8DEE9"/>
+                      </a:solidFill>
+                      <a:prstDash val="solid"/>
+                      <a:round/>
+                      <a:headEnd type="none" w="med" len="med"/>
+                      <a:tailEnd type="none" w="med" len="med"/>
+                    </a:lnL>
+                    <a:lnR w="6350" cap="flat" cmpd="sng" algn="ctr">
+                      <a:solidFill>
+                        <a:srgbClr val="D8DEE9"/>
+                      </a:solidFill>
+                      <a:prstDash val="solid"/>
+                      <a:round/>
+                      <a:headEnd type="none" w="med" len="med"/>
+                      <a:tailEnd type="none" w="med" len="med"/>
+                    </a:lnR>
+                    <a:lnT w="6350" cap="flat" cmpd="sng" algn="ctr">
+                      <a:solidFill>
+                        <a:srgbClr val="D8DEE9"/>
+                      </a:solidFill>
+                      <a:prstDash val="solid"/>
+                      <a:round/>
+                      <a:headEnd type="none" w="med" len="med"/>
+                      <a:tailEnd type="none" w="med" len="med"/>
+                    </a:lnT>
+                    <a:lnB w="6350" cap="flat" cmpd="sng" algn="ctr">
+                      <a:solidFill>
+                        <a:srgbClr val="D8DEE9"/>
+                      </a:solidFill>
+                      <a:prstDash val="solid"/>
+                      <a:round/>
+                      <a:headEnd type="none" w="med" len="med"/>
+                      <a:tailEnd type="none" w="med" len="med"/>
+                    </a:lnB>
+                    <a:solidFill>
+                      <a:srgbClr val="FFFFFF"/>
+                    </a:solidFill>
+                  </a:tcPr>
+                </a:tc>
+              </a:tr>
+              <a:tr h="457200">
+                <a:tc>
+                  <a:txBody>
+                    <a:bodyPr/>
+                    <a:lstStyle/>
+                    <a:p>
+                      <a:pPr indent="0" marL="0">
+                        <a:buNone/>
+                      </a:pPr>
+                      <a:r>
+                        <a:rPr lang="en-US" sz="1150" dirty="0">
+                          <a:solidFill>
+                            <a:srgbClr val="2A3550"/>
+                          </a:solidFill>
+                          <a:latin typeface="Noto Sans CJK TC" pitchFamily="34" charset="0"/>
+                          <a:ea typeface="Noto Sans CJK TC" pitchFamily="34" charset="-122"/>
+                          <a:cs typeface="Noto Sans CJK TC" pitchFamily="34" charset="-120"/>
+                        </a:rPr>
+                        <a:t> 純 foundry 客戶服務</a:t>
+                      </a:r>
+                      <a:endParaRPr lang="en-US" sz="1150" dirty="0">
+                        <a:latin typeface="Noto Sans CJK TC" charset="0"/>
+                        <a:ea typeface="Noto Sans CJK TC" charset="0"/>
+                        <a:cs typeface="Noto Sans CJK TC" charset="0"/>
+                      </a:endParaRPr>
+                    </a:p>
+                  </a:txBody>
+                  <a:tcPr marL="91440" marR="91440" marT="45720" marB="45720" anchor="ctr">
+                    <a:lnL w="6350" cap="flat" cmpd="sng" algn="ctr">
+                      <a:solidFill>
+                        <a:srgbClr val="D8DEE9"/>
+                      </a:solidFill>
+                      <a:prstDash val="solid"/>
+                      <a:round/>
+                      <a:headEnd type="none" w="med" len="med"/>
+                      <a:tailEnd type="none" w="med" len="med"/>
+                    </a:lnL>
+                    <a:lnR w="6350" cap="flat" cmpd="sng" algn="ctr">
+                      <a:solidFill>
+                        <a:srgbClr val="D8DEE9"/>
+                      </a:solidFill>
+                      <a:prstDash val="solid"/>
+                      <a:round/>
+                      <a:headEnd type="none" w="med" len="med"/>
+                      <a:tailEnd type="none" w="med" len="med"/>
+                    </a:lnR>
+                    <a:lnT w="6350" cap="flat" cmpd="sng" algn="ctr">
+                      <a:solidFill>
+                        <a:srgbClr val="D8DEE9"/>
+                      </a:solidFill>
+                      <a:prstDash val="solid"/>
+                      <a:round/>
+                      <a:headEnd type="none" w="med" len="med"/>
+                      <a:tailEnd type="none" w="med" len="med"/>
+                    </a:lnT>
+                    <a:lnB w="6350" cap="flat" cmpd="sng" algn="ctr">
+                      <a:solidFill>
+                        <a:srgbClr val="D8DEE9"/>
+                      </a:solidFill>
+                      <a:prstDash val="solid"/>
+                      <a:round/>
+                      <a:headEnd type="none" w="med" len="med"/>
+                      <a:tailEnd type="none" w="med" len="med"/>
+                    </a:lnB>
+                    <a:solidFill>
+                      <a:srgbClr val="FFFFFF"/>
+                    </a:solidFill>
+                  </a:tcPr>
+                </a:tc>
+                <a:tc>
+                  <a:txBody>
+                    <a:bodyPr/>
+                    <a:lstStyle/>
+                    <a:p>
+                      <a:pPr indent="0" marL="0">
+                        <a:buNone/>
+                      </a:pPr>
+                      <a:r>
+                        <a:rPr lang="en-US" sz="1150" dirty="0">
+                          <a:solidFill>
+                            <a:srgbClr val="2A3550"/>
+                          </a:solidFill>
+                          <a:latin typeface="Noto Sans CJK TC" pitchFamily="34" charset="0"/>
+                          <a:ea typeface="Noto Sans CJK TC" pitchFamily="34" charset="-122"/>
+                          <a:cs typeface="Noto Sans CJK TC" pitchFamily="34" charset="-120"/>
+                        </a:rPr>
+                        <a:t>建立中</a:t>
+                      </a:r>
+                      <a:endParaRPr lang="en-US" sz="1150" dirty="0">
+                        <a:latin typeface="Noto Sans CJK TC" charset="0"/>
+                        <a:ea typeface="Noto Sans CJK TC" charset="0"/>
+                        <a:cs typeface="Noto Sans CJK TC" charset="0"/>
+                      </a:endParaRPr>
+                    </a:p>
+                  </a:txBody>
+                  <a:tcPr marL="91440" marR="91440" marT="45720" marB="45720" anchor="ctr">
+                    <a:lnL w="6350" cap="flat" cmpd="sng" algn="ctr">
+                      <a:solidFill>
+                        <a:srgbClr val="D8DEE9"/>
+                      </a:solidFill>
+                      <a:prstDash val="solid"/>
+                      <a:round/>
+                      <a:headEnd type="none" w="med" len="med"/>
+                      <a:tailEnd type="none" w="med" len="med"/>
+                    </a:lnL>
+                    <a:lnR w="6350" cap="flat" cmpd="sng" algn="ctr">
+                      <a:solidFill>
+                        <a:srgbClr val="D8DEE9"/>
+                      </a:solidFill>
+                      <a:prstDash val="solid"/>
+                      <a:round/>
+                      <a:headEnd type="none" w="med" len="med"/>
+                      <a:tailEnd type="none" w="med" len="med"/>
+                    </a:lnR>
+                    <a:lnT w="6350" cap="flat" cmpd="sng" algn="ctr">
+                      <a:solidFill>
+                        <a:srgbClr val="D8DEE9"/>
+                      </a:solidFill>
+                      <a:prstDash val="solid"/>
+                      <a:round/>
+                      <a:headEnd type="none" w="med" len="med"/>
+                      <a:tailEnd type="none" w="med" len="med"/>
+                    </a:lnT>
+                    <a:lnB w="6350" cap="flat" cmpd="sng" algn="ctr">
+                      <a:solidFill>
+                        <a:srgbClr val="D8DEE9"/>
+                      </a:solidFill>
+                      <a:prstDash val="solid"/>
+                      <a:round/>
+                      <a:headEnd type="none" w="med" len="med"/>
+                      <a:tailEnd type="none" w="med" len="med"/>
+                    </a:lnB>
+                    <a:solidFill>
+                      <a:srgbClr val="FFFFFF"/>
+                    </a:solidFill>
+                  </a:tcPr>
+                </a:tc>
+                <a:tc>
+                  <a:txBody>
+                    <a:bodyPr/>
+                    <a:lstStyle/>
+                    <a:p>
+                      <a:pPr indent="0" marL="0">
+                        <a:buNone/>
+                      </a:pPr>
+                      <a:r>
+                        <a:rPr lang="en-US" sz="1150" b="1" dirty="0">
+                          <a:solidFill>
+                            <a:srgbClr val="9C6A1F"/>
+                          </a:solidFill>
+                          <a:latin typeface="Noto Sans CJK TC" pitchFamily="34" charset="0"/>
+                          <a:ea typeface="Noto Sans CJK TC" pitchFamily="34" charset="-122"/>
+                          <a:cs typeface="Noto Sans CJK TC" pitchFamily="34" charset="-120"/>
+                        </a:rPr>
+                        <a:t>很強</a:t>
+                      </a:r>
+                      <a:endParaRPr lang="en-US" sz="1150" dirty="0">
+                        <a:latin typeface="Noto Sans CJK TC" charset="0"/>
+                        <a:ea typeface="Noto Sans CJK TC" charset="0"/>
+                        <a:cs typeface="Noto Sans CJK TC" charset="0"/>
+                      </a:endParaRPr>
+                    </a:p>
+                  </a:txBody>
+                  <a:tcPr marL="91440" marR="91440" marT="45720" marB="45720" anchor="ctr">
+                    <a:lnL w="6350" cap="flat" cmpd="sng" algn="ctr">
+                      <a:solidFill>
+                        <a:srgbClr val="D8DEE9"/>
+                      </a:solidFill>
+                      <a:prstDash val="solid"/>
+                      <a:round/>
+                      <a:headEnd type="none" w="med" len="med"/>
+                      <a:tailEnd type="none" w="med" len="med"/>
+                    </a:lnL>
+                    <a:lnR w="6350" cap="flat" cmpd="sng" algn="ctr">
+                      <a:solidFill>
+                        <a:srgbClr val="D8DEE9"/>
+                      </a:solidFill>
+                      <a:prstDash val="solid"/>
+                      <a:round/>
+                      <a:headEnd type="none" w="med" len="med"/>
+                      <a:tailEnd type="none" w="med" len="med"/>
+                    </a:lnR>
+                    <a:lnT w="6350" cap="flat" cmpd="sng" algn="ctr">
+                      <a:solidFill>
+                        <a:srgbClr val="D8DEE9"/>
+                      </a:solidFill>
+                      <a:prstDash val="solid"/>
+                      <a:round/>
+                      <a:headEnd type="none" w="med" len="med"/>
+                      <a:tailEnd type="none" w="med" len="med"/>
+                    </a:lnT>
+                    <a:lnB w="6350" cap="flat" cmpd="sng" algn="ctr">
+                      <a:solidFill>
+                        <a:srgbClr val="D8DEE9"/>
+                      </a:solidFill>
+                      <a:prstDash val="solid"/>
+                      <a:round/>
+                      <a:headEnd type="none" w="med" len="med"/>
+                      <a:tailEnd type="none" w="med" len="med"/>
+                    </a:lnB>
+                    <a:solidFill>
+                      <a:srgbClr val="FFFFFF"/>
+                    </a:solidFill>
+                  </a:tcPr>
+                </a:tc>
+              </a:tr>
+              <a:tr h="457200">
+                <a:tc>
+                  <a:txBody>
+                    <a:bodyPr/>
+                    <a:lstStyle/>
+                    <a:p>
+                      <a:pPr indent="0" marL="0">
+                        <a:buNone/>
+                      </a:pPr>
+                      <a:r>
+                        <a:rPr lang="en-US" sz="1150" dirty="0">
+                          <a:solidFill>
+                            <a:srgbClr val="2A3550"/>
+                          </a:solidFill>
+                          <a:latin typeface="Noto Sans CJK TC" pitchFamily="34" charset="0"/>
+                          <a:ea typeface="Noto Sans CJK TC" pitchFamily="34" charset="-122"/>
+                          <a:cs typeface="Noto Sans CJK TC" pitchFamily="34" charset="-120"/>
+                        </a:rPr>
+                        <a:t> 成熟節點商業化</a:t>
+                      </a:r>
+                      <a:endParaRPr lang="en-US" sz="1150" dirty="0">
+                        <a:latin typeface="Noto Sans CJK TC" charset="0"/>
+                        <a:ea typeface="Noto Sans CJK TC" charset="0"/>
+                        <a:cs typeface="Noto Sans CJK TC" charset="0"/>
+                      </a:endParaRPr>
+                    </a:p>
+                  </a:txBody>
+                  <a:tcPr marL="91440" marR="91440" marT="45720" marB="45720" anchor="ctr">
+                    <a:lnL w="6350" cap="flat" cmpd="sng" algn="ctr">
+                      <a:solidFill>
+                        <a:srgbClr val="D8DEE9"/>
+                      </a:solidFill>
+                      <a:prstDash val="solid"/>
+                      <a:round/>
+                      <a:headEnd type="none" w="med" len="med"/>
+                      <a:tailEnd type="none" w="med" len="med"/>
+                    </a:lnL>
+                    <a:lnR w="6350" cap="flat" cmpd="sng" algn="ctr">
+                      <a:solidFill>
+                        <a:srgbClr val="D8DEE9"/>
+                      </a:solidFill>
+                      <a:prstDash val="solid"/>
+                      <a:round/>
+                      <a:headEnd type="none" w="med" len="med"/>
+                      <a:tailEnd type="none" w="med" len="med"/>
+                    </a:lnR>
+                    <a:lnT w="6350" cap="flat" cmpd="sng" algn="ctr">
+                      <a:solidFill>
+                        <a:srgbClr val="D8DEE9"/>
+                      </a:solidFill>
+                      <a:prstDash val="solid"/>
+                      <a:round/>
+                      <a:headEnd type="none" w="med" len="med"/>
+                      <a:tailEnd type="none" w="med" len="med"/>
+                    </a:lnT>
+                    <a:lnB w="6350" cap="flat" cmpd="sng" algn="ctr">
+                      <a:solidFill>
+                        <a:srgbClr val="D8DEE9"/>
+                      </a:solidFill>
+                      <a:prstDash val="solid"/>
+                      <a:round/>
+                      <a:headEnd type="none" w="med" len="med"/>
+                      <a:tailEnd type="none" w="med" len="med"/>
+                    </a:lnB>
+                    <a:solidFill>
+                      <a:srgbClr val="FFFFFF"/>
+                    </a:solidFill>
+                  </a:tcPr>
+                </a:tc>
+                <a:tc>
+                  <a:txBody>
+                    <a:bodyPr/>
+                    <a:lstStyle/>
+                    <a:p>
+                      <a:pPr indent="0" marL="0">
+                        <a:buNone/>
+                      </a:pPr>
+                      <a:r>
+                        <a:rPr lang="en-US" sz="1150" dirty="0">
+                          <a:solidFill>
+                            <a:srgbClr val="2A3550"/>
+                          </a:solidFill>
+                          <a:latin typeface="Noto Sans CJK TC" pitchFamily="34" charset="0"/>
+                          <a:ea typeface="Noto Sans CJK TC" pitchFamily="34" charset="-122"/>
+                          <a:cs typeface="Noto Sans CJK TC" pitchFamily="34" charset="-120"/>
+                        </a:rPr>
+                        <a:t>經驗較少</a:t>
+                      </a:r>
+                      <a:endParaRPr lang="en-US" sz="1150" dirty="0">
+                        <a:latin typeface="Noto Sans CJK TC" charset="0"/>
+                        <a:ea typeface="Noto Sans CJK TC" charset="0"/>
+                        <a:cs typeface="Noto Sans CJK TC" charset="0"/>
+                      </a:endParaRPr>
+                    </a:p>
+                  </a:txBody>
+                  <a:tcPr marL="91440" marR="91440" marT="45720" marB="45720" anchor="ctr">
+                    <a:lnL w="6350" cap="flat" cmpd="sng" algn="ctr">
+                      <a:solidFill>
+                        <a:srgbClr val="D8DEE9"/>
+                      </a:solidFill>
+                      <a:prstDash val="solid"/>
+                      <a:round/>
+                      <a:headEnd type="none" w="med" len="med"/>
+                      <a:tailEnd type="none" w="med" len="med"/>
+                    </a:lnL>
+                    <a:lnR w="6350" cap="flat" cmpd="sng" algn="ctr">
+                      <a:solidFill>
+                        <a:srgbClr val="D8DEE9"/>
+                      </a:solidFill>
+                      <a:prstDash val="solid"/>
+                      <a:round/>
+                      <a:headEnd type="none" w="med" len="med"/>
+                      <a:tailEnd type="none" w="med" len="med"/>
+                    </a:lnR>
+                    <a:lnT w="6350" cap="flat" cmpd="sng" algn="ctr">
+                      <a:solidFill>
+                        <a:srgbClr val="D8DEE9"/>
+                      </a:solidFill>
+                      <a:prstDash val="solid"/>
+                      <a:round/>
+                      <a:headEnd type="none" w="med" len="med"/>
+                      <a:tailEnd type="none" w="med" len="med"/>
+                    </a:lnT>
+                    <a:lnB w="6350" cap="flat" cmpd="sng" algn="ctr">
+                      <a:solidFill>
+                        <a:srgbClr val="D8DEE9"/>
+                      </a:solidFill>
+                      <a:prstDash val="solid"/>
+                      <a:round/>
+                      <a:headEnd type="none" w="med" len="med"/>
+                      <a:tailEnd type="none" w="med" len="med"/>
+                    </a:lnB>
+                    <a:solidFill>
+                      <a:srgbClr val="FFFFFF"/>
+                    </a:solidFill>
+                  </a:tcPr>
+                </a:tc>
+                <a:tc>
+                  <a:txBody>
+                    <a:bodyPr/>
+                    <a:lstStyle/>
+                    <a:p>
+                      <a:pPr indent="0" marL="0">
+                        <a:buNone/>
+                      </a:pPr>
+                      <a:r>
+                        <a:rPr lang="en-US" sz="1150" b="1" dirty="0">
+                          <a:solidFill>
+                            <a:srgbClr val="9C6A1F"/>
+                          </a:solidFill>
+                          <a:latin typeface="Noto Sans CJK TC" pitchFamily="34" charset="0"/>
+                          <a:ea typeface="Noto Sans CJK TC" pitchFamily="34" charset="-122"/>
+                          <a:cs typeface="Noto Sans CJK TC" pitchFamily="34" charset="-120"/>
+                        </a:rPr>
+                        <a:t>很強</a:t>
+                      </a:r>
+                      <a:endParaRPr lang="en-US" sz="1150" dirty="0">
+                        <a:latin typeface="Noto Sans CJK TC" charset="0"/>
+                        <a:ea typeface="Noto Sans CJK TC" charset="0"/>
+                        <a:cs typeface="Noto Sans CJK TC" charset="0"/>
+                      </a:endParaRPr>
+                    </a:p>
+                  </a:txBody>
+                  <a:tcPr marL="91440" marR="91440" marT="45720" marB="45720" anchor="ctr">
+                    <a:lnL w="6350" cap="flat" cmpd="sng" algn="ctr">
+                      <a:solidFill>
+                        <a:srgbClr val="D8DEE9"/>
+                      </a:solidFill>
+                      <a:prstDash val="solid"/>
+                      <a:round/>
+                      <a:headEnd type="none" w="med" len="med"/>
+                      <a:tailEnd type="none" w="med" len="med"/>
+                    </a:lnL>
+                    <a:lnR w="6350" cap="flat" cmpd="sng" algn="ctr">
+                      <a:solidFill>
+                        <a:srgbClr val="D8DEE9"/>
+                      </a:solidFill>
+                      <a:prstDash val="solid"/>
+                      <a:round/>
+                      <a:headEnd type="none" w="med" len="med"/>
+                      <a:tailEnd type="none" w="med" len="med"/>
+                    </a:lnR>
+                    <a:lnT w="6350" cap="flat" cmpd="sng" algn="ctr">
+                      <a:solidFill>
+                        <a:srgbClr val="D8DEE9"/>
+                      </a:solidFill>
+                      <a:prstDash val="solid"/>
+                      <a:round/>
+                      <a:headEnd type="none" w="med" len="med"/>
+                      <a:tailEnd type="none" w="med" len="med"/>
+                    </a:lnT>
+                    <a:lnB w="6350" cap="flat" cmpd="sng" algn="ctr">
+                      <a:solidFill>
+                        <a:srgbClr val="D8DEE9"/>
+                      </a:solidFill>
+                      <a:prstDash val="solid"/>
+                      <a:round/>
+                      <a:headEnd type="none" w="med" len="med"/>
+                      <a:tailEnd type="none" w="med" len="med"/>
+                    </a:lnB>
+                    <a:solidFill>
+                      <a:srgbClr val="FFFFFF"/>
+                    </a:solidFill>
+                  </a:tcPr>
+                </a:tc>
+              </a:tr>
+              <a:tr h="457200">
+                <a:tc>
+                  <a:txBody>
+                    <a:bodyPr/>
+                    <a:lstStyle/>
+                    <a:p>
+                      <a:pPr indent="0" marL="0">
+                        <a:buNone/>
+                      </a:pPr>
+                      <a:r>
+                        <a:rPr lang="en-US" sz="1150" dirty="0">
+                          <a:solidFill>
+                            <a:srgbClr val="2A3550"/>
+                          </a:solidFill>
+                          <a:latin typeface="Noto Sans CJK TC" pitchFamily="34" charset="0"/>
+                          <a:ea typeface="Noto Sans CJK TC" pitchFamily="34" charset="-122"/>
+                          <a:cs typeface="Noto Sans CJK TC" pitchFamily="34" charset="-120"/>
+                        </a:rPr>
+                        <a:t> PDK / IP / EDA 外部導入</a:t>
+                      </a:r>
+                      <a:endParaRPr lang="en-US" sz="1150" dirty="0">
+                        <a:latin typeface="Noto Sans CJK TC" charset="0"/>
+                        <a:ea typeface="Noto Sans CJK TC" charset="0"/>
+                        <a:cs typeface="Noto Sans CJK TC" charset="0"/>
+                      </a:endParaRPr>
+                    </a:p>
+                  </a:txBody>
+                  <a:tcPr marL="91440" marR="91440" marT="45720" marB="45720" anchor="ctr">
+                    <a:lnL w="6350" cap="flat" cmpd="sng" algn="ctr">
+                      <a:solidFill>
+                        <a:srgbClr val="D8DEE9"/>
+                      </a:solidFill>
+                      <a:prstDash val="solid"/>
+                      <a:round/>
+                      <a:headEnd type="none" w="med" len="med"/>
+                      <a:tailEnd type="none" w="med" len="med"/>
+                    </a:lnL>
+                    <a:lnR w="6350" cap="flat" cmpd="sng" algn="ctr">
+                      <a:solidFill>
+                        <a:srgbClr val="D8DEE9"/>
+                      </a:solidFill>
+                      <a:prstDash val="solid"/>
+                      <a:round/>
+                      <a:headEnd type="none" w="med" len="med"/>
+                      <a:tailEnd type="none" w="med" len="med"/>
+                    </a:lnR>
+                    <a:lnT w="6350" cap="flat" cmpd="sng" algn="ctr">
+                      <a:solidFill>
+                        <a:srgbClr val="D8DEE9"/>
+                      </a:solidFill>
+                      <a:prstDash val="solid"/>
+                      <a:round/>
+                      <a:headEnd type="none" w="med" len="med"/>
+                      <a:tailEnd type="none" w="med" len="med"/>
+                    </a:lnT>
+                    <a:lnB w="6350" cap="flat" cmpd="sng" algn="ctr">
+                      <a:solidFill>
+                        <a:srgbClr val="D8DEE9"/>
+                      </a:solidFill>
+                      <a:prstDash val="solid"/>
+                      <a:round/>
+                      <a:headEnd type="none" w="med" len="med"/>
+                      <a:tailEnd type="none" w="med" len="med"/>
+                    </a:lnB>
+                    <a:solidFill>
+                      <a:srgbClr val="FFFFFF"/>
+                    </a:solidFill>
+                  </a:tcPr>
+                </a:tc>
+                <a:tc>
+                  <a:txBody>
+                    <a:bodyPr/>
+                    <a:lstStyle/>
+                    <a:p>
+                      <a:pPr indent="0" marL="0">
+                        <a:buNone/>
+                      </a:pPr>
+                      <a:r>
+                        <a:rPr lang="en-US" sz="1150" dirty="0">
+                          <a:solidFill>
+                            <a:srgbClr val="2A3550"/>
+                          </a:solidFill>
+                          <a:latin typeface="Noto Sans CJK TC" pitchFamily="34" charset="0"/>
+                          <a:ea typeface="Noto Sans CJK TC" pitchFamily="34" charset="-122"/>
+                          <a:cs typeface="Noto Sans CJK TC" pitchFamily="34" charset="-120"/>
+                        </a:rPr>
+                        <a:t>補強中</a:t>
+                      </a:r>
+                      <a:endParaRPr lang="en-US" sz="1150" dirty="0">
+                        <a:latin typeface="Noto Sans CJK TC" charset="0"/>
+                        <a:ea typeface="Noto Sans CJK TC" charset="0"/>
+                        <a:cs typeface="Noto Sans CJK TC" charset="0"/>
+                      </a:endParaRPr>
+                    </a:p>
+                  </a:txBody>
+                  <a:tcPr marL="91440" marR="91440" marT="45720" marB="45720" anchor="ctr">
+                    <a:lnL w="6350" cap="flat" cmpd="sng" algn="ctr">
+                      <a:solidFill>
+                        <a:srgbClr val="D8DEE9"/>
+                      </a:solidFill>
+                      <a:prstDash val="solid"/>
+                      <a:round/>
+                      <a:headEnd type="none" w="med" len="med"/>
+                      <a:tailEnd type="none" w="med" len="med"/>
+                    </a:lnL>
+                    <a:lnR w="6350" cap="flat" cmpd="sng" algn="ctr">
+                      <a:solidFill>
+                        <a:srgbClr val="D8DEE9"/>
+                      </a:solidFill>
+                      <a:prstDash val="solid"/>
+                      <a:round/>
+                      <a:headEnd type="none" w="med" len="med"/>
+                      <a:tailEnd type="none" w="med" len="med"/>
+                    </a:lnR>
+                    <a:lnT w="6350" cap="flat" cmpd="sng" algn="ctr">
+                      <a:solidFill>
+                        <a:srgbClr val="D8DEE9"/>
+                      </a:solidFill>
+                      <a:prstDash val="solid"/>
+                      <a:round/>
+                      <a:headEnd type="none" w="med" len="med"/>
+                      <a:tailEnd type="none" w="med" len="med"/>
+                    </a:lnT>
+                    <a:lnB w="6350" cap="flat" cmpd="sng" algn="ctr">
+                      <a:solidFill>
+                        <a:srgbClr val="D8DEE9"/>
+                      </a:solidFill>
+                      <a:prstDash val="solid"/>
+                      <a:round/>
+                      <a:headEnd type="none" w="med" len="med"/>
+                      <a:tailEnd type="none" w="med" len="med"/>
+                    </a:lnB>
+                    <a:solidFill>
+                      <a:srgbClr val="FFFFFF"/>
+                    </a:solidFill>
+                  </a:tcPr>
+                </a:tc>
+                <a:tc>
+                  <a:txBody>
+                    <a:bodyPr/>
+                    <a:lstStyle/>
+                    <a:p>
+                      <a:pPr indent="0" marL="0">
+                        <a:buNone/>
+                      </a:pPr>
+                      <a:r>
+                        <a:rPr lang="en-US" sz="1150" b="1" dirty="0">
+                          <a:solidFill>
+                            <a:srgbClr val="9C6A1F"/>
+                          </a:solidFill>
+                          <a:latin typeface="Noto Sans CJK TC" pitchFamily="34" charset="0"/>
+                          <a:ea typeface="Noto Sans CJK TC" pitchFamily="34" charset="-122"/>
+                          <a:cs typeface="Noto Sans CJK TC" pitchFamily="34" charset="-120"/>
+                        </a:rPr>
+                        <a:t>成熟</a:t>
+                      </a:r>
+                      <a:endParaRPr lang="en-US" sz="1150" dirty="0">
+                        <a:latin typeface="Noto Sans CJK TC" charset="0"/>
+                        <a:ea typeface="Noto Sans CJK TC" charset="0"/>
+                        <a:cs typeface="Noto Sans CJK TC" charset="0"/>
+                      </a:endParaRPr>
+                    </a:p>
+                  </a:txBody>
+                  <a:tcPr marL="91440" marR="91440" marT="45720" marB="45720" anchor="ctr">
+                    <a:lnL w="6350" cap="flat" cmpd="sng" algn="ctr">
+                      <a:solidFill>
+                        <a:srgbClr val="D8DEE9"/>
+                      </a:solidFill>
+                      <a:prstDash val="solid"/>
+                      <a:round/>
+                      <a:headEnd type="none" w="med" len="med"/>
+                      <a:tailEnd type="none" w="med" len="med"/>
+                    </a:lnL>
+                    <a:lnR w="6350" cap="flat" cmpd="sng" algn="ctr">
+                      <a:solidFill>
+                        <a:srgbClr val="D8DEE9"/>
+                      </a:solidFill>
+                      <a:prstDash val="solid"/>
+                      <a:round/>
+                      <a:headEnd type="none" w="med" len="med"/>
+                      <a:tailEnd type="none" w="med" len="med"/>
+                    </a:lnR>
+                    <a:lnT w="6350" cap="flat" cmpd="sng" algn="ctr">
+                      <a:solidFill>
+                        <a:srgbClr val="D8DEE9"/>
+                      </a:solidFill>
+                      <a:prstDash val="solid"/>
+                      <a:round/>
+                      <a:headEnd type="none" w="med" len="med"/>
+                      <a:tailEnd type="none" w="med" len="med"/>
+                    </a:lnT>
+                    <a:lnB w="6350" cap="flat" cmpd="sng" algn="ctr">
+                      <a:solidFill>
+                        <a:srgbClr val="D8DEE9"/>
+                      </a:solidFill>
+                      <a:prstDash val="solid"/>
+                      <a:round/>
+                      <a:headEnd type="none" w="med" len="med"/>
+                      <a:tailEnd type="none" w="med" len="med"/>
+                    </a:lnB>
+                    <a:solidFill>
+                      <a:srgbClr val="FFFFFF"/>
+                    </a:solidFill>
+                  </a:tcPr>
+                </a:tc>
+              </a:tr>
+              <a:tr h="457200">
+                <a:tc>
+                  <a:txBody>
+                    <a:bodyPr/>
+                    <a:lstStyle/>
+                    <a:p>
+                      <a:pPr indent="0" marL="0">
+                        <a:buNone/>
+                      </a:pPr>
+                      <a:r>
+                        <a:rPr lang="en-US" sz="1150" dirty="0">
+                          <a:solidFill>
+                            <a:srgbClr val="2A3550"/>
+                          </a:solidFill>
+                          <a:latin typeface="Noto Sans CJK TC" pitchFamily="34" charset="0"/>
+                          <a:ea typeface="Noto Sans CJK TC" pitchFamily="34" charset="-122"/>
+                          <a:cs typeface="Noto Sans CJK TC" pitchFamily="34" charset="-120"/>
+                        </a:rPr>
+                        <a:t> 客戶中立性</a:t>
+                      </a:r>
+                      <a:endParaRPr lang="en-US" sz="1150" dirty="0">
+                        <a:latin typeface="Noto Sans CJK TC" charset="0"/>
+                        <a:ea typeface="Noto Sans CJK TC" charset="0"/>
+                        <a:cs typeface="Noto Sans CJK TC" charset="0"/>
+                      </a:endParaRPr>
+                    </a:p>
+                  </a:txBody>
+                  <a:tcPr marL="91440" marR="91440" marT="45720" marB="45720" anchor="ctr">
+                    <a:lnL w="6350" cap="flat" cmpd="sng" algn="ctr">
+                      <a:solidFill>
+                        <a:srgbClr val="D8DEE9"/>
+                      </a:solidFill>
+                      <a:prstDash val="solid"/>
+                      <a:round/>
+                      <a:headEnd type="none" w="med" len="med"/>
+                      <a:tailEnd type="none" w="med" len="med"/>
+                    </a:lnL>
+                    <a:lnR w="6350" cap="flat" cmpd="sng" algn="ctr">
+                      <a:solidFill>
+                        <a:srgbClr val="D8DEE9"/>
+                      </a:solidFill>
+                      <a:prstDash val="solid"/>
+                      <a:round/>
+                      <a:headEnd type="none" w="med" len="med"/>
+                      <a:tailEnd type="none" w="med" len="med"/>
+                    </a:lnR>
+                    <a:lnT w="6350" cap="flat" cmpd="sng" algn="ctr">
+                      <a:solidFill>
+                        <a:srgbClr val="D8DEE9"/>
+                      </a:solidFill>
+                      <a:prstDash val="solid"/>
+                      <a:round/>
+                      <a:headEnd type="none" w="med" len="med"/>
+                      <a:tailEnd type="none" w="med" len="med"/>
+                    </a:lnT>
+                    <a:lnB w="6350" cap="flat" cmpd="sng" algn="ctr">
+                      <a:solidFill>
+                        <a:srgbClr val="D8DEE9"/>
+                      </a:solidFill>
+                      <a:prstDash val="solid"/>
+                      <a:round/>
+                      <a:headEnd type="none" w="med" len="med"/>
+                      <a:tailEnd type="none" w="med" len="med"/>
+                    </a:lnB>
+                    <a:solidFill>
+                      <a:srgbClr val="FFFFFF"/>
+                    </a:solidFill>
+                  </a:tcPr>
+                </a:tc>
+                <a:tc>
+                  <a:txBody>
+                    <a:bodyPr/>
+                    <a:lstStyle/>
+                    <a:p>
+                      <a:pPr indent="0" marL="0">
+                        <a:buNone/>
+                      </a:pPr>
+                      <a:r>
+                        <a:rPr lang="en-US" sz="1150" dirty="0">
+                          <a:solidFill>
+                            <a:srgbClr val="2A3550"/>
+                          </a:solidFill>
+                          <a:latin typeface="Noto Sans CJK TC" pitchFamily="34" charset="0"/>
+                          <a:ea typeface="Noto Sans CJK TC" pitchFamily="34" charset="-122"/>
+                          <a:cs typeface="Noto Sans CJK TC" pitchFamily="34" charset="-120"/>
+                        </a:rPr>
+                        <a:t>有疑慮</a:t>
+                      </a:r>
+                      <a:endParaRPr lang="en-US" sz="1150" dirty="0">
+                        <a:latin typeface="Noto Sans CJK TC" charset="0"/>
+                        <a:ea typeface="Noto Sans CJK TC" charset="0"/>
+                        <a:cs typeface="Noto Sans CJK TC" charset="0"/>
+                      </a:endParaRPr>
+                    </a:p>
+                  </a:txBody>
+                  <a:tcPr marL="91440" marR="91440" marT="45720" marB="45720" anchor="ctr">
+                    <a:lnL w="6350" cap="flat" cmpd="sng" algn="ctr">
+                      <a:solidFill>
+                        <a:srgbClr val="D8DEE9"/>
+                      </a:solidFill>
+                      <a:prstDash val="solid"/>
+                      <a:round/>
+                      <a:headEnd type="none" w="med" len="med"/>
+                      <a:tailEnd type="none" w="med" len="med"/>
+                    </a:lnL>
+                    <a:lnR w="6350" cap="flat" cmpd="sng" algn="ctr">
+                      <a:solidFill>
+                        <a:srgbClr val="D8DEE9"/>
+                      </a:solidFill>
+                      <a:prstDash val="solid"/>
+                      <a:round/>
+                      <a:headEnd type="none" w="med" len="med"/>
+                      <a:tailEnd type="none" w="med" len="med"/>
+                    </a:lnR>
+                    <a:lnT w="6350" cap="flat" cmpd="sng" algn="ctr">
+                      <a:solidFill>
+                        <a:srgbClr val="D8DEE9"/>
+                      </a:solidFill>
+                      <a:prstDash val="solid"/>
+                      <a:round/>
+                      <a:headEnd type="none" w="med" len="med"/>
+                      <a:tailEnd type="none" w="med" len="med"/>
+                    </a:lnT>
+                    <a:lnB w="6350" cap="flat" cmpd="sng" algn="ctr">
+                      <a:solidFill>
+                        <a:srgbClr val="D8DEE9"/>
+                      </a:solidFill>
+                      <a:prstDash val="solid"/>
+                      <a:round/>
+                      <a:headEnd type="none" w="med" len="med"/>
+                      <a:tailEnd type="none" w="med" len="med"/>
+                    </a:lnB>
+                    <a:solidFill>
+                      <a:srgbClr val="FFFFFF"/>
+                    </a:solidFill>
+                  </a:tcPr>
+                </a:tc>
+                <a:tc>
+                  <a:txBody>
+                    <a:bodyPr/>
+                    <a:lstStyle/>
+                    <a:p>
+                      <a:pPr indent="0" marL="0">
+                        <a:buNone/>
+                      </a:pPr>
+                      <a:r>
+                        <a:rPr lang="en-US" sz="1150" b="1" dirty="0">
+                          <a:solidFill>
+                            <a:srgbClr val="9C6A1F"/>
+                          </a:solidFill>
+                          <a:latin typeface="Noto Sans CJK TC" pitchFamily="34" charset="0"/>
+                          <a:ea typeface="Noto Sans CJK TC" pitchFamily="34" charset="-122"/>
+                          <a:cs typeface="Noto Sans CJK TC" pitchFamily="34" charset="-120"/>
+                        </a:rPr>
+                        <a:t>較自然</a:t>
+                      </a:r>
+                      <a:endParaRPr lang="en-US" sz="1150" dirty="0">
+                        <a:latin typeface="Noto Sans CJK TC" charset="0"/>
+                        <a:ea typeface="Noto Sans CJK TC" charset="0"/>
+                        <a:cs typeface="Noto Sans CJK TC" charset="0"/>
+                      </a:endParaRPr>
+                    </a:p>
+                  </a:txBody>
+                  <a:tcPr marL="91440" marR="91440" marT="45720" marB="45720" anchor="ctr">
+                    <a:lnL w="6350" cap="flat" cmpd="sng" algn="ctr">
+                      <a:solidFill>
+                        <a:srgbClr val="D8DEE9"/>
+                      </a:solidFill>
+                      <a:prstDash val="solid"/>
+                      <a:round/>
+                      <a:headEnd type="none" w="med" len="med"/>
+                      <a:tailEnd type="none" w="med" len="med"/>
+                    </a:lnL>
+                    <a:lnR w="6350" cap="flat" cmpd="sng" algn="ctr">
+                      <a:solidFill>
+                        <a:srgbClr val="D8DEE9"/>
+                      </a:solidFill>
+                      <a:prstDash val="solid"/>
+                      <a:round/>
+                      <a:headEnd type="none" w="med" len="med"/>
+                      <a:tailEnd type="none" w="med" len="med"/>
+                    </a:lnR>
+                    <a:lnT w="6350" cap="flat" cmpd="sng" algn="ctr">
+                      <a:solidFill>
+                        <a:srgbClr val="D8DEE9"/>
+                      </a:solidFill>
+                      <a:prstDash val="solid"/>
+                      <a:round/>
+                      <a:headEnd type="none" w="med" len="med"/>
+                      <a:tailEnd type="none" w="med" len="med"/>
+                    </a:lnT>
+                    <a:lnB w="6350" cap="flat" cmpd="sng" algn="ctr">
+                      <a:solidFill>
+                        <a:srgbClr val="D8DEE9"/>
+                      </a:solidFill>
+                      <a:prstDash val="solid"/>
+                      <a:round/>
+                      <a:headEnd type="none" w="med" len="med"/>
+                      <a:tailEnd type="none" w="med" len="med"/>
+                    </a:lnB>
+                    <a:solidFill>
+                      <a:srgbClr val="FFFFFF"/>
+                    </a:solidFill>
+                  </a:tcPr>
+                </a:tc>
+              </a:tr>
+            </a:tbl>
+          </a:graphicData>
+        </a:graphic>
+      </p:graphicFrame>
+      <p:sp>
+        <p:nvSpPr>
+          <p:cNvPr id="5" name="Shape 2"/>
+          <p:cNvSpPr/>
+          <p:nvPr/>
+        </p:nvSpPr>
+        <p:spPr>
+          <a:xfrm>
+            <a:off x="7178040" y="1600200"/>
+            <a:ext cx="4434840" cy="3977640"/>
           </a:xfrm>
           <a:prstGeom prst="roundRect">
             <a:avLst>
-              <a:gd name="adj" fmla="val 2540"/>
+              <a:gd name="adj" fmla="val 1839"/>
             </a:avLst>
           </a:prstGeom>
           <a:solidFill>
@@ -6586,14 +8699,14 @@
       </p:sp>
       <p:sp>
         <p:nvSpPr>
-          <p:cNvPr id="5" name="Text 3"/>
-          <p:cNvSpPr/>
-          <p:nvPr/>
-        </p:nvSpPr>
-        <p:spPr>
-          <a:xfrm>
-            <a:off x="868680" y="1965960"/>
-            <a:ext cx="2926080" cy="320040"/>
+          <p:cNvPr id="6" name="Text 3"/>
+          <p:cNvSpPr/>
+          <p:nvPr/>
+        </p:nvSpPr>
+        <p:spPr>
+          <a:xfrm>
+            <a:off x="7498080" y="1874520"/>
+            <a:ext cx="3840480" cy="411480"/>
           </a:xfrm>
           <a:prstGeom prst="rect">
             <a:avLst/>
@@ -6609,107 +8722,77 @@
               <a:buNone/>
             </a:pPr>
             <a:r>
-              <a:rPr lang="en-US" sz="1200" b="1" dirty="0">
+              <a:rPr lang="en-US" sz="1900" b="1" dirty="0">
                 <a:solidFill>
                   <a:srgbClr val="37C7C0"/>
+                </a:solidFill>
+                <a:latin typeface="Noto Serif CJK TC" pitchFamily="34" charset="0"/>
+                <a:ea typeface="Noto Serif CJK TC" pitchFamily="34" charset="-122"/>
+                <a:cs typeface="Noto Serif CJK TC" pitchFamily="34" charset="-120"/>
+              </a:rPr>
+              <a:t>為何是 12nm？</a:t>
+            </a:r>
+            <a:endParaRPr lang="en-US" sz="1900" dirty="0"/>
+          </a:p>
+        </p:txBody>
+      </p:sp>
+      <p:sp>
+        <p:nvSpPr>
+          <p:cNvPr id="7" name="Text 4"/>
+          <p:cNvSpPr/>
+          <p:nvPr/>
+        </p:nvSpPr>
+        <p:spPr>
+          <a:xfrm>
+            <a:off x="7498080" y="2377440"/>
+            <a:ext cx="3840480" cy="3017520"/>
+          </a:xfrm>
+          <a:prstGeom prst="rect">
+            <a:avLst/>
+          </a:prstGeom>
+          <a:noFill/>
+          <a:ln/>
+        </p:spPr>
+        <p:txBody>
+          <a:bodyPr wrap="square" rtlCol="0" anchor="t"/>
+          <a:lstStyle/>
+          <a:p>
+            <a:pPr marL="177800" indent="-177800">
+              <a:lnSpc>
+                <a:spcPct val="105000"/>
+              </a:lnSpc>
+              <a:spcAft>
+                <a:spcPts val="1300"/>
+              </a:spcAft>
+              <a:buSzPct val="100000"/>
+              <a:buChar char="•"/>
+            </a:pPr>
+            <a:r>
+              <a:rPr lang="en-US" sz="1300" dirty="0">
+                <a:solidFill>
+                  <a:srgbClr val="AFC6E9"/>
                 </a:solidFill>
                 <a:latin typeface="Noto Sans CJK TC" pitchFamily="34" charset="0"/>
                 <a:ea typeface="Noto Sans CJK TC" pitchFamily="34" charset="-122"/>
                 <a:cs typeface="Noto Sans CJK TC" pitchFamily="34" charset="-120"/>
               </a:rPr>
-              <a:t>第一層 · 核心</a:t>
-            </a:r>
-            <a:endParaRPr lang="en-US" sz="1200" dirty="0"/>
-          </a:p>
-        </p:txBody>
-      </p:sp>
-      <p:sp>
-        <p:nvSpPr>
-          <p:cNvPr id="6" name="Text 4"/>
-          <p:cNvSpPr/>
-          <p:nvPr/>
-        </p:nvSpPr>
-        <p:spPr>
-          <a:xfrm>
-            <a:off x="868680" y="2313432"/>
-            <a:ext cx="2926080" cy="502920"/>
-          </a:xfrm>
-          <a:prstGeom prst="rect">
-            <a:avLst/>
-          </a:prstGeom>
-          <a:noFill/>
-          <a:ln/>
-        </p:spPr>
-        <p:txBody>
-          <a:bodyPr wrap="square" rtlCol="0" anchor="ctr"/>
-          <a:lstStyle/>
-          <a:p>
-            <a:pPr indent="0" marL="0">
-              <a:buNone/>
-            </a:pPr>
-            <a:r>
-              <a:rPr lang="en-US" sz="2100" b="1" dirty="0">
-                <a:solidFill>
-                  <a:srgbClr val="FFFFFF"/>
-                </a:solidFill>
-                <a:latin typeface="Noto Serif CJK TC" pitchFamily="34" charset="0"/>
-                <a:ea typeface="Noto Serif CJK TC" pitchFamily="34" charset="-122"/>
-                <a:cs typeface="Noto Serif CJK TC" pitchFamily="34" charset="-120"/>
-              </a:rPr>
-              <a:t>前段深化</a:t>
-            </a:r>
-            <a:endParaRPr lang="en-US" sz="2100" dirty="0"/>
-          </a:p>
-        </p:txBody>
-      </p:sp>
-      <p:sp>
-        <p:nvSpPr>
-          <p:cNvPr id="7" name="Shape 5"/>
-          <p:cNvSpPr/>
-          <p:nvPr/>
-        </p:nvSpPr>
-        <p:spPr>
-          <a:xfrm>
-            <a:off x="868680" y="2880360"/>
-            <a:ext cx="1737360" cy="329184"/>
-          </a:xfrm>
-          <a:prstGeom prst="roundRect">
-            <a:avLst>
-              <a:gd name="adj" fmla="val 13889"/>
-            </a:avLst>
-          </a:prstGeom>
-          <a:solidFill>
-            <a:srgbClr val="16264A"/>
-          </a:solidFill>
-          <a:ln/>
-        </p:spPr>
-      </p:sp>
-      <p:sp>
-        <p:nvSpPr>
-          <p:cNvPr id="8" name="Text 6"/>
-          <p:cNvSpPr/>
-          <p:nvPr/>
-        </p:nvSpPr>
-        <p:spPr>
-          <a:xfrm>
-            <a:off x="868680" y="2880360"/>
-            <a:ext cx="1737360" cy="329184"/>
-          </a:xfrm>
-          <a:prstGeom prst="rect">
-            <a:avLst/>
-          </a:prstGeom>
-          <a:noFill/>
-          <a:ln/>
-        </p:spPr>
-        <p:txBody>
-          <a:bodyPr wrap="square" rtlCol="0" anchor="ctr"/>
-          <a:lstStyle/>
-          <a:p>
-            <a:pPr algn="ctr" indent="0" marL="0">
-              <a:buNone/>
-            </a:pPr>
-            <a:r>
-              <a:rPr lang="en-US" sz="1100" b="1" dirty="0">
+              <a:t>比 UMC 主力 22/28nm 更先進，又不像 3nm 那樣需要極端客戶生態與良率驗證。</a:t>
+            </a:r>
+            <a:endParaRPr lang="en-US" sz="1300" dirty="0"/>
+          </a:p>
+          <a:p>
+            <a:pPr marL="177800" indent="-177800">
+              <a:lnSpc>
+                <a:spcPct val="105000"/>
+              </a:lnSpc>
+              <a:spcAft>
+                <a:spcPts val="1300"/>
+              </a:spcAft>
+              <a:buSzPct val="100000"/>
+              <a:buChar char="•"/>
+            </a:pPr>
+            <a:r>
+              <a:rPr lang="en-US" sz="1300" dirty="0">
                 <a:solidFill>
                   <a:srgbClr val="AFC6E9"/>
                 </a:solidFill>
@@ -6717,41 +8800,23 @@
                 <a:ea typeface="Noto Sans CJK TC" pitchFamily="34" charset="-122"/>
                 <a:cs typeface="Noto Sans CJK TC" pitchFamily="34" charset="-120"/>
               </a:rPr>
-              <a:t>高信心</a:t>
-            </a:r>
-            <a:endParaRPr lang="en-US" sz="1100" dirty="0"/>
-          </a:p>
-        </p:txBody>
-      </p:sp>
-      <p:sp>
-        <p:nvSpPr>
-          <p:cNvPr id="9" name="Text 7"/>
-          <p:cNvSpPr/>
-          <p:nvPr/>
-        </p:nvSpPr>
-        <p:spPr>
-          <a:xfrm>
-            <a:off x="868680" y="3383280"/>
-            <a:ext cx="2926080" cy="1051560"/>
-          </a:xfrm>
-          <a:prstGeom prst="rect">
-            <a:avLst/>
-          </a:prstGeom>
-          <a:noFill/>
-          <a:ln/>
-        </p:spPr>
-        <p:txBody>
-          <a:bodyPr wrap="square" rtlCol="0" anchor="t"/>
-          <a:lstStyle/>
-          <a:p>
-            <a:pPr indent="0" marL="0">
+              <a:t>是最先進、但不需 EUV 的節點 — price-performance 甜蜜點。</a:t>
+            </a:r>
+            <a:endParaRPr lang="en-US" sz="1300" dirty="0"/>
+          </a:p>
+          <a:p>
+            <a:pPr marL="177800" indent="-177800">
               <a:lnSpc>
-                <a:spcPct val="108000"/>
+                <a:spcPct val="105000"/>
               </a:lnSpc>
-              <a:buNone/>
-            </a:pPr>
-            <a:r>
-              <a:rPr lang="en-US" sz="1250" dirty="0">
+              <a:spcAft>
+                <a:spcPts val="1300"/>
+              </a:spcAft>
+              <a:buSzPct val="100000"/>
+              <a:buChar char="•"/>
+            </a:pPr>
+            <a:r>
+              <a:rPr lang="en-US" sz="1300" dirty="0">
                 <a:solidFill>
                   <a:srgbClr val="AFC6E9"/>
                 </a:solidFill>
@@ -6759,90 +8824,43 @@
                 <a:ea typeface="Noto Sans CJK TC" pitchFamily="34" charset="-122"/>
                 <a:cs typeface="Noto Sans CJK TC" pitchFamily="34" charset="-120"/>
               </a:rPr>
-              <a:t>新加坡定位為台灣以外、China-free 的特殊製程第二中心（含 55nm BCD）。重資本投在自己最有護城河的前段。</a:t>
-            </a:r>
-            <a:endParaRPr lang="en-US" sz="1250" dirty="0"/>
-          </a:p>
-        </p:txBody>
-      </p:sp>
-      <p:sp>
-        <p:nvSpPr>
-          <p:cNvPr id="10" name="Shape 8"/>
-          <p:cNvSpPr/>
-          <p:nvPr/>
-        </p:nvSpPr>
-        <p:spPr>
-          <a:xfrm>
-            <a:off x="4297680" y="1691640"/>
-            <a:ext cx="3566160" cy="2880360"/>
-          </a:xfrm>
-          <a:prstGeom prst="roundRect">
-            <a:avLst>
-              <a:gd name="adj" fmla="val 2540"/>
-            </a:avLst>
-          </a:prstGeom>
-          <a:solidFill>
-            <a:srgbClr val="FFFFFF"/>
-          </a:solidFill>
-          <a:ln/>
-          <a:effectLst>
-            <a:outerShdw sx="100000" sy="100000" kx="0" ky="0" algn="bl" rotWithShape="0" blurRad="88900" dist="38100" dir="5400000">
-              <a:srgbClr val="0E1B33">
-                <a:alpha val="18000"/>
-              </a:srgbClr>
-            </a:outerShdw>
-          </a:effectLst>
-        </p:spPr>
-      </p:sp>
-      <p:sp>
-        <p:nvSpPr>
-          <p:cNvPr id="11" name="Text 9"/>
-          <p:cNvSpPr/>
-          <p:nvPr/>
-        </p:nvSpPr>
-        <p:spPr>
-          <a:xfrm>
-            <a:off x="4617720" y="1965960"/>
-            <a:ext cx="2926080" cy="320040"/>
-          </a:xfrm>
-          <a:prstGeom prst="rect">
-            <a:avLst/>
-          </a:prstGeom>
-          <a:noFill/>
-          <a:ln/>
-        </p:spPr>
-        <p:txBody>
-          <a:bodyPr wrap="square" rtlCol="0" anchor="ctr"/>
-          <a:lstStyle/>
-          <a:p>
-            <a:pPr indent="0" marL="0">
-              <a:buNone/>
-            </a:pPr>
-            <a:r>
-              <a:rPr lang="en-US" sz="1200" b="1" dirty="0">
-                <a:solidFill>
-                  <a:srgbClr val="C98A3A"/>
+              <a:t>落在美國 Arizona（Ocotillo）製造，給客戶 China-free 的供應鏈選項。</a:t>
+            </a:r>
+            <a:endParaRPr lang="en-US" sz="1300" dirty="0"/>
+          </a:p>
+          <a:p>
+            <a:pPr marL="177800" indent="-177800">
+              <a:lnSpc>
+                <a:spcPct val="105000"/>
+              </a:lnSpc>
+              <a:buSzPct val="100000"/>
+              <a:buChar char="•"/>
+            </a:pPr>
+            <a:r>
+              <a:rPr lang="en-US" sz="1300" dirty="0">
+                <a:solidFill>
+                  <a:srgbClr val="AFC6E9"/>
                 </a:solidFill>
                 <a:latin typeface="Noto Sans CJK TC" pitchFamily="34" charset="0"/>
                 <a:ea typeface="Noto Sans CJK TC" pitchFamily="34" charset="-122"/>
                 <a:cs typeface="Noto Sans CJK TC" pitchFamily="34" charset="-120"/>
               </a:rPr>
-              <a:t>第二層 · 協調</a:t>
-            </a:r>
-            <a:endParaRPr lang="en-US" sz="1200" dirty="0"/>
-          </a:p>
-        </p:txBody>
-      </p:sp>
-      <p:sp>
-        <p:nvSpPr>
-          <p:cNvPr id="12" name="Text 10"/>
-          <p:cNvSpPr/>
-          <p:nvPr/>
-        </p:nvSpPr>
-        <p:spPr>
-          <a:xfrm>
-            <a:off x="4617720" y="2313432"/>
-            <a:ext cx="2926080" cy="502920"/>
+              <a:t>讓 Intel 學 pure foundry、讓 UMC 升級節點、讓客戶取得美國製造選項。</a:t>
+            </a:r>
+            <a:endParaRPr lang="en-US" sz="1300" dirty="0"/>
+          </a:p>
+        </p:txBody>
+      </p:sp>
+      <p:sp>
+        <p:nvSpPr>
+          <p:cNvPr id="8" name="Text 5"/>
+          <p:cNvSpPr/>
+          <p:nvPr/>
+        </p:nvSpPr>
+        <p:spPr>
+          <a:xfrm>
+            <a:off x="548640" y="5806440"/>
+            <a:ext cx="11064240" cy="640080"/>
           </a:xfrm>
           <a:prstGeom prst="rect">
             <a:avLst/>
@@ -6858,118 +8876,29 @@
               <a:buNone/>
             </a:pPr>
             <a:r>
-              <a:rPr lang="en-US" sz="2100" b="1" dirty="0">
-                <a:solidFill>
-                  <a:srgbClr val="1B2538"/>
-                </a:solidFill>
-                <a:latin typeface="Noto Serif CJK TC" pitchFamily="34" charset="0"/>
-                <a:ea typeface="Noto Serif CJK TC" pitchFamily="34" charset="-122"/>
-                <a:cs typeface="Noto Serif CJK TC" pitchFamily="34" charset="-120"/>
-              </a:rPr>
-              <a:t>後段輕度協同</a:t>
-            </a:r>
-            <a:endParaRPr lang="en-US" sz="2100" dirty="0"/>
-          </a:p>
-        </p:txBody>
-      </p:sp>
-      <p:sp>
-        <p:nvSpPr>
-          <p:cNvPr id="13" name="Shape 11"/>
-          <p:cNvSpPr/>
-          <p:nvPr/>
-        </p:nvSpPr>
-        <p:spPr>
-          <a:xfrm>
-            <a:off x="4617720" y="2880360"/>
-            <a:ext cx="1737360" cy="329184"/>
-          </a:xfrm>
-          <a:prstGeom prst="roundRect">
-            <a:avLst>
-              <a:gd name="adj" fmla="val 13889"/>
-            </a:avLst>
-          </a:prstGeom>
-          <a:solidFill>
-            <a:srgbClr val="EEF1F6"/>
-          </a:solidFill>
-          <a:ln/>
-        </p:spPr>
-      </p:sp>
-      <p:sp>
-        <p:nvSpPr>
-          <p:cNvPr id="14" name="Text 12"/>
-          <p:cNvSpPr/>
-          <p:nvPr/>
-        </p:nvSpPr>
-        <p:spPr>
-          <a:xfrm>
-            <a:off x="4617720" y="2880360"/>
-            <a:ext cx="1737360" cy="329184"/>
-          </a:xfrm>
-          <a:prstGeom prst="rect">
-            <a:avLst/>
-          </a:prstGeom>
-          <a:noFill/>
-          <a:ln/>
-        </p:spPr>
-        <p:txBody>
-          <a:bodyPr wrap="square" rtlCol="0" anchor="ctr"/>
-          <a:lstStyle/>
-          <a:p>
-            <a:pPr algn="ctr" indent="0" marL="0">
-              <a:buNone/>
-            </a:pPr>
-            <a:r>
-              <a:rPr lang="en-US" sz="1100" b="1" dirty="0">
-                <a:solidFill>
-                  <a:srgbClr val="5A6678"/>
+              <a:rPr lang="en-US" sz="1250" b="1" dirty="0">
+                <a:solidFill>
+                  <a:srgbClr val="274472"/>
                 </a:solidFill>
                 <a:latin typeface="Noto Sans CJK TC" pitchFamily="34" charset="0"/>
                 <a:ea typeface="Noto Sans CJK TC" pitchFamily="34" charset="-122"/>
                 <a:cs typeface="Noto Sans CJK TC" pitchFamily="34" charset="-120"/>
               </a:rPr>
-              <a:t>中信心</a:t>
-            </a:r>
-            <a:endParaRPr lang="en-US" sz="1100" dirty="0"/>
-          </a:p>
-        </p:txBody>
-      </p:sp>
-      <p:sp>
-        <p:nvSpPr>
-          <p:cNvPr id="15" name="Text 13"/>
-          <p:cNvSpPr/>
-          <p:nvPr/>
-        </p:nvSpPr>
-        <p:spPr>
-          <a:xfrm>
-            <a:off x="4617720" y="3383280"/>
-            <a:ext cx="2926080" cy="1051560"/>
-          </a:xfrm>
-          <a:prstGeom prst="rect">
-            <a:avLst/>
-          </a:prstGeom>
-          <a:noFill/>
-          <a:ln/>
-        </p:spPr>
-        <p:txBody>
-          <a:bodyPr wrap="square" rtlCol="0" anchor="t"/>
-          <a:lstStyle/>
-          <a:p>
+              <a:t>對 UMC 的啟示：  </a:t>
+            </a:r>
             <a:pPr indent="0" marL="0">
-              <a:lnSpc>
-                <a:spcPct val="108000"/>
-              </a:lnSpc>
               <a:buNone/>
             </a:pPr>
             <a:r>
               <a:rPr lang="en-US" sz="1250" dirty="0">
                 <a:solidFill>
-                  <a:srgbClr val="55617A"/>
+                  <a:srgbClr val="44516A"/>
                 </a:solidFill>
                 <a:latin typeface="Noto Sans CJK TC" pitchFamily="34" charset="0"/>
                 <a:ea typeface="Noto Sans CJK TC" pitchFamily="34" charset="-122"/>
                 <a:cs typeface="Noto Sans CJK TC" pitchFamily="34" charset="-120"/>
               </a:rPr>
-              <a:t>不出資、不合資；與區域 OSAT 建立製程界面預先對接、FA 協同與優選名單。拿週期縮短的好處，不背重資本。</a:t>
+              <a:t>UMC 的護城河是「把製程變成客戶願意長期投片的 foundry product」。東南亞布局也應該圍繞這個服務能力，而非追前沿節點或重資本後段。</a:t>
             </a:r>
             <a:endParaRPr lang="en-US" sz="1250" dirty="0"/>
           </a:p>
@@ -6977,43 +8906,14 @@
       </p:sp>
       <p:sp>
         <p:nvSpPr>
-          <p:cNvPr id="16" name="Shape 14"/>
-          <p:cNvSpPr/>
-          <p:nvPr/>
-        </p:nvSpPr>
-        <p:spPr>
-          <a:xfrm>
-            <a:off x="8046720" y="1691640"/>
-            <a:ext cx="3566160" cy="2880360"/>
-          </a:xfrm>
-          <a:prstGeom prst="roundRect">
-            <a:avLst>
-              <a:gd name="adj" fmla="val 2540"/>
-            </a:avLst>
-          </a:prstGeom>
-          <a:solidFill>
-            <a:srgbClr val="FFFFFF"/>
-          </a:solidFill>
-          <a:ln/>
-          <a:effectLst>
-            <a:outerShdw sx="100000" sy="100000" kx="0" ky="0" algn="bl" rotWithShape="0" blurRad="88900" dist="38100" dir="5400000">
-              <a:srgbClr val="0E1B33">
-                <a:alpha val="18000"/>
-              </a:srgbClr>
-            </a:outerShdw>
-          </a:effectLst>
-        </p:spPr>
-      </p:sp>
-      <p:sp>
-        <p:nvSpPr>
-          <p:cNvPr id="17" name="Text 15"/>
-          <p:cNvSpPr/>
-          <p:nvPr/>
-        </p:nvSpPr>
-        <p:spPr>
-          <a:xfrm>
-            <a:off x="8366760" y="1965960"/>
-            <a:ext cx="2926080" cy="320040"/>
+          <p:cNvPr id="9" name="Text 6"/>
+          <p:cNvSpPr/>
+          <p:nvPr/>
+        </p:nvSpPr>
+        <p:spPr>
+          <a:xfrm>
+            <a:off x="548640" y="6400800"/>
+            <a:ext cx="10972800" cy="274320"/>
           </a:xfrm>
           <a:prstGeom prst="rect">
             <a:avLst/>
@@ -7029,258 +8929,17 @@
               <a:buNone/>
             </a:pPr>
             <a:r>
-              <a:rPr lang="en-US" sz="1200" b="1" dirty="0">
-                <a:solidFill>
-                  <a:srgbClr val="274472"/>
+              <a:rPr lang="en-US" sz="950" i="1" dirty="0">
+                <a:solidFill>
+                  <a:srgbClr val="6B7894"/>
                 </a:solidFill>
                 <a:latin typeface="Noto Sans CJK TC" pitchFamily="34" charset="0"/>
                 <a:ea typeface="Noto Sans CJK TC" pitchFamily="34" charset="-122"/>
                 <a:cs typeface="Noto Sans CJK TC" pitchFamily="34" charset="-120"/>
               </a:rPr>
-              <a:t>第三層 · 選擇權</a:t>
-            </a:r>
-            <a:endParaRPr lang="en-US" sz="1200" dirty="0"/>
-          </a:p>
-        </p:txBody>
-      </p:sp>
-      <p:sp>
-        <p:nvSpPr>
-          <p:cNvPr id="18" name="Text 16"/>
-          <p:cNvSpPr/>
-          <p:nvPr/>
-        </p:nvSpPr>
-        <p:spPr>
-          <a:xfrm>
-            <a:off x="8366760" y="2313432"/>
-            <a:ext cx="2926080" cy="502920"/>
-          </a:xfrm>
-          <a:prstGeom prst="rect">
-            <a:avLst/>
-          </a:prstGeom>
-          <a:noFill/>
-          <a:ln/>
-        </p:spPr>
-        <p:txBody>
-          <a:bodyPr wrap="square" rtlCol="0" anchor="ctr"/>
-          <a:lstStyle/>
-          <a:p>
-            <a:pPr indent="0" marL="0">
-              <a:buNone/>
-            </a:pPr>
-            <a:r>
-              <a:rPr lang="en-US" sz="2100" b="1" dirty="0">
-                <a:solidFill>
-                  <a:srgbClr val="1B2538"/>
-                </a:solidFill>
-                <a:latin typeface="Noto Serif CJK TC" pitchFamily="34" charset="0"/>
-                <a:ea typeface="Noto Serif CJK TC" pitchFamily="34" charset="-122"/>
-                <a:cs typeface="Noto Serif CJK TC" pitchFamily="34" charset="-120"/>
-              </a:rPr>
-              <a:t>局部後段投入</a:t>
-            </a:r>
-            <a:endParaRPr lang="en-US" sz="2100" dirty="0"/>
-          </a:p>
-        </p:txBody>
-      </p:sp>
-      <p:sp>
-        <p:nvSpPr>
-          <p:cNvPr id="19" name="Shape 17"/>
-          <p:cNvSpPr/>
-          <p:nvPr/>
-        </p:nvSpPr>
-        <p:spPr>
-          <a:xfrm>
-            <a:off x="8366760" y="2880360"/>
-            <a:ext cx="1737360" cy="329184"/>
-          </a:xfrm>
-          <a:prstGeom prst="roundRect">
-            <a:avLst>
-              <a:gd name="adj" fmla="val 13889"/>
-            </a:avLst>
-          </a:prstGeom>
-          <a:solidFill>
-            <a:srgbClr val="EEF1F6"/>
-          </a:solidFill>
-          <a:ln/>
-        </p:spPr>
-      </p:sp>
-      <p:sp>
-        <p:nvSpPr>
-          <p:cNvPr id="20" name="Text 18"/>
-          <p:cNvSpPr/>
-          <p:nvPr/>
-        </p:nvSpPr>
-        <p:spPr>
-          <a:xfrm>
-            <a:off x="8366760" y="2880360"/>
-            <a:ext cx="1737360" cy="329184"/>
-          </a:xfrm>
-          <a:prstGeom prst="rect">
-            <a:avLst/>
-          </a:prstGeom>
-          <a:noFill/>
-          <a:ln/>
-        </p:spPr>
-        <p:txBody>
-          <a:bodyPr wrap="square" rtlCol="0" anchor="ctr"/>
-          <a:lstStyle/>
-          <a:p>
-            <a:pPr algn="ctr" indent="0" marL="0">
-              <a:buNone/>
-            </a:pPr>
-            <a:r>
-              <a:rPr lang="en-US" sz="1100" b="1" dirty="0">
-                <a:solidFill>
-                  <a:srgbClr val="5A6678"/>
-                </a:solidFill>
-                <a:latin typeface="Noto Sans CJK TC" pitchFamily="34" charset="0"/>
-                <a:ea typeface="Noto Sans CJK TC" pitchFamily="34" charset="-122"/>
-                <a:cs typeface="Noto Sans CJK TC" pitchFamily="34" charset="-120"/>
-              </a:rPr>
-              <a:t>低信心 · 需驗證</a:t>
-            </a:r>
-            <a:endParaRPr lang="en-US" sz="1100" dirty="0"/>
-          </a:p>
-        </p:txBody>
-      </p:sp>
-      <p:sp>
-        <p:nvSpPr>
-          <p:cNvPr id="21" name="Text 19"/>
-          <p:cNvSpPr/>
-          <p:nvPr/>
-        </p:nvSpPr>
-        <p:spPr>
-          <a:xfrm>
-            <a:off x="8366760" y="3383280"/>
-            <a:ext cx="2926080" cy="1051560"/>
-          </a:xfrm>
-          <a:prstGeom prst="rect">
-            <a:avLst/>
-          </a:prstGeom>
-          <a:noFill/>
-          <a:ln/>
-        </p:spPr>
-        <p:txBody>
-          <a:bodyPr wrap="square" rtlCol="0" anchor="t"/>
-          <a:lstStyle/>
-          <a:p>
-            <a:pPr indent="0" marL="0">
-              <a:lnSpc>
-                <a:spcPct val="108000"/>
-              </a:lnSpc>
-              <a:buNone/>
-            </a:pPr>
-            <a:r>
-              <a:rPr lang="en-US" sz="1250" dirty="0">
-                <a:solidFill>
-                  <a:srgbClr val="55617A"/>
-                </a:solidFill>
-                <a:latin typeface="Noto Sans CJK TC" pitchFamily="34" charset="0"/>
-                <a:ea typeface="Noto Sans CJK TC" pitchFamily="34" charset="-122"/>
-                <a:cs typeface="Noto Sans CJK TC" pitchFamily="34" charset="-120"/>
-              </a:rPr>
-              <a:t>僅在單一車用大客戶給 take-or-pay 等級承諾、且量價足夠時才啟動。是 option，不是 base case。</a:t>
-            </a:r>
-            <a:endParaRPr lang="en-US" sz="1250" dirty="0"/>
-          </a:p>
-        </p:txBody>
-      </p:sp>
-      <p:sp>
-        <p:nvSpPr>
-          <p:cNvPr id="22" name="Shape 20"/>
-          <p:cNvSpPr/>
-          <p:nvPr/>
-        </p:nvSpPr>
-        <p:spPr>
-          <a:xfrm>
-            <a:off x="548640" y="4800600"/>
-            <a:ext cx="11064240" cy="1234440"/>
-          </a:xfrm>
-          <a:prstGeom prst="roundRect">
-            <a:avLst>
-              <a:gd name="adj" fmla="val 5185"/>
-            </a:avLst>
-          </a:prstGeom>
-          <a:solidFill>
-            <a:srgbClr val="EAEFF6"/>
-          </a:solidFill>
-          <a:ln/>
-        </p:spPr>
-      </p:sp>
-      <p:pic>
-        <p:nvPicPr>
-          <p:cNvPr id="23" name="Image 0" descr="preencoded.png">    </p:cNvPr>
-          <p:cNvPicPr>
-            <a:picLocks noChangeAspect="1"/>
-          </p:cNvPicPr>
-          <p:nvPr/>
-        </p:nvPicPr>
-        <p:blipFill>
-          <a:blip r:embed="rId1"/>
-          <a:stretch>
-            <a:fillRect/>
-          </a:stretch>
-        </p:blipFill>
-        <p:spPr>
-          <a:xfrm>
-            <a:off x="914400" y="5138928"/>
-            <a:ext cx="502920" cy="502920"/>
-          </a:xfrm>
-          <a:prstGeom prst="rect">
-            <a:avLst/>
-          </a:prstGeom>
-        </p:spPr>
-      </p:pic>
-      <p:sp>
-        <p:nvSpPr>
-          <p:cNvPr id="24" name="Text 21"/>
-          <p:cNvSpPr/>
-          <p:nvPr/>
-        </p:nvSpPr>
-        <p:spPr>
-          <a:xfrm>
-            <a:off x="1600200" y="4892040"/>
-            <a:ext cx="9784080" cy="1051560"/>
-          </a:xfrm>
-          <a:prstGeom prst="rect">
-            <a:avLst/>
-          </a:prstGeom>
-          <a:noFill/>
-          <a:ln/>
-        </p:spPr>
-        <p:txBody>
-          <a:bodyPr wrap="square" rtlCol="0" anchor="ctr"/>
-          <a:lstStyle/>
-          <a:p>
-            <a:pPr indent="0" marL="0">
-              <a:buNone/>
-            </a:pPr>
-            <a:r>
-              <a:rPr lang="en-US" sz="1300" b="1" dirty="0">
-                <a:solidFill>
-                  <a:srgbClr val="274472"/>
-                </a:solidFill>
-                <a:latin typeface="Noto Sans CJK TC" pitchFamily="34" charset="0"/>
-                <a:ea typeface="Noto Sans CJK TC" pitchFamily="34" charset="-122"/>
-                <a:cs typeface="Noto Sans CJK TC" pitchFamily="34" charset="-120"/>
-              </a:rPr>
-              <a:t>對應 Dashboard：  </a:t>
-            </a:r>
-            <a:pPr indent="0" marL="0">
-              <a:buNone/>
-            </a:pPr>
-            <a:r>
-              <a:rPr lang="en-US" sz="1300" dirty="0">
-                <a:solidFill>
-                  <a:srgbClr val="44516A"/>
-                </a:solidFill>
-                <a:latin typeface="Noto Sans CJK TC" pitchFamily="34" charset="0"/>
-                <a:ea typeface="Noto Sans CJK TC" pitchFamily="34" charset="-122"/>
-                <a:cs typeface="Noto Sans CJK TC" pitchFamily="34" charset="-120"/>
-              </a:rPr>
-              <a:t>你的 Country × Mode 矩陣與 commitment-intensity 光譜，正好把這三層映成「國家 × 投入強度」的決策格。建議把每格標上目前所處 Stage（0 篩選 / 1 diligence / 2 投資），讓政策與稅務優惠成為升級門檻，而非加分項。</a:t>
-            </a:r>
-            <a:endParaRPr lang="en-US" sz="1300" dirty="0"/>
+              <a:t>資料：Intel / UMC 官方公告（2024-01-25）、UMC 2025 法說、2025–2026 公開報導</a:t>
+            </a:r>
+            <a:endParaRPr lang="en-US" sz="950" dirty="0"/>
           </a:p>
         </p:txBody>
       </p:sp>
@@ -7349,7 +9008,7 @@
                 <a:ea typeface="Noto Sans CJK TC" pitchFamily="34" charset="-122"/>
                 <a:cs typeface="Noto Sans CJK TC" pitchFamily="34" charset="-120"/>
               </a:rPr>
-              <a:t>OPERATING MODEL</a:t>
+              <a:t>PRECONDITIONS</a:t>
             </a:r>
             <a:endParaRPr lang="en-US" sz="1200" dirty="0"/>
           </a:p>
@@ -7388,7 +9047,7 @@
                 <a:ea typeface="Noto Serif CJK TC" pitchFamily="34" charset="-122"/>
                 <a:cs typeface="Noto Serif CJK TC" pitchFamily="34" charset="-120"/>
               </a:rPr>
-              <a:t>把 Dashboard 變成 decision gate</a:t>
+              <a:t>UMC 東南亞擴張的前提要件</a:t>
             </a:r>
             <a:endParaRPr lang="en-US" sz="3000" dirty="0"/>
           </a:p>
@@ -7396,18 +9055,57 @@
       </p:sp>
       <p:sp>
         <p:nvSpPr>
-          <p:cNvPr id="4" name="Shape 2"/>
-          <p:cNvSpPr/>
-          <p:nvPr/>
-        </p:nvSpPr>
-        <p:spPr>
-          <a:xfrm>
-            <a:off x="548640" y="1828800"/>
-            <a:ext cx="3429000" cy="2834640"/>
+          <p:cNvPr id="4" name="Text 2"/>
+          <p:cNvSpPr/>
+          <p:nvPr/>
+        </p:nvSpPr>
+        <p:spPr>
+          <a:xfrm>
+            <a:off x="548640" y="1417320"/>
+            <a:ext cx="11064240" cy="457200"/>
+          </a:xfrm>
+          <a:prstGeom prst="rect">
+            <a:avLst/>
+          </a:prstGeom>
+          <a:noFill/>
+          <a:ln/>
+        </p:spPr>
+        <p:txBody>
+          <a:bodyPr wrap="square" rtlCol="0" anchor="ctr"/>
+          <a:lstStyle/>
+          <a:p>
+            <a:pPr indent="0" marL="0">
+              <a:buNone/>
+            </a:pPr>
+            <a:r>
+              <a:rPr lang="en-US" sz="1350" dirty="0">
+                <a:solidFill>
+                  <a:srgbClr val="44516A"/>
+                </a:solidFill>
+                <a:latin typeface="Noto Sans CJK TC" pitchFamily="34" charset="0"/>
+                <a:ea typeface="Noto Sans CJK TC" pitchFamily="34" charset="-122"/>
+                <a:cs typeface="Noto Sans CJK TC" pitchFamily="34" charset="-120"/>
+              </a:rPr>
+              <a:t>先前分析的核心結論：以新加坡為錨，前段深化、後段解耦但輕度協調。任何後段重綁定都須先通過三道驗證。</a:t>
+            </a:r>
+            <a:endParaRPr lang="en-US" sz="1350" dirty="0"/>
+          </a:p>
+        </p:txBody>
+      </p:sp>
+      <p:sp>
+        <p:nvSpPr>
+          <p:cNvPr id="5" name="Shape 3"/>
+          <p:cNvSpPr/>
+          <p:nvPr/>
+        </p:nvSpPr>
+        <p:spPr>
+          <a:xfrm>
+            <a:off x="548640" y="2011680"/>
+            <a:ext cx="11064240" cy="1188720"/>
           </a:xfrm>
           <a:prstGeom prst="roundRect">
             <a:avLst>
-              <a:gd name="adj" fmla="val 2581"/>
+              <a:gd name="adj" fmla="val 5385"/>
             </a:avLst>
           </a:prstGeom>
           <a:solidFill>
@@ -7425,186 +9123,27 @@
       </p:sp>
       <p:sp>
         <p:nvSpPr>
-          <p:cNvPr id="5" name="Shape 3"/>
-          <p:cNvSpPr/>
-          <p:nvPr/>
-        </p:nvSpPr>
-        <p:spPr>
-          <a:xfrm>
-            <a:off x="868680" y="2148840"/>
-            <a:ext cx="822960" cy="822960"/>
+          <p:cNvPr id="6" name="Shape 4"/>
+          <p:cNvSpPr/>
+          <p:nvPr/>
+        </p:nvSpPr>
+        <p:spPr>
+          <a:xfrm>
+            <a:off x="914400" y="2304288"/>
+            <a:ext cx="603504" cy="603504"/>
           </a:xfrm>
           <a:prstGeom prst="ellipse">
             <a:avLst/>
           </a:prstGeom>
           <a:solidFill>
-            <a:srgbClr val="274472"/>
+            <a:srgbClr val="0E1B33"/>
           </a:solidFill>
           <a:ln/>
         </p:spPr>
-      </p:sp>
-      <p:sp>
-        <p:nvSpPr>
-          <p:cNvPr id="6" name="Text 4"/>
-          <p:cNvSpPr/>
-          <p:nvPr/>
-        </p:nvSpPr>
-        <p:spPr>
-          <a:xfrm>
-            <a:off x="868680" y="2148840"/>
-            <a:ext cx="822960" cy="822960"/>
-          </a:xfrm>
-          <a:prstGeom prst="rect">
-            <a:avLst/>
-          </a:prstGeom>
-          <a:noFill/>
-          <a:ln/>
-        </p:spPr>
-        <p:txBody>
-          <a:bodyPr wrap="square" rtlCol="0" anchor="ctr"/>
-          <a:lstStyle/>
-          <a:p>
-            <a:pPr algn="ctr" indent="0" marL="0">
-              <a:buNone/>
-            </a:pPr>
-            <a:r>
-              <a:rPr lang="en-US" sz="3000" b="1" dirty="0">
-                <a:solidFill>
-                  <a:srgbClr val="FFFFFF"/>
-                </a:solidFill>
-                <a:latin typeface="Noto Serif CJK TC" pitchFamily="34" charset="0"/>
-                <a:ea typeface="Noto Serif CJK TC" pitchFamily="34" charset="-122"/>
-                <a:cs typeface="Noto Serif CJK TC" pitchFamily="34" charset="-120"/>
-              </a:rPr>
-              <a:t>0</a:t>
-            </a:r>
-            <a:endParaRPr lang="en-US" sz="3000" dirty="0"/>
-          </a:p>
-        </p:txBody>
-      </p:sp>
-      <p:sp>
-        <p:nvSpPr>
-          <p:cNvPr id="7" name="Text 5"/>
-          <p:cNvSpPr/>
-          <p:nvPr/>
-        </p:nvSpPr>
-        <p:spPr>
-          <a:xfrm>
-            <a:off x="1874520" y="2240280"/>
-            <a:ext cx="1920240" cy="365760"/>
-          </a:xfrm>
-          <a:prstGeom prst="rect">
-            <a:avLst/>
-          </a:prstGeom>
-          <a:noFill/>
-          <a:ln/>
-        </p:spPr>
-        <p:txBody>
-          <a:bodyPr wrap="square" rtlCol="0" anchor="ctr"/>
-          <a:lstStyle/>
-          <a:p>
-            <a:pPr indent="0" marL="0">
-              <a:buNone/>
-            </a:pPr>
-            <a:r>
-              <a:rPr lang="en-US" sz="1300" b="1" dirty="0">
-                <a:solidFill>
-                  <a:srgbClr val="274472"/>
-                </a:solidFill>
-                <a:latin typeface="Noto Sans CJK TC" pitchFamily="34" charset="0"/>
-                <a:ea typeface="Noto Sans CJK TC" pitchFamily="34" charset="-122"/>
-                <a:cs typeface="Noto Sans CJK TC" pitchFamily="34" charset="-120"/>
-              </a:rPr>
-              <a:t>Stage 0</a:t>
-            </a:r>
-            <a:endParaRPr lang="en-US" sz="1300" dirty="0"/>
-          </a:p>
-        </p:txBody>
-      </p:sp>
-      <p:sp>
-        <p:nvSpPr>
-          <p:cNvPr id="8" name="Text 6"/>
-          <p:cNvSpPr/>
-          <p:nvPr/>
-        </p:nvSpPr>
-        <p:spPr>
-          <a:xfrm>
-            <a:off x="1874520" y="2578608"/>
-            <a:ext cx="1920240" cy="457200"/>
-          </a:xfrm>
-          <a:prstGeom prst="rect">
-            <a:avLst/>
-          </a:prstGeom>
-          <a:noFill/>
-          <a:ln/>
-        </p:spPr>
-        <p:txBody>
-          <a:bodyPr wrap="square" rtlCol="0" anchor="ctr"/>
-          <a:lstStyle/>
-          <a:p>
-            <a:pPr indent="0" marL="0">
-              <a:buNone/>
-            </a:pPr>
-            <a:r>
-              <a:rPr lang="en-US" sz="1700" b="1" dirty="0">
-                <a:solidFill>
-                  <a:srgbClr val="1B2538"/>
-                </a:solidFill>
-                <a:latin typeface="Noto Serif CJK TC" pitchFamily="34" charset="0"/>
-                <a:ea typeface="Noto Serif CJK TC" pitchFamily="34" charset="-122"/>
-                <a:cs typeface="Noto Serif CJK TC" pitchFamily="34" charset="-120"/>
-              </a:rPr>
-              <a:t>公開政策訊號</a:t>
-            </a:r>
-            <a:endParaRPr lang="en-US" sz="1700" dirty="0"/>
-          </a:p>
-        </p:txBody>
-      </p:sp>
-      <p:sp>
-        <p:nvSpPr>
-          <p:cNvPr id="9" name="Text 7"/>
-          <p:cNvSpPr/>
-          <p:nvPr/>
-        </p:nvSpPr>
-        <p:spPr>
-          <a:xfrm>
-            <a:off x="914400" y="3246120"/>
-            <a:ext cx="2697480" cy="1280160"/>
-          </a:xfrm>
-          <a:prstGeom prst="rect">
-            <a:avLst/>
-          </a:prstGeom>
-          <a:noFill/>
-          <a:ln/>
-        </p:spPr>
-        <p:txBody>
-          <a:bodyPr wrap="square" rtlCol="0" anchor="t"/>
-          <a:lstStyle/>
-          <a:p>
-            <a:pPr indent="0" marL="0">
-              <a:lnSpc>
-                <a:spcPct val="110000"/>
-              </a:lnSpc>
-              <a:buNone/>
-            </a:pPr>
-            <a:r>
-              <a:rPr lang="en-US" sz="1300" dirty="0">
-                <a:solidFill>
-                  <a:srgbClr val="55617A"/>
-                </a:solidFill>
-                <a:latin typeface="Noto Sans CJK TC" pitchFamily="34" charset="0"/>
-                <a:ea typeface="Noto Sans CJK TC" pitchFamily="34" charset="-122"/>
-                <a:cs typeface="Noto Sans CJK TC" pitchFamily="34" charset="-120"/>
-              </a:rPr>
-              <a:t>整理補助、稅務優惠與半導體政策 — 即本份篩選報告。</a:t>
-            </a:r>
-            <a:endParaRPr lang="en-US" sz="1300" dirty="0"/>
-          </a:p>
-        </p:txBody>
       </p:sp>
       <p:pic>
         <p:nvPicPr>
-          <p:cNvPr id="10" name="Image 0" descr="preencoded.png">    </p:cNvPr>
+          <p:cNvPr id="7" name="Image 0" descr="preencoded.png">    </p:cNvPr>
           <p:cNvPicPr>
             <a:picLocks noChangeAspect="1"/>
           </p:cNvPicPr>
@@ -7618,8 +9157,8 @@
         </p:blipFill>
         <p:spPr>
           <a:xfrm>
-            <a:off x="4014216" y="3044952"/>
-            <a:ext cx="402336" cy="402336"/>
+            <a:off x="1069848" y="2459736"/>
+            <a:ext cx="292608" cy="292608"/>
           </a:xfrm>
           <a:prstGeom prst="rect">
             <a:avLst/>
@@ -7628,18 +9167,99 @@
       </p:pic>
       <p:sp>
         <p:nvSpPr>
-          <p:cNvPr id="11" name="Shape 8"/>
-          <p:cNvSpPr/>
-          <p:nvPr/>
-        </p:nvSpPr>
-        <p:spPr>
-          <a:xfrm>
-            <a:off x="4453128" y="1828800"/>
-            <a:ext cx="3429000" cy="2834640"/>
+          <p:cNvPr id="8" name="Text 5"/>
+          <p:cNvSpPr/>
+          <p:nvPr/>
+        </p:nvSpPr>
+        <p:spPr>
+          <a:xfrm>
+            <a:off x="1783080" y="2176272"/>
+            <a:ext cx="3657600" cy="868680"/>
+          </a:xfrm>
+          <a:prstGeom prst="rect">
+            <a:avLst/>
+          </a:prstGeom>
+          <a:noFill/>
+          <a:ln/>
+        </p:spPr>
+        <p:txBody>
+          <a:bodyPr wrap="square" rtlCol="0" anchor="ctr"/>
+          <a:lstStyle/>
+          <a:p>
+            <a:pPr indent="0" marL="0">
+              <a:buNone/>
+            </a:pPr>
+            <a:r>
+              <a:rPr lang="en-US" sz="1650" b="1" dirty="0">
+                <a:solidFill>
+                  <a:srgbClr val="1B2538"/>
+                </a:solidFill>
+                <a:latin typeface="Noto Serif CJK TC" pitchFamily="34" charset="0"/>
+                <a:ea typeface="Noto Serif CJK TC" pitchFamily="34" charset="-122"/>
+                <a:cs typeface="Noto Serif CJK TC" pitchFamily="34" charset="-120"/>
+              </a:rPr>
+              <a:t>1 ｜ Anchor demand 驗證</a:t>
+            </a:r>
+            <a:endParaRPr lang="en-US" sz="1650" dirty="0"/>
+          </a:p>
+        </p:txBody>
+      </p:sp>
+      <p:sp>
+        <p:nvSpPr>
+          <p:cNvPr id="9" name="Text 6"/>
+          <p:cNvSpPr/>
+          <p:nvPr/>
+        </p:nvSpPr>
+        <p:spPr>
+          <a:xfrm>
+            <a:off x="5532120" y="2176272"/>
+            <a:ext cx="5852160" cy="868680"/>
+          </a:xfrm>
+          <a:prstGeom prst="rect">
+            <a:avLst/>
+          </a:prstGeom>
+          <a:noFill/>
+          <a:ln/>
+        </p:spPr>
+        <p:txBody>
+          <a:bodyPr wrap="square" rtlCol="0" anchor="ctr"/>
+          <a:lstStyle/>
+          <a:p>
+            <a:pPr indent="0" marL="0">
+              <a:lnSpc>
+                <a:spcPct val="105000"/>
+              </a:lnSpc>
+              <a:buNone/>
+            </a:pPr>
+            <a:r>
+              <a:rPr lang="en-US" sz="1250" dirty="0">
+                <a:solidFill>
+                  <a:srgbClr val="55617A"/>
+                </a:solidFill>
+                <a:latin typeface="Noto Sans CJK TC" pitchFamily="34" charset="0"/>
+                <a:ea typeface="Noto Sans CJK TC" pitchFamily="34" charset="-122"/>
+                <a:cs typeface="Noto Sans CJK TC" pitchFamily="34" charset="-120"/>
+              </a:rPr>
+              <a:t>既有客戶是否有具約束力的產能承諾（take-or-pay / capacity reservation）？沒有 anchor demand 就投產能，是 OSAT / 晶圓業最典型的價值陷阱。</a:t>
+            </a:r>
+            <a:endParaRPr lang="en-US" sz="1250" dirty="0"/>
+          </a:p>
+        </p:txBody>
+      </p:sp>
+      <p:sp>
+        <p:nvSpPr>
+          <p:cNvPr id="10" name="Shape 7"/>
+          <p:cNvSpPr/>
+          <p:nvPr/>
+        </p:nvSpPr>
+        <p:spPr>
+          <a:xfrm>
+            <a:off x="548640" y="3383280"/>
+            <a:ext cx="11064240" cy="1188720"/>
           </a:xfrm>
           <a:prstGeom prst="roundRect">
             <a:avLst>
-              <a:gd name="adj" fmla="val 2581"/>
+              <a:gd name="adj" fmla="val 5385"/>
             </a:avLst>
           </a:prstGeom>
           <a:solidFill>
@@ -7657,186 +9277,27 @@
       </p:sp>
       <p:sp>
         <p:nvSpPr>
-          <p:cNvPr id="12" name="Shape 9"/>
-          <p:cNvSpPr/>
-          <p:nvPr/>
-        </p:nvSpPr>
-        <p:spPr>
-          <a:xfrm>
-            <a:off x="4773168" y="2148840"/>
-            <a:ext cx="822960" cy="822960"/>
+          <p:cNvPr id="11" name="Shape 8"/>
+          <p:cNvSpPr/>
+          <p:nvPr/>
+        </p:nvSpPr>
+        <p:spPr>
+          <a:xfrm>
+            <a:off x="914400" y="3675888"/>
+            <a:ext cx="603504" cy="603504"/>
           </a:xfrm>
           <a:prstGeom prst="ellipse">
             <a:avLst/>
           </a:prstGeom>
           <a:solidFill>
-            <a:srgbClr val="E0A458"/>
+            <a:srgbClr val="0E1B33"/>
           </a:solidFill>
           <a:ln/>
         </p:spPr>
-      </p:sp>
-      <p:sp>
-        <p:nvSpPr>
-          <p:cNvPr id="13" name="Text 10"/>
-          <p:cNvSpPr/>
-          <p:nvPr/>
-        </p:nvSpPr>
-        <p:spPr>
-          <a:xfrm>
-            <a:off x="4773168" y="2148840"/>
-            <a:ext cx="822960" cy="822960"/>
-          </a:xfrm>
-          <a:prstGeom prst="rect">
-            <a:avLst/>
-          </a:prstGeom>
-          <a:noFill/>
-          <a:ln/>
-        </p:spPr>
-        <p:txBody>
-          <a:bodyPr wrap="square" rtlCol="0" anchor="ctr"/>
-          <a:lstStyle/>
-          <a:p>
-            <a:pPr algn="ctr" indent="0" marL="0">
-              <a:buNone/>
-            </a:pPr>
-            <a:r>
-              <a:rPr lang="en-US" sz="3000" b="1" dirty="0">
-                <a:solidFill>
-                  <a:srgbClr val="FFFFFF"/>
-                </a:solidFill>
-                <a:latin typeface="Noto Serif CJK TC" pitchFamily="34" charset="0"/>
-                <a:ea typeface="Noto Serif CJK TC" pitchFamily="34" charset="-122"/>
-                <a:cs typeface="Noto Serif CJK TC" pitchFamily="34" charset="-120"/>
-              </a:rPr>
-              <a:t>1</a:t>
-            </a:r>
-            <a:endParaRPr lang="en-US" sz="3000" dirty="0"/>
-          </a:p>
-        </p:txBody>
-      </p:sp>
-      <p:sp>
-        <p:nvSpPr>
-          <p:cNvPr id="14" name="Text 11"/>
-          <p:cNvSpPr/>
-          <p:nvPr/>
-        </p:nvSpPr>
-        <p:spPr>
-          <a:xfrm>
-            <a:off x="5779008" y="2240280"/>
-            <a:ext cx="1920240" cy="365760"/>
-          </a:xfrm>
-          <a:prstGeom prst="rect">
-            <a:avLst/>
-          </a:prstGeom>
-          <a:noFill/>
-          <a:ln/>
-        </p:spPr>
-        <p:txBody>
-          <a:bodyPr wrap="square" rtlCol="0" anchor="ctr"/>
-          <a:lstStyle/>
-          <a:p>
-            <a:pPr indent="0" marL="0">
-              <a:buNone/>
-            </a:pPr>
-            <a:r>
-              <a:rPr lang="en-US" sz="1300" b="1" dirty="0">
-                <a:solidFill>
-                  <a:srgbClr val="E0A458"/>
-                </a:solidFill>
-                <a:latin typeface="Noto Sans CJK TC" pitchFamily="34" charset="0"/>
-                <a:ea typeface="Noto Sans CJK TC" pitchFamily="34" charset="-122"/>
-                <a:cs typeface="Noto Sans CJK TC" pitchFamily="34" charset="-120"/>
-              </a:rPr>
-              <a:t>Stage 1</a:t>
-            </a:r>
-            <a:endParaRPr lang="en-US" sz="1300" dirty="0"/>
-          </a:p>
-        </p:txBody>
-      </p:sp>
-      <p:sp>
-        <p:nvSpPr>
-          <p:cNvPr id="15" name="Text 12"/>
-          <p:cNvSpPr/>
-          <p:nvPr/>
-        </p:nvSpPr>
-        <p:spPr>
-          <a:xfrm>
-            <a:off x="5779008" y="2578608"/>
-            <a:ext cx="1920240" cy="457200"/>
-          </a:xfrm>
-          <a:prstGeom prst="rect">
-            <a:avLst/>
-          </a:prstGeom>
-          <a:noFill/>
-          <a:ln/>
-        </p:spPr>
-        <p:txBody>
-          <a:bodyPr wrap="square" rtlCol="0" anchor="ctr"/>
-          <a:lstStyle/>
-          <a:p>
-            <a:pPr indent="0" marL="0">
-              <a:buNone/>
-            </a:pPr>
-            <a:r>
-              <a:rPr lang="en-US" sz="1700" b="1" dirty="0">
-                <a:solidFill>
-                  <a:srgbClr val="1B2538"/>
-                </a:solidFill>
-                <a:latin typeface="Noto Serif CJK TC" pitchFamily="34" charset="0"/>
-                <a:ea typeface="Noto Serif CJK TC" pitchFamily="34" charset="-122"/>
-                <a:cs typeface="Noto Serif CJK TC" pitchFamily="34" charset="-120"/>
-              </a:rPr>
-              <a:t>Diligence gate</a:t>
-            </a:r>
-            <a:endParaRPr lang="en-US" sz="1700" dirty="0"/>
-          </a:p>
-        </p:txBody>
-      </p:sp>
-      <p:sp>
-        <p:nvSpPr>
-          <p:cNvPr id="16" name="Text 13"/>
-          <p:cNvSpPr/>
-          <p:nvPr/>
-        </p:nvSpPr>
-        <p:spPr>
-          <a:xfrm>
-            <a:off x="4818888" y="3246120"/>
-            <a:ext cx="2697480" cy="1280160"/>
-          </a:xfrm>
-          <a:prstGeom prst="rect">
-            <a:avLst/>
-          </a:prstGeom>
-          <a:noFill/>
-          <a:ln/>
-        </p:spPr>
-        <p:txBody>
-          <a:bodyPr wrap="square" rtlCol="0" anchor="t"/>
-          <a:lstStyle/>
-          <a:p>
-            <a:pPr indent="0" marL="0">
-              <a:lnSpc>
-                <a:spcPct val="110000"/>
-              </a:lnSpc>
-              <a:buNone/>
-            </a:pPr>
-            <a:r>
-              <a:rPr lang="en-US" sz="1300" dirty="0">
-                <a:solidFill>
-                  <a:srgbClr val="55617A"/>
-                </a:solidFill>
-                <a:latin typeface="Noto Sans CJK TC" pitchFamily="34" charset="0"/>
-                <a:ea typeface="Noto Sans CJK TC" pitchFamily="34" charset="-122"/>
-                <a:cs typeface="Noto Sans CJK TC" pitchFamily="34" charset="-120"/>
-              </a:rPr>
-              <a:t>政府 incentive package 明確、稅務條件可量化、客戶需求可驗證。</a:t>
-            </a:r>
-            <a:endParaRPr lang="en-US" sz="1300" dirty="0"/>
-          </a:p>
-        </p:txBody>
       </p:sp>
       <p:pic>
         <p:nvPicPr>
-          <p:cNvPr id="17" name="Image 1" descr="preencoded.png">    </p:cNvPr>
+          <p:cNvPr id="12" name="Image 1" descr="preencoded.png">    </p:cNvPr>
           <p:cNvPicPr>
             <a:picLocks noChangeAspect="1"/>
           </p:cNvPicPr>
@@ -7850,8 +9311,8 @@
         </p:blipFill>
         <p:spPr>
           <a:xfrm>
-            <a:off x="7918704" y="3044952"/>
-            <a:ext cx="402336" cy="402336"/>
+            <a:off x="1069848" y="3831336"/>
+            <a:ext cx="292608" cy="292608"/>
           </a:xfrm>
           <a:prstGeom prst="rect">
             <a:avLst/>
@@ -7860,18 +9321,99 @@
       </p:pic>
       <p:sp>
         <p:nvSpPr>
-          <p:cNvPr id="18" name="Shape 14"/>
-          <p:cNvSpPr/>
-          <p:nvPr/>
-        </p:nvSpPr>
-        <p:spPr>
-          <a:xfrm>
-            <a:off x="8357616" y="1828800"/>
-            <a:ext cx="3429000" cy="2834640"/>
+          <p:cNvPr id="13" name="Text 9"/>
+          <p:cNvSpPr/>
+          <p:nvPr/>
+        </p:nvSpPr>
+        <p:spPr>
+          <a:xfrm>
+            <a:off x="1783080" y="3547872"/>
+            <a:ext cx="3657600" cy="868680"/>
+          </a:xfrm>
+          <a:prstGeom prst="rect">
+            <a:avLst/>
+          </a:prstGeom>
+          <a:noFill/>
+          <a:ln/>
+        </p:spPr>
+        <p:txBody>
+          <a:bodyPr wrap="square" rtlCol="0" anchor="ctr"/>
+          <a:lstStyle/>
+          <a:p>
+            <a:pPr indent="0" marL="0">
+              <a:buNone/>
+            </a:pPr>
+            <a:r>
+              <a:rPr lang="en-US" sz="1650" b="1" dirty="0">
+                <a:solidFill>
+                  <a:srgbClr val="1B2538"/>
+                </a:solidFill>
+                <a:latin typeface="Noto Serif CJK TC" pitchFamily="34" charset="0"/>
+                <a:ea typeface="Noto Serif CJK TC" pitchFamily="34" charset="-122"/>
+                <a:cs typeface="Noto Serif CJK TC" pitchFamily="34" charset="-120"/>
+              </a:rPr>
+              <a:t>2 ｜ 單位經濟驗證</a:t>
+            </a:r>
+            <a:endParaRPr lang="en-US" sz="1650" dirty="0"/>
+          </a:p>
+        </p:txBody>
+      </p:sp>
+      <p:sp>
+        <p:nvSpPr>
+          <p:cNvPr id="14" name="Text 10"/>
+          <p:cNvSpPr/>
+          <p:nvPr/>
+        </p:nvSpPr>
+        <p:spPr>
+          <a:xfrm>
+            <a:off x="5532120" y="3547872"/>
+            <a:ext cx="5852160" cy="868680"/>
+          </a:xfrm>
+          <a:prstGeom prst="rect">
+            <a:avLst/>
+          </a:prstGeom>
+          <a:noFill/>
+          <a:ln/>
+        </p:spPr>
+        <p:txBody>
+          <a:bodyPr wrap="square" rtlCol="0" anchor="ctr"/>
+          <a:lstStyle/>
+          <a:p>
+            <a:pPr indent="0" marL="0">
+              <a:lnSpc>
+                <a:spcPct val="105000"/>
+              </a:lnSpc>
+              <a:buNone/>
+            </a:pPr>
+            <a:r>
+              <a:rPr lang="en-US" sz="1250" dirty="0">
+                <a:solidFill>
+                  <a:srgbClr val="55617A"/>
+                </a:solidFill>
+                <a:latin typeface="Noto Sans CJK TC" pitchFamily="34" charset="0"/>
+                <a:ea typeface="Noto Sans CJK TC" pitchFamily="34" charset="-122"/>
+                <a:cs typeface="Noto Sans CJK TC" pitchFamily="34" charset="-120"/>
+              </a:rPr>
+              <a:t>在地化後的全成本（人力、稅務獎勵、物流、學習曲線）是否真的低於現有「台 / 星前段 + 既有封測」路徑？算出 break-even 良率與稼動率門檻。</a:t>
+            </a:r>
+            <a:endParaRPr lang="en-US" sz="1250" dirty="0"/>
+          </a:p>
+        </p:txBody>
+      </p:sp>
+      <p:sp>
+        <p:nvSpPr>
+          <p:cNvPr id="15" name="Shape 11"/>
+          <p:cNvSpPr/>
+          <p:nvPr/>
+        </p:nvSpPr>
+        <p:spPr>
+          <a:xfrm>
+            <a:off x="548640" y="4754880"/>
+            <a:ext cx="11064240" cy="1188720"/>
           </a:xfrm>
           <a:prstGeom prst="roundRect">
             <a:avLst>
-              <a:gd name="adj" fmla="val 2581"/>
+              <a:gd name="adj" fmla="val 5385"/>
             </a:avLst>
           </a:prstGeom>
           <a:solidFill>
@@ -7889,34 +9431,58 @@
       </p:sp>
       <p:sp>
         <p:nvSpPr>
-          <p:cNvPr id="19" name="Shape 15"/>
-          <p:cNvSpPr/>
-          <p:nvPr/>
-        </p:nvSpPr>
-        <p:spPr>
-          <a:xfrm>
-            <a:off x="8677656" y="2148840"/>
-            <a:ext cx="822960" cy="822960"/>
+          <p:cNvPr id="16" name="Shape 12"/>
+          <p:cNvSpPr/>
+          <p:nvPr/>
+        </p:nvSpPr>
+        <p:spPr>
+          <a:xfrm>
+            <a:off x="914400" y="5047488"/>
+            <a:ext cx="603504" cy="603504"/>
           </a:xfrm>
           <a:prstGeom prst="ellipse">
             <a:avLst/>
           </a:prstGeom>
           <a:solidFill>
-            <a:srgbClr val="37C7C0"/>
+            <a:srgbClr val="0E1B33"/>
           </a:solidFill>
           <a:ln/>
         </p:spPr>
       </p:sp>
-      <p:sp>
-        <p:nvSpPr>
-          <p:cNvPr id="20" name="Text 16"/>
-          <p:cNvSpPr/>
-          <p:nvPr/>
-        </p:nvSpPr>
-        <p:spPr>
-          <a:xfrm>
-            <a:off x="8677656" y="2148840"/>
-            <a:ext cx="822960" cy="822960"/>
+      <p:pic>
+        <p:nvPicPr>
+          <p:cNvPr id="17" name="Image 2" descr="preencoded.png">    </p:cNvPr>
+          <p:cNvPicPr>
+            <a:picLocks noChangeAspect="1"/>
+          </p:cNvPicPr>
+          <p:nvPr/>
+        </p:nvPicPr>
+        <p:blipFill>
+          <a:blip r:embed="rId3"/>
+          <a:stretch>
+            <a:fillRect/>
+          </a:stretch>
+        </p:blipFill>
+        <p:spPr>
+          <a:xfrm>
+            <a:off x="1069848" y="5202936"/>
+            <a:ext cx="292608" cy="292608"/>
+          </a:xfrm>
+          <a:prstGeom prst="rect">
+            <a:avLst/>
+          </a:prstGeom>
+        </p:spPr>
+      </p:pic>
+      <p:sp>
+        <p:nvSpPr>
+          <p:cNvPr id="18" name="Text 13"/>
+          <p:cNvSpPr/>
+          <p:nvPr/>
+        </p:nvSpPr>
+        <p:spPr>
+          <a:xfrm>
+            <a:off x="1783080" y="4919472"/>
+            <a:ext cx="3657600" cy="868680"/>
           </a:xfrm>
           <a:prstGeom prst="rect">
             <a:avLst/>
@@ -7928,34 +9494,34 @@
           <a:bodyPr wrap="square" rtlCol="0" anchor="ctr"/>
           <a:lstStyle/>
           <a:p>
-            <a:pPr algn="ctr" indent="0" marL="0">
+            <a:pPr indent="0" marL="0">
               <a:buNone/>
             </a:pPr>
             <a:r>
-              <a:rPr lang="en-US" sz="3000" b="1" dirty="0">
-                <a:solidFill>
-                  <a:srgbClr val="FFFFFF"/>
+              <a:rPr lang="en-US" sz="1650" b="1" dirty="0">
+                <a:solidFill>
+                  <a:srgbClr val="1B2538"/>
                 </a:solidFill>
                 <a:latin typeface="Noto Serif CJK TC" pitchFamily="34" charset="0"/>
                 <a:ea typeface="Noto Serif CJK TC" pitchFamily="34" charset="-122"/>
                 <a:cs typeface="Noto Serif CJK TC" pitchFamily="34" charset="-120"/>
               </a:rPr>
-              <a:t>2</a:t>
-            </a:r>
-            <a:endParaRPr lang="en-US" sz="3000" dirty="0"/>
-          </a:p>
-        </p:txBody>
-      </p:sp>
-      <p:sp>
-        <p:nvSpPr>
-          <p:cNvPr id="21" name="Text 17"/>
-          <p:cNvSpPr/>
-          <p:nvPr/>
-        </p:nvSpPr>
-        <p:spPr>
-          <a:xfrm>
-            <a:off x="9683496" y="2240280"/>
-            <a:ext cx="1920240" cy="365760"/>
+              <a:t>3 ｜ 不可替代性（護城河）驗證</a:t>
+            </a:r>
+            <a:endParaRPr lang="en-US" sz="1650" dirty="0"/>
+          </a:p>
+        </p:txBody>
+      </p:sp>
+      <p:sp>
+        <p:nvSpPr>
+          <p:cNvPr id="19" name="Text 14"/>
+          <p:cNvSpPr/>
+          <p:nvPr/>
+        </p:nvSpPr>
+        <p:spPr>
+          <a:xfrm>
+            <a:off x="5532120" y="4919472"/>
+            <a:ext cx="5852160" cy="868680"/>
           </a:xfrm>
           <a:prstGeom prst="rect">
             <a:avLst/>
@@ -7968,33 +9534,36 @@
           <a:lstStyle/>
           <a:p>
             <a:pPr indent="0" marL="0">
+              <a:lnSpc>
+                <a:spcPct val="105000"/>
+              </a:lnSpc>
               <a:buNone/>
             </a:pPr>
             <a:r>
-              <a:rPr lang="en-US" sz="1300" b="1" dirty="0">
-                <a:solidFill>
-                  <a:srgbClr val="37C7C0"/>
+              <a:rPr lang="en-US" sz="1250" dirty="0">
+                <a:solidFill>
+                  <a:srgbClr val="55617A"/>
                 </a:solidFill>
                 <a:latin typeface="Noto Sans CJK TC" pitchFamily="34" charset="0"/>
                 <a:ea typeface="Noto Sans CJK TC" pitchFamily="34" charset="-122"/>
                 <a:cs typeface="Noto Sans CJK TC" pitchFamily="34" charset="-120"/>
               </a:rPr>
-              <a:t>Stage 2</a:t>
-            </a:r>
-            <a:endParaRPr lang="en-US" sz="1300" dirty="0"/>
-          </a:p>
-        </p:txBody>
-      </p:sp>
-      <p:sp>
-        <p:nvSpPr>
-          <p:cNvPr id="22" name="Text 18"/>
-          <p:cNvSpPr/>
-          <p:nvPr/>
-        </p:nvSpPr>
-        <p:spPr>
-          <a:xfrm>
-            <a:off x="9683496" y="2578608"/>
-            <a:ext cx="1920240" cy="457200"/>
+              <a:t>布局是否創造客戶難以複製的綜效（turnkey、地緣分散、節點對齊）？若客戶可輕易找其他 OSAT 達成同樣效果，則無護城河。</a:t>
+            </a:r>
+            <a:endParaRPr lang="en-US" sz="1250" dirty="0"/>
+          </a:p>
+        </p:txBody>
+      </p:sp>
+      <p:sp>
+        <p:nvSpPr>
+          <p:cNvPr id="20" name="Text 15"/>
+          <p:cNvSpPr/>
+          <p:nvPr/>
+        </p:nvSpPr>
+        <p:spPr>
+          <a:xfrm>
+            <a:off x="548640" y="6263640"/>
+            <a:ext cx="10972800" cy="320040"/>
           </a:xfrm>
           <a:prstGeom prst="rect">
             <a:avLst/>
@@ -8010,134 +9579,17 @@
               <a:buNone/>
             </a:pPr>
             <a:r>
-              <a:rPr lang="en-US" sz="1700" b="1" dirty="0">
-                <a:solidFill>
-                  <a:srgbClr val="1B2538"/>
-                </a:solidFill>
-                <a:latin typeface="Noto Serif CJK TC" pitchFamily="34" charset="0"/>
-                <a:ea typeface="Noto Serif CJK TC" pitchFamily="34" charset="-122"/>
-                <a:cs typeface="Noto Serif CJK TC" pitchFamily="34" charset="-120"/>
-              </a:rPr>
-              <a:t>升級為投資案</a:t>
-            </a:r>
-            <a:endParaRPr lang="en-US" sz="1700" dirty="0"/>
-          </a:p>
-        </p:txBody>
-      </p:sp>
-      <p:sp>
-        <p:nvSpPr>
-          <p:cNvPr id="23" name="Text 19"/>
-          <p:cNvSpPr/>
-          <p:nvPr/>
-        </p:nvSpPr>
-        <p:spPr>
-          <a:xfrm>
-            <a:off x="8723376" y="3246120"/>
-            <a:ext cx="2697480" cy="1280160"/>
-          </a:xfrm>
-          <a:prstGeom prst="rect">
-            <a:avLst/>
-          </a:prstGeom>
-          <a:noFill/>
-          <a:ln/>
-        </p:spPr>
-        <p:txBody>
-          <a:bodyPr wrap="square" rtlCol="0" anchor="t"/>
-          <a:lstStyle/>
-          <a:p>
-            <a:pPr indent="0" marL="0">
-              <a:lnSpc>
-                <a:spcPct val="110000"/>
-              </a:lnSpc>
-              <a:buNone/>
-            </a:pPr>
-            <a:r>
-              <a:rPr lang="en-US" sz="1300" dirty="0">
-                <a:solidFill>
-                  <a:srgbClr val="55617A"/>
+              <a:rPr lang="en-US" sz="1200" b="1" i="1" dirty="0">
+                <a:solidFill>
+                  <a:srgbClr val="274472"/>
                 </a:solidFill>
                 <a:latin typeface="Noto Sans CJK TC" pitchFamily="34" charset="0"/>
                 <a:ea typeface="Noto Sans CJK TC" pitchFamily="34" charset="-122"/>
                 <a:cs typeface="Noto Sans CJK TC" pitchFamily="34" charset="-120"/>
               </a:rPr>
-              <a:t>通過 ROIC、partner economics、capex/opex、power/water/talent 後才升級。</a:t>
-            </a:r>
-            <a:endParaRPr lang="en-US" sz="1300" dirty="0"/>
-          </a:p>
-        </p:txBody>
-      </p:sp>
-      <p:sp>
-        <p:nvSpPr>
-          <p:cNvPr id="24" name="Shape 20"/>
-          <p:cNvSpPr/>
-          <p:nvPr/>
-        </p:nvSpPr>
-        <p:spPr>
-          <a:xfrm>
-            <a:off x="548640" y="4983480"/>
-            <a:ext cx="11064240" cy="1051560"/>
-          </a:xfrm>
-          <a:prstGeom prst="roundRect">
-            <a:avLst>
-              <a:gd name="adj" fmla="val 6087"/>
-            </a:avLst>
-          </a:prstGeom>
-          <a:solidFill>
-            <a:srgbClr val="0E1B33"/>
-          </a:solidFill>
-          <a:ln/>
-        </p:spPr>
-      </p:sp>
-      <p:sp>
-        <p:nvSpPr>
-          <p:cNvPr id="25" name="Text 21"/>
-          <p:cNvSpPr/>
-          <p:nvPr/>
-        </p:nvSpPr>
-        <p:spPr>
-          <a:xfrm>
-            <a:off x="914400" y="4983480"/>
-            <a:ext cx="10332720" cy="1051560"/>
-          </a:xfrm>
-          <a:prstGeom prst="rect">
-            <a:avLst/>
-          </a:prstGeom>
-          <a:noFill/>
-          <a:ln/>
-        </p:spPr>
-        <p:txBody>
-          <a:bodyPr wrap="square" rtlCol="0" anchor="ctr"/>
-          <a:lstStyle/>
-          <a:p>
-            <a:pPr indent="0" marL="0">
-              <a:buNone/>
-            </a:pPr>
-            <a:r>
-              <a:rPr lang="en-US" sz="1500" b="1" dirty="0">
-                <a:solidFill>
-                  <a:srgbClr val="37C7C0"/>
-                </a:solidFill>
-                <a:latin typeface="Noto Sans CJK TC" pitchFamily="34" charset="0"/>
-                <a:ea typeface="Noto Sans CJK TC" pitchFamily="34" charset="-122"/>
-                <a:cs typeface="Noto Sans CJK TC" pitchFamily="34" charset="-120"/>
-              </a:rPr>
-              <a:t>原則：  </a:t>
-            </a:r>
-            <a:pPr indent="0" marL="0">
-              <a:buNone/>
-            </a:pPr>
-            <a:r>
-              <a:rPr lang="en-US" sz="1500" dirty="0">
-                <a:solidFill>
-                  <a:srgbClr val="AFC6E9"/>
-                </a:solidFill>
-                <a:latin typeface="Noto Sans CJK TC" pitchFamily="34" charset="0"/>
-                <a:ea typeface="Noto Sans CJK TC" pitchFamily="34" charset="-122"/>
-                <a:cs typeface="Noto Sans CJK TC" pitchFamily="34" charset="-120"/>
-              </a:rPr>
-              <a:t>只有在補助條件明確、稅務可量化、需求可驗證時，才把 watchlist 升級成投資案。補助只改善 economics，不創造需求。</a:t>
-            </a:r>
-            <a:endParaRPr lang="en-US" sz="1500" dirty="0"/>
+              <a:t>三點同時成立才算正確策略；任一不成立就該重新界定範圍。</a:t>
+            </a:r>
+            <a:endParaRPr lang="en-US" sz="1200" dirty="0"/>
           </a:p>
         </p:txBody>
       </p:sp>
@@ -8206,7 +9658,7 @@
                 <a:ea typeface="Noto Sans CJK TC" pitchFamily="34" charset="-122"/>
                 <a:cs typeface="Noto Sans CJK TC" pitchFamily="34" charset="-120"/>
               </a:rPr>
-              <a:t>DILIGENCE CHECKLIST</a:t>
+              <a:t>EXPANSION MODEL</a:t>
             </a:r>
             <a:endParaRPr lang="en-US" sz="1200" dirty="0"/>
           </a:p>
@@ -8245,7 +9697,7 @@
                 <a:ea typeface="Noto Serif CJK TC" pitchFamily="34" charset="-122"/>
                 <a:cs typeface="Noto Serif CJK TC" pitchFamily="34" charset="-120"/>
               </a:rPr>
-              <a:t>升級為投資案前仍須驗證的條件</a:t>
+              <a:t>三層擴張做法 × Dashboard 的 Country × Mode 矩陣</a:t>
             </a:r>
             <a:endParaRPr lang="en-US" sz="3000" dirty="0"/>
           </a:p>
@@ -8259,16 +9711,16 @@
         </p:nvSpPr>
         <p:spPr>
           <a:xfrm>
-            <a:off x="548640" y="1645920"/>
-            <a:ext cx="3593592" cy="1874520"/>
+            <a:off x="548640" y="1691640"/>
+            <a:ext cx="3566160" cy="2880360"/>
           </a:xfrm>
           <a:prstGeom prst="roundRect">
             <a:avLst>
-              <a:gd name="adj" fmla="val 3415"/>
+              <a:gd name="adj" fmla="val 2540"/>
             </a:avLst>
           </a:prstGeom>
           <a:solidFill>
-            <a:srgbClr val="FFFFFF"/>
+            <a:srgbClr val="0E1B33"/>
           </a:solidFill>
           <a:ln/>
           <a:effectLst>
@@ -8282,27 +9734,630 @@
       </p:sp>
       <p:sp>
         <p:nvSpPr>
-          <p:cNvPr id="5" name="Shape 3"/>
-          <p:cNvSpPr/>
-          <p:nvPr/>
-        </p:nvSpPr>
-        <p:spPr>
-          <a:xfrm>
-            <a:off x="841248" y="1965960"/>
-            <a:ext cx="640080" cy="640080"/>
-          </a:xfrm>
-          <a:prstGeom prst="ellipse">
-            <a:avLst/>
+          <p:cNvPr id="5" name="Text 3"/>
+          <p:cNvSpPr/>
+          <p:nvPr/>
+        </p:nvSpPr>
+        <p:spPr>
+          <a:xfrm>
+            <a:off x="868680" y="1965960"/>
+            <a:ext cx="2926080" cy="320040"/>
+          </a:xfrm>
+          <a:prstGeom prst="rect">
+            <a:avLst/>
+          </a:prstGeom>
+          <a:noFill/>
+          <a:ln/>
+        </p:spPr>
+        <p:txBody>
+          <a:bodyPr wrap="square" rtlCol="0" anchor="ctr"/>
+          <a:lstStyle/>
+          <a:p>
+            <a:pPr indent="0" marL="0">
+              <a:buNone/>
+            </a:pPr>
+            <a:r>
+              <a:rPr lang="en-US" sz="1200" b="1" dirty="0">
+                <a:solidFill>
+                  <a:srgbClr val="37C7C0"/>
+                </a:solidFill>
+                <a:latin typeface="Noto Sans CJK TC" pitchFamily="34" charset="0"/>
+                <a:ea typeface="Noto Sans CJK TC" pitchFamily="34" charset="-122"/>
+                <a:cs typeface="Noto Sans CJK TC" pitchFamily="34" charset="-120"/>
+              </a:rPr>
+              <a:t>第一層 · 核心</a:t>
+            </a:r>
+            <a:endParaRPr lang="en-US" sz="1200" dirty="0"/>
+          </a:p>
+        </p:txBody>
+      </p:sp>
+      <p:sp>
+        <p:nvSpPr>
+          <p:cNvPr id="6" name="Text 4"/>
+          <p:cNvSpPr/>
+          <p:nvPr/>
+        </p:nvSpPr>
+        <p:spPr>
+          <a:xfrm>
+            <a:off x="868680" y="2313432"/>
+            <a:ext cx="2926080" cy="502920"/>
+          </a:xfrm>
+          <a:prstGeom prst="rect">
+            <a:avLst/>
+          </a:prstGeom>
+          <a:noFill/>
+          <a:ln/>
+        </p:spPr>
+        <p:txBody>
+          <a:bodyPr wrap="square" rtlCol="0" anchor="ctr"/>
+          <a:lstStyle/>
+          <a:p>
+            <a:pPr indent="0" marL="0">
+              <a:buNone/>
+            </a:pPr>
+            <a:r>
+              <a:rPr lang="en-US" sz="2100" b="1" dirty="0">
+                <a:solidFill>
+                  <a:srgbClr val="FFFFFF"/>
+                </a:solidFill>
+                <a:latin typeface="Noto Serif CJK TC" pitchFamily="34" charset="0"/>
+                <a:ea typeface="Noto Serif CJK TC" pitchFamily="34" charset="-122"/>
+                <a:cs typeface="Noto Serif CJK TC" pitchFamily="34" charset="-120"/>
+              </a:rPr>
+              <a:t>前段深化</a:t>
+            </a:r>
+            <a:endParaRPr lang="en-US" sz="2100" dirty="0"/>
+          </a:p>
+        </p:txBody>
+      </p:sp>
+      <p:sp>
+        <p:nvSpPr>
+          <p:cNvPr id="7" name="Shape 5"/>
+          <p:cNvSpPr/>
+          <p:nvPr/>
+        </p:nvSpPr>
+        <p:spPr>
+          <a:xfrm>
+            <a:off x="868680" y="2880360"/>
+            <a:ext cx="1737360" cy="329184"/>
+          </a:xfrm>
+          <a:prstGeom prst="roundRect">
+            <a:avLst>
+              <a:gd name="adj" fmla="val 13889"/>
+            </a:avLst>
           </a:prstGeom>
           <a:solidFill>
-            <a:srgbClr val="0E1B33"/>
+            <a:srgbClr val="16264A"/>
+          </a:solidFill>
+          <a:ln/>
+        </p:spPr>
+      </p:sp>
+      <p:sp>
+        <p:nvSpPr>
+          <p:cNvPr id="8" name="Text 6"/>
+          <p:cNvSpPr/>
+          <p:nvPr/>
+        </p:nvSpPr>
+        <p:spPr>
+          <a:xfrm>
+            <a:off x="868680" y="2880360"/>
+            <a:ext cx="1737360" cy="329184"/>
+          </a:xfrm>
+          <a:prstGeom prst="rect">
+            <a:avLst/>
+          </a:prstGeom>
+          <a:noFill/>
+          <a:ln/>
+        </p:spPr>
+        <p:txBody>
+          <a:bodyPr wrap="square" rtlCol="0" anchor="ctr"/>
+          <a:lstStyle/>
+          <a:p>
+            <a:pPr algn="ctr" indent="0" marL="0">
+              <a:buNone/>
+            </a:pPr>
+            <a:r>
+              <a:rPr lang="en-US" sz="1100" b="1" dirty="0">
+                <a:solidFill>
+                  <a:srgbClr val="AFC6E9"/>
+                </a:solidFill>
+                <a:latin typeface="Noto Sans CJK TC" pitchFamily="34" charset="0"/>
+                <a:ea typeface="Noto Sans CJK TC" pitchFamily="34" charset="-122"/>
+                <a:cs typeface="Noto Sans CJK TC" pitchFamily="34" charset="-120"/>
+              </a:rPr>
+              <a:t>高信心</a:t>
+            </a:r>
+            <a:endParaRPr lang="en-US" sz="1100" dirty="0"/>
+          </a:p>
+        </p:txBody>
+      </p:sp>
+      <p:sp>
+        <p:nvSpPr>
+          <p:cNvPr id="9" name="Text 7"/>
+          <p:cNvSpPr/>
+          <p:nvPr/>
+        </p:nvSpPr>
+        <p:spPr>
+          <a:xfrm>
+            <a:off x="868680" y="3383280"/>
+            <a:ext cx="2926080" cy="1051560"/>
+          </a:xfrm>
+          <a:prstGeom prst="rect">
+            <a:avLst/>
+          </a:prstGeom>
+          <a:noFill/>
+          <a:ln/>
+        </p:spPr>
+        <p:txBody>
+          <a:bodyPr wrap="square" rtlCol="0" anchor="t"/>
+          <a:lstStyle/>
+          <a:p>
+            <a:pPr indent="0" marL="0">
+              <a:lnSpc>
+                <a:spcPct val="108000"/>
+              </a:lnSpc>
+              <a:buNone/>
+            </a:pPr>
+            <a:r>
+              <a:rPr lang="en-US" sz="1250" dirty="0">
+                <a:solidFill>
+                  <a:srgbClr val="AFC6E9"/>
+                </a:solidFill>
+                <a:latin typeface="Noto Sans CJK TC" pitchFamily="34" charset="0"/>
+                <a:ea typeface="Noto Sans CJK TC" pitchFamily="34" charset="-122"/>
+                <a:cs typeface="Noto Sans CJK TC" pitchFamily="34" charset="-120"/>
+              </a:rPr>
+              <a:t>新加坡定位為台灣以外、China-free 的特殊製程第二中心（含 55nm BCD）。重資本投在自己最有護城河的前段。</a:t>
+            </a:r>
+            <a:endParaRPr lang="en-US" sz="1250" dirty="0"/>
+          </a:p>
+        </p:txBody>
+      </p:sp>
+      <p:sp>
+        <p:nvSpPr>
+          <p:cNvPr id="10" name="Shape 8"/>
+          <p:cNvSpPr/>
+          <p:nvPr/>
+        </p:nvSpPr>
+        <p:spPr>
+          <a:xfrm>
+            <a:off x="4297680" y="1691640"/>
+            <a:ext cx="3566160" cy="2880360"/>
+          </a:xfrm>
+          <a:prstGeom prst="roundRect">
+            <a:avLst>
+              <a:gd name="adj" fmla="val 2540"/>
+            </a:avLst>
+          </a:prstGeom>
+          <a:solidFill>
+            <a:srgbClr val="FFFFFF"/>
+          </a:solidFill>
+          <a:ln/>
+          <a:effectLst>
+            <a:outerShdw sx="100000" sy="100000" kx="0" ky="0" algn="bl" rotWithShape="0" blurRad="88900" dist="38100" dir="5400000">
+              <a:srgbClr val="0E1B33">
+                <a:alpha val="18000"/>
+              </a:srgbClr>
+            </a:outerShdw>
+          </a:effectLst>
+        </p:spPr>
+      </p:sp>
+      <p:sp>
+        <p:nvSpPr>
+          <p:cNvPr id="11" name="Text 9"/>
+          <p:cNvSpPr/>
+          <p:nvPr/>
+        </p:nvSpPr>
+        <p:spPr>
+          <a:xfrm>
+            <a:off x="4617720" y="1965960"/>
+            <a:ext cx="2926080" cy="320040"/>
+          </a:xfrm>
+          <a:prstGeom prst="rect">
+            <a:avLst/>
+          </a:prstGeom>
+          <a:noFill/>
+          <a:ln/>
+        </p:spPr>
+        <p:txBody>
+          <a:bodyPr wrap="square" rtlCol="0" anchor="ctr"/>
+          <a:lstStyle/>
+          <a:p>
+            <a:pPr indent="0" marL="0">
+              <a:buNone/>
+            </a:pPr>
+            <a:r>
+              <a:rPr lang="en-US" sz="1200" b="1" dirty="0">
+                <a:solidFill>
+                  <a:srgbClr val="C98A3A"/>
+                </a:solidFill>
+                <a:latin typeface="Noto Sans CJK TC" pitchFamily="34" charset="0"/>
+                <a:ea typeface="Noto Sans CJK TC" pitchFamily="34" charset="-122"/>
+                <a:cs typeface="Noto Sans CJK TC" pitchFamily="34" charset="-120"/>
+              </a:rPr>
+              <a:t>第二層 · 協調</a:t>
+            </a:r>
+            <a:endParaRPr lang="en-US" sz="1200" dirty="0"/>
+          </a:p>
+        </p:txBody>
+      </p:sp>
+      <p:sp>
+        <p:nvSpPr>
+          <p:cNvPr id="12" name="Text 10"/>
+          <p:cNvSpPr/>
+          <p:nvPr/>
+        </p:nvSpPr>
+        <p:spPr>
+          <a:xfrm>
+            <a:off x="4617720" y="2313432"/>
+            <a:ext cx="2926080" cy="502920"/>
+          </a:xfrm>
+          <a:prstGeom prst="rect">
+            <a:avLst/>
+          </a:prstGeom>
+          <a:noFill/>
+          <a:ln/>
+        </p:spPr>
+        <p:txBody>
+          <a:bodyPr wrap="square" rtlCol="0" anchor="ctr"/>
+          <a:lstStyle/>
+          <a:p>
+            <a:pPr indent="0" marL="0">
+              <a:buNone/>
+            </a:pPr>
+            <a:r>
+              <a:rPr lang="en-US" sz="2100" b="1" dirty="0">
+                <a:solidFill>
+                  <a:srgbClr val="1B2538"/>
+                </a:solidFill>
+                <a:latin typeface="Noto Serif CJK TC" pitchFamily="34" charset="0"/>
+                <a:ea typeface="Noto Serif CJK TC" pitchFamily="34" charset="-122"/>
+                <a:cs typeface="Noto Serif CJK TC" pitchFamily="34" charset="-120"/>
+              </a:rPr>
+              <a:t>後段輕度協同</a:t>
+            </a:r>
+            <a:endParaRPr lang="en-US" sz="2100" dirty="0"/>
+          </a:p>
+        </p:txBody>
+      </p:sp>
+      <p:sp>
+        <p:nvSpPr>
+          <p:cNvPr id="13" name="Shape 11"/>
+          <p:cNvSpPr/>
+          <p:nvPr/>
+        </p:nvSpPr>
+        <p:spPr>
+          <a:xfrm>
+            <a:off x="4617720" y="2880360"/>
+            <a:ext cx="1737360" cy="329184"/>
+          </a:xfrm>
+          <a:prstGeom prst="roundRect">
+            <a:avLst>
+              <a:gd name="adj" fmla="val 13889"/>
+            </a:avLst>
+          </a:prstGeom>
+          <a:solidFill>
+            <a:srgbClr val="EEF1F6"/>
+          </a:solidFill>
+          <a:ln/>
+        </p:spPr>
+      </p:sp>
+      <p:sp>
+        <p:nvSpPr>
+          <p:cNvPr id="14" name="Text 12"/>
+          <p:cNvSpPr/>
+          <p:nvPr/>
+        </p:nvSpPr>
+        <p:spPr>
+          <a:xfrm>
+            <a:off x="4617720" y="2880360"/>
+            <a:ext cx="1737360" cy="329184"/>
+          </a:xfrm>
+          <a:prstGeom prst="rect">
+            <a:avLst/>
+          </a:prstGeom>
+          <a:noFill/>
+          <a:ln/>
+        </p:spPr>
+        <p:txBody>
+          <a:bodyPr wrap="square" rtlCol="0" anchor="ctr"/>
+          <a:lstStyle/>
+          <a:p>
+            <a:pPr algn="ctr" indent="0" marL="0">
+              <a:buNone/>
+            </a:pPr>
+            <a:r>
+              <a:rPr lang="en-US" sz="1100" b="1" dirty="0">
+                <a:solidFill>
+                  <a:srgbClr val="5A6678"/>
+                </a:solidFill>
+                <a:latin typeface="Noto Sans CJK TC" pitchFamily="34" charset="0"/>
+                <a:ea typeface="Noto Sans CJK TC" pitchFamily="34" charset="-122"/>
+                <a:cs typeface="Noto Sans CJK TC" pitchFamily="34" charset="-120"/>
+              </a:rPr>
+              <a:t>中信心</a:t>
+            </a:r>
+            <a:endParaRPr lang="en-US" sz="1100" dirty="0"/>
+          </a:p>
+        </p:txBody>
+      </p:sp>
+      <p:sp>
+        <p:nvSpPr>
+          <p:cNvPr id="15" name="Text 13"/>
+          <p:cNvSpPr/>
+          <p:nvPr/>
+        </p:nvSpPr>
+        <p:spPr>
+          <a:xfrm>
+            <a:off x="4617720" y="3383280"/>
+            <a:ext cx="2926080" cy="1051560"/>
+          </a:xfrm>
+          <a:prstGeom prst="rect">
+            <a:avLst/>
+          </a:prstGeom>
+          <a:noFill/>
+          <a:ln/>
+        </p:spPr>
+        <p:txBody>
+          <a:bodyPr wrap="square" rtlCol="0" anchor="t"/>
+          <a:lstStyle/>
+          <a:p>
+            <a:pPr indent="0" marL="0">
+              <a:lnSpc>
+                <a:spcPct val="108000"/>
+              </a:lnSpc>
+              <a:buNone/>
+            </a:pPr>
+            <a:r>
+              <a:rPr lang="en-US" sz="1250" dirty="0">
+                <a:solidFill>
+                  <a:srgbClr val="55617A"/>
+                </a:solidFill>
+                <a:latin typeface="Noto Sans CJK TC" pitchFamily="34" charset="0"/>
+                <a:ea typeface="Noto Sans CJK TC" pitchFamily="34" charset="-122"/>
+                <a:cs typeface="Noto Sans CJK TC" pitchFamily="34" charset="-120"/>
+              </a:rPr>
+              <a:t>不出資、不合資；與區域 OSAT 建立製程界面預先對接、FA 協同與優選名單。拿週期縮短的好處，不背重資本。</a:t>
+            </a:r>
+            <a:endParaRPr lang="en-US" sz="1250" dirty="0"/>
+          </a:p>
+        </p:txBody>
+      </p:sp>
+      <p:sp>
+        <p:nvSpPr>
+          <p:cNvPr id="16" name="Shape 14"/>
+          <p:cNvSpPr/>
+          <p:nvPr/>
+        </p:nvSpPr>
+        <p:spPr>
+          <a:xfrm>
+            <a:off x="8046720" y="1691640"/>
+            <a:ext cx="3566160" cy="2880360"/>
+          </a:xfrm>
+          <a:prstGeom prst="roundRect">
+            <a:avLst>
+              <a:gd name="adj" fmla="val 2540"/>
+            </a:avLst>
+          </a:prstGeom>
+          <a:solidFill>
+            <a:srgbClr val="FFFFFF"/>
+          </a:solidFill>
+          <a:ln/>
+          <a:effectLst>
+            <a:outerShdw sx="100000" sy="100000" kx="0" ky="0" algn="bl" rotWithShape="0" blurRad="88900" dist="38100" dir="5400000">
+              <a:srgbClr val="0E1B33">
+                <a:alpha val="18000"/>
+              </a:srgbClr>
+            </a:outerShdw>
+          </a:effectLst>
+        </p:spPr>
+      </p:sp>
+      <p:sp>
+        <p:nvSpPr>
+          <p:cNvPr id="17" name="Text 15"/>
+          <p:cNvSpPr/>
+          <p:nvPr/>
+        </p:nvSpPr>
+        <p:spPr>
+          <a:xfrm>
+            <a:off x="8366760" y="1965960"/>
+            <a:ext cx="2926080" cy="320040"/>
+          </a:xfrm>
+          <a:prstGeom prst="rect">
+            <a:avLst/>
+          </a:prstGeom>
+          <a:noFill/>
+          <a:ln/>
+        </p:spPr>
+        <p:txBody>
+          <a:bodyPr wrap="square" rtlCol="0" anchor="ctr"/>
+          <a:lstStyle/>
+          <a:p>
+            <a:pPr indent="0" marL="0">
+              <a:buNone/>
+            </a:pPr>
+            <a:r>
+              <a:rPr lang="en-US" sz="1200" b="1" dirty="0">
+                <a:solidFill>
+                  <a:srgbClr val="274472"/>
+                </a:solidFill>
+                <a:latin typeface="Noto Sans CJK TC" pitchFamily="34" charset="0"/>
+                <a:ea typeface="Noto Sans CJK TC" pitchFamily="34" charset="-122"/>
+                <a:cs typeface="Noto Sans CJK TC" pitchFamily="34" charset="-120"/>
+              </a:rPr>
+              <a:t>第三層 · 選擇權</a:t>
+            </a:r>
+            <a:endParaRPr lang="en-US" sz="1200" dirty="0"/>
+          </a:p>
+        </p:txBody>
+      </p:sp>
+      <p:sp>
+        <p:nvSpPr>
+          <p:cNvPr id="18" name="Text 16"/>
+          <p:cNvSpPr/>
+          <p:nvPr/>
+        </p:nvSpPr>
+        <p:spPr>
+          <a:xfrm>
+            <a:off x="8366760" y="2313432"/>
+            <a:ext cx="2926080" cy="502920"/>
+          </a:xfrm>
+          <a:prstGeom prst="rect">
+            <a:avLst/>
+          </a:prstGeom>
+          <a:noFill/>
+          <a:ln/>
+        </p:spPr>
+        <p:txBody>
+          <a:bodyPr wrap="square" rtlCol="0" anchor="ctr"/>
+          <a:lstStyle/>
+          <a:p>
+            <a:pPr indent="0" marL="0">
+              <a:buNone/>
+            </a:pPr>
+            <a:r>
+              <a:rPr lang="en-US" sz="2100" b="1" dirty="0">
+                <a:solidFill>
+                  <a:srgbClr val="1B2538"/>
+                </a:solidFill>
+                <a:latin typeface="Noto Serif CJK TC" pitchFamily="34" charset="0"/>
+                <a:ea typeface="Noto Serif CJK TC" pitchFamily="34" charset="-122"/>
+                <a:cs typeface="Noto Serif CJK TC" pitchFamily="34" charset="-120"/>
+              </a:rPr>
+              <a:t>局部後段投入</a:t>
+            </a:r>
+            <a:endParaRPr lang="en-US" sz="2100" dirty="0"/>
+          </a:p>
+        </p:txBody>
+      </p:sp>
+      <p:sp>
+        <p:nvSpPr>
+          <p:cNvPr id="19" name="Shape 17"/>
+          <p:cNvSpPr/>
+          <p:nvPr/>
+        </p:nvSpPr>
+        <p:spPr>
+          <a:xfrm>
+            <a:off x="8366760" y="2880360"/>
+            <a:ext cx="1737360" cy="329184"/>
+          </a:xfrm>
+          <a:prstGeom prst="roundRect">
+            <a:avLst>
+              <a:gd name="adj" fmla="val 13889"/>
+            </a:avLst>
+          </a:prstGeom>
+          <a:solidFill>
+            <a:srgbClr val="EEF1F6"/>
+          </a:solidFill>
+          <a:ln/>
+        </p:spPr>
+      </p:sp>
+      <p:sp>
+        <p:nvSpPr>
+          <p:cNvPr id="20" name="Text 18"/>
+          <p:cNvSpPr/>
+          <p:nvPr/>
+        </p:nvSpPr>
+        <p:spPr>
+          <a:xfrm>
+            <a:off x="8366760" y="2880360"/>
+            <a:ext cx="1737360" cy="329184"/>
+          </a:xfrm>
+          <a:prstGeom prst="rect">
+            <a:avLst/>
+          </a:prstGeom>
+          <a:noFill/>
+          <a:ln/>
+        </p:spPr>
+        <p:txBody>
+          <a:bodyPr wrap="square" rtlCol="0" anchor="ctr"/>
+          <a:lstStyle/>
+          <a:p>
+            <a:pPr algn="ctr" indent="0" marL="0">
+              <a:buNone/>
+            </a:pPr>
+            <a:r>
+              <a:rPr lang="en-US" sz="1100" b="1" dirty="0">
+                <a:solidFill>
+                  <a:srgbClr val="5A6678"/>
+                </a:solidFill>
+                <a:latin typeface="Noto Sans CJK TC" pitchFamily="34" charset="0"/>
+                <a:ea typeface="Noto Sans CJK TC" pitchFamily="34" charset="-122"/>
+                <a:cs typeface="Noto Sans CJK TC" pitchFamily="34" charset="-120"/>
+              </a:rPr>
+              <a:t>低信心 · 需驗證</a:t>
+            </a:r>
+            <a:endParaRPr lang="en-US" sz="1100" dirty="0"/>
+          </a:p>
+        </p:txBody>
+      </p:sp>
+      <p:sp>
+        <p:nvSpPr>
+          <p:cNvPr id="21" name="Text 19"/>
+          <p:cNvSpPr/>
+          <p:nvPr/>
+        </p:nvSpPr>
+        <p:spPr>
+          <a:xfrm>
+            <a:off x="8366760" y="3383280"/>
+            <a:ext cx="2926080" cy="1051560"/>
+          </a:xfrm>
+          <a:prstGeom prst="rect">
+            <a:avLst/>
+          </a:prstGeom>
+          <a:noFill/>
+          <a:ln/>
+        </p:spPr>
+        <p:txBody>
+          <a:bodyPr wrap="square" rtlCol="0" anchor="t"/>
+          <a:lstStyle/>
+          <a:p>
+            <a:pPr indent="0" marL="0">
+              <a:lnSpc>
+                <a:spcPct val="108000"/>
+              </a:lnSpc>
+              <a:buNone/>
+            </a:pPr>
+            <a:r>
+              <a:rPr lang="en-US" sz="1250" dirty="0">
+                <a:solidFill>
+                  <a:srgbClr val="55617A"/>
+                </a:solidFill>
+                <a:latin typeface="Noto Sans CJK TC" pitchFamily="34" charset="0"/>
+                <a:ea typeface="Noto Sans CJK TC" pitchFamily="34" charset="-122"/>
+                <a:cs typeface="Noto Sans CJK TC" pitchFamily="34" charset="-120"/>
+              </a:rPr>
+              <a:t>僅在單一車用大客戶給 take-or-pay 等級承諾、且量價足夠時才啟動。是 option，不是 base case。</a:t>
+            </a:r>
+            <a:endParaRPr lang="en-US" sz="1250" dirty="0"/>
+          </a:p>
+        </p:txBody>
+      </p:sp>
+      <p:sp>
+        <p:nvSpPr>
+          <p:cNvPr id="22" name="Shape 20"/>
+          <p:cNvSpPr/>
+          <p:nvPr/>
+        </p:nvSpPr>
+        <p:spPr>
+          <a:xfrm>
+            <a:off x="548640" y="4800600"/>
+            <a:ext cx="11064240" cy="1234440"/>
+          </a:xfrm>
+          <a:prstGeom prst="roundRect">
+            <a:avLst>
+              <a:gd name="adj" fmla="val 5185"/>
+            </a:avLst>
+          </a:prstGeom>
+          <a:solidFill>
+            <a:srgbClr val="EAEFF6"/>
           </a:solidFill>
           <a:ln/>
         </p:spPr>
       </p:sp>
       <p:pic>
         <p:nvPicPr>
-          <p:cNvPr id="6" name="Image 0" descr="preencoded.png">    </p:cNvPr>
+          <p:cNvPr id="23" name="Image 0" descr="preencoded.png">    </p:cNvPr>
           <p:cNvPicPr>
             <a:picLocks noChangeAspect="1"/>
           </p:cNvPicPr>
@@ -8316,8 +10371,8 @@
         </p:blipFill>
         <p:spPr>
           <a:xfrm>
-            <a:off x="996696" y="2121408"/>
-            <a:ext cx="329184" cy="329184"/>
+            <a:off x="914400" y="5138928"/>
+            <a:ext cx="502920" cy="502920"/>
           </a:xfrm>
           <a:prstGeom prst="rect">
             <a:avLst/>
@@ -8326,14 +10381,14 @@
       </p:pic>
       <p:sp>
         <p:nvSpPr>
-          <p:cNvPr id="7" name="Text 4"/>
-          <p:cNvSpPr/>
-          <p:nvPr/>
-        </p:nvSpPr>
-        <p:spPr>
-          <a:xfrm>
-            <a:off x="1645920" y="2029968"/>
-            <a:ext cx="2313432" cy="502920"/>
+          <p:cNvPr id="24" name="Text 21"/>
+          <p:cNvSpPr/>
+          <p:nvPr/>
+        </p:nvSpPr>
+        <p:spPr>
+          <a:xfrm>
+            <a:off x="1600200" y="4892040"/>
+            <a:ext cx="9784080" cy="1051560"/>
           </a:xfrm>
           <a:prstGeom prst="rect">
             <a:avLst/>
@@ -8349,809 +10404,29 @@
               <a:buNone/>
             </a:pPr>
             <a:r>
-              <a:rPr lang="en-US" sz="1700" b="1" dirty="0">
-                <a:solidFill>
-                  <a:srgbClr val="1B2538"/>
-                </a:solidFill>
-                <a:latin typeface="Noto Serif CJK TC" pitchFamily="34" charset="0"/>
-                <a:ea typeface="Noto Serif CJK TC" pitchFamily="34" charset="-122"/>
-                <a:cs typeface="Noto Serif CJK TC" pitchFamily="34" charset="-120"/>
-              </a:rPr>
-              <a:t>客戶需求</a:t>
-            </a:r>
-            <a:endParaRPr lang="en-US" sz="1700" dirty="0"/>
-          </a:p>
-        </p:txBody>
-      </p:sp>
-      <p:sp>
-        <p:nvSpPr>
-          <p:cNvPr id="8" name="Text 5"/>
-          <p:cNvSpPr/>
-          <p:nvPr/>
-        </p:nvSpPr>
-        <p:spPr>
-          <a:xfrm>
-            <a:off x="868680" y="2743200"/>
-            <a:ext cx="2953512" cy="640080"/>
-          </a:xfrm>
-          <a:prstGeom prst="rect">
-            <a:avLst/>
-          </a:prstGeom>
-          <a:noFill/>
-          <a:ln/>
-        </p:spPr>
-        <p:txBody>
-          <a:bodyPr wrap="square" rtlCol="0" anchor="t"/>
-          <a:lstStyle/>
-          <a:p>
-            <a:pPr indent="0" marL="0">
-              <a:buNone/>
-            </a:pPr>
-            <a:r>
-              <a:rPr lang="en-US" sz="1300" dirty="0">
-                <a:solidFill>
-                  <a:srgbClr val="55617A"/>
+              <a:rPr lang="en-US" sz="1300" b="1" dirty="0">
+                <a:solidFill>
+                  <a:srgbClr val="274472"/>
                 </a:solidFill>
                 <a:latin typeface="Noto Sans CJK TC" pitchFamily="34" charset="0"/>
                 <a:ea typeface="Noto Sans CJK TC" pitchFamily="34" charset="-122"/>
                 <a:cs typeface="Noto Sans CJK TC" pitchFamily="34" charset="-120"/>
               </a:rPr>
-              <a:t>Fab 12i 客戶是否真的需要該國 support？</a:t>
-            </a:r>
-            <a:endParaRPr lang="en-US" sz="1300" dirty="0"/>
-          </a:p>
-        </p:txBody>
-      </p:sp>
-      <p:sp>
-        <p:nvSpPr>
-          <p:cNvPr id="9" name="Shape 6"/>
-          <p:cNvSpPr/>
-          <p:nvPr/>
-        </p:nvSpPr>
-        <p:spPr>
-          <a:xfrm>
-            <a:off x="4325112" y="1645920"/>
-            <a:ext cx="3593592" cy="1874520"/>
-          </a:xfrm>
-          <a:prstGeom prst="roundRect">
-            <a:avLst>
-              <a:gd name="adj" fmla="val 3415"/>
-            </a:avLst>
-          </a:prstGeom>
-          <a:solidFill>
-            <a:srgbClr val="FFFFFF"/>
-          </a:solidFill>
-          <a:ln/>
-          <a:effectLst>
-            <a:outerShdw sx="100000" sy="100000" kx="0" ky="0" algn="bl" rotWithShape="0" blurRad="88900" dist="38100" dir="5400000">
-              <a:srgbClr val="0E1B33">
-                <a:alpha val="18000"/>
-              </a:srgbClr>
-            </a:outerShdw>
-          </a:effectLst>
-        </p:spPr>
-      </p:sp>
-      <p:sp>
-        <p:nvSpPr>
-          <p:cNvPr id="10" name="Shape 7"/>
-          <p:cNvSpPr/>
-          <p:nvPr/>
-        </p:nvSpPr>
-        <p:spPr>
-          <a:xfrm>
-            <a:off x="4617720" y="1965960"/>
-            <a:ext cx="640080" cy="640080"/>
-          </a:xfrm>
-          <a:prstGeom prst="ellipse">
-            <a:avLst/>
-          </a:prstGeom>
-          <a:solidFill>
-            <a:srgbClr val="0E1B33"/>
-          </a:solidFill>
-          <a:ln/>
-        </p:spPr>
-      </p:sp>
-      <p:pic>
-        <p:nvPicPr>
-          <p:cNvPr id="11" name="Image 1" descr="preencoded.png">    </p:cNvPr>
-          <p:cNvPicPr>
-            <a:picLocks noChangeAspect="1"/>
-          </p:cNvPicPr>
-          <p:nvPr/>
-        </p:nvPicPr>
-        <p:blipFill>
-          <a:blip r:embed="rId2"/>
-          <a:stretch>
-            <a:fillRect/>
-          </a:stretch>
-        </p:blipFill>
-        <p:spPr>
-          <a:xfrm>
-            <a:off x="4773168" y="2121408"/>
-            <a:ext cx="329184" cy="329184"/>
-          </a:xfrm>
-          <a:prstGeom prst="rect">
-            <a:avLst/>
-          </a:prstGeom>
-        </p:spPr>
-      </p:pic>
-      <p:sp>
-        <p:nvSpPr>
-          <p:cNvPr id="12" name="Text 8"/>
-          <p:cNvSpPr/>
-          <p:nvPr/>
-        </p:nvSpPr>
-        <p:spPr>
-          <a:xfrm>
-            <a:off x="5422392" y="2029968"/>
-            <a:ext cx="2313432" cy="502920"/>
-          </a:xfrm>
-          <a:prstGeom prst="rect">
-            <a:avLst/>
-          </a:prstGeom>
-          <a:noFill/>
-          <a:ln/>
-        </p:spPr>
-        <p:txBody>
-          <a:bodyPr wrap="square" rtlCol="0" anchor="ctr"/>
-          <a:lstStyle/>
-          <a:p>
+              <a:t>對應 Dashboard：  </a:t>
+            </a:r>
             <a:pPr indent="0" marL="0">
               <a:buNone/>
             </a:pPr>
             <a:r>
-              <a:rPr lang="en-US" sz="1700" b="1" dirty="0">
-                <a:solidFill>
-                  <a:srgbClr val="1B2538"/>
-                </a:solidFill>
-                <a:latin typeface="Noto Serif CJK TC" pitchFamily="34" charset="0"/>
-                <a:ea typeface="Noto Serif CJK TC" pitchFamily="34" charset="-122"/>
-                <a:cs typeface="Noto Serif CJK TC" pitchFamily="34" charset="-120"/>
-              </a:rPr>
-              <a:t>Partner economics</a:t>
-            </a:r>
-            <a:endParaRPr lang="en-US" sz="1700" dirty="0"/>
-          </a:p>
-        </p:txBody>
-      </p:sp>
-      <p:sp>
-        <p:nvSpPr>
-          <p:cNvPr id="13" name="Text 9"/>
-          <p:cNvSpPr/>
-          <p:nvPr/>
-        </p:nvSpPr>
-        <p:spPr>
-          <a:xfrm>
-            <a:off x="4645152" y="2743200"/>
-            <a:ext cx="2953512" cy="640080"/>
-          </a:xfrm>
-          <a:prstGeom prst="rect">
-            <a:avLst/>
-          </a:prstGeom>
-          <a:noFill/>
-          <a:ln/>
-        </p:spPr>
-        <p:txBody>
-          <a:bodyPr wrap="square" rtlCol="0" anchor="t"/>
-          <a:lstStyle/>
-          <a:p>
-            <a:pPr indent="0" marL="0">
-              <a:buNone/>
-            </a:pPr>
-            <a:r>
               <a:rPr lang="en-US" sz="1300" dirty="0">
                 <a:solidFill>
-                  <a:srgbClr val="55617A"/>
+                  <a:srgbClr val="44516A"/>
                 </a:solidFill>
                 <a:latin typeface="Noto Sans CJK TC" pitchFamily="34" charset="0"/>
                 <a:ea typeface="Noto Sans CJK TC" pitchFamily="34" charset="-122"/>
                 <a:cs typeface="Noto Sans CJK TC" pitchFamily="34" charset="-120"/>
               </a:rPr>
-              <a:t>合作方條件與 customer overlap 是否成立？</a:t>
-            </a:r>
-            <a:endParaRPr lang="en-US" sz="1300" dirty="0"/>
-          </a:p>
-        </p:txBody>
-      </p:sp>
-      <p:sp>
-        <p:nvSpPr>
-          <p:cNvPr id="14" name="Shape 10"/>
-          <p:cNvSpPr/>
-          <p:nvPr/>
-        </p:nvSpPr>
-        <p:spPr>
-          <a:xfrm>
-            <a:off x="8101584" y="1645920"/>
-            <a:ext cx="3593592" cy="1874520"/>
-          </a:xfrm>
-          <a:prstGeom prst="roundRect">
-            <a:avLst>
-              <a:gd name="adj" fmla="val 3415"/>
-            </a:avLst>
-          </a:prstGeom>
-          <a:solidFill>
-            <a:srgbClr val="FFFFFF"/>
-          </a:solidFill>
-          <a:ln/>
-          <a:effectLst>
-            <a:outerShdw sx="100000" sy="100000" kx="0" ky="0" algn="bl" rotWithShape="0" blurRad="88900" dist="38100" dir="5400000">
-              <a:srgbClr val="0E1B33">
-                <a:alpha val="18000"/>
-              </a:srgbClr>
-            </a:outerShdw>
-          </a:effectLst>
-        </p:spPr>
-      </p:sp>
-      <p:sp>
-        <p:nvSpPr>
-          <p:cNvPr id="15" name="Shape 11"/>
-          <p:cNvSpPr/>
-          <p:nvPr/>
-        </p:nvSpPr>
-        <p:spPr>
-          <a:xfrm>
-            <a:off x="8394192" y="1965960"/>
-            <a:ext cx="640080" cy="640080"/>
-          </a:xfrm>
-          <a:prstGeom prst="ellipse">
-            <a:avLst/>
-          </a:prstGeom>
-          <a:solidFill>
-            <a:srgbClr val="0E1B33"/>
-          </a:solidFill>
-          <a:ln/>
-        </p:spPr>
-      </p:sp>
-      <p:pic>
-        <p:nvPicPr>
-          <p:cNvPr id="16" name="Image 2" descr="preencoded.png">    </p:cNvPr>
-          <p:cNvPicPr>
-            <a:picLocks noChangeAspect="1"/>
-          </p:cNvPicPr>
-          <p:nvPr/>
-        </p:nvPicPr>
-        <p:blipFill>
-          <a:blip r:embed="rId3"/>
-          <a:stretch>
-            <a:fillRect/>
-          </a:stretch>
-        </p:blipFill>
-        <p:spPr>
-          <a:xfrm>
-            <a:off x="8549640" y="2121408"/>
-            <a:ext cx="329184" cy="329184"/>
-          </a:xfrm>
-          <a:prstGeom prst="rect">
-            <a:avLst/>
-          </a:prstGeom>
-        </p:spPr>
-      </p:pic>
-      <p:sp>
-        <p:nvSpPr>
-          <p:cNvPr id="17" name="Text 12"/>
-          <p:cNvSpPr/>
-          <p:nvPr/>
-        </p:nvSpPr>
-        <p:spPr>
-          <a:xfrm>
-            <a:off x="9198864" y="2029968"/>
-            <a:ext cx="2313432" cy="502920"/>
-          </a:xfrm>
-          <a:prstGeom prst="rect">
-            <a:avLst/>
-          </a:prstGeom>
-          <a:noFill/>
-          <a:ln/>
-        </p:spPr>
-        <p:txBody>
-          <a:bodyPr wrap="square" rtlCol="0" anchor="ctr"/>
-          <a:lstStyle/>
-          <a:p>
-            <a:pPr indent="0" marL="0">
-              <a:buNone/>
-            </a:pPr>
-            <a:r>
-              <a:rPr lang="en-US" sz="1700" b="1" dirty="0">
-                <a:solidFill>
-                  <a:srgbClr val="1B2538"/>
-                </a:solidFill>
-                <a:latin typeface="Noto Serif CJK TC" pitchFamily="34" charset="0"/>
-                <a:ea typeface="Noto Serif CJK TC" pitchFamily="34" charset="-122"/>
-                <a:cs typeface="Noto Serif CJK TC" pitchFamily="34" charset="-120"/>
-              </a:rPr>
-              <a:t>Power / 基礎建設</a:t>
-            </a:r>
-            <a:endParaRPr lang="en-US" sz="1700" dirty="0"/>
-          </a:p>
-        </p:txBody>
-      </p:sp>
-      <p:sp>
-        <p:nvSpPr>
-          <p:cNvPr id="18" name="Text 13"/>
-          <p:cNvSpPr/>
-          <p:nvPr/>
-        </p:nvSpPr>
-        <p:spPr>
-          <a:xfrm>
-            <a:off x="8421624" y="2743200"/>
-            <a:ext cx="2953512" cy="640080"/>
-          </a:xfrm>
-          <a:prstGeom prst="rect">
-            <a:avLst/>
-          </a:prstGeom>
-          <a:noFill/>
-          <a:ln/>
-        </p:spPr>
-        <p:txBody>
-          <a:bodyPr wrap="square" rtlCol="0" anchor="t"/>
-          <a:lstStyle/>
-          <a:p>
-            <a:pPr indent="0" marL="0">
-              <a:buNone/>
-            </a:pPr>
-            <a:r>
-              <a:rPr lang="en-US" sz="1300" dirty="0">
-                <a:solidFill>
-                  <a:srgbClr val="55617A"/>
-                </a:solidFill>
-                <a:latin typeface="Noto Sans CJK TC" pitchFamily="34" charset="0"/>
-                <a:ea typeface="Noto Sans CJK TC" pitchFamily="34" charset="-122"/>
-                <a:cs typeface="Noto Sans CJK TC" pitchFamily="34" charset="-120"/>
-              </a:rPr>
-              <a:t>電力供應與穩定度能否支撐製造負載？</a:t>
-            </a:r>
-            <a:endParaRPr lang="en-US" sz="1300" dirty="0"/>
-          </a:p>
-        </p:txBody>
-      </p:sp>
-      <p:sp>
-        <p:nvSpPr>
-          <p:cNvPr id="19" name="Shape 14"/>
-          <p:cNvSpPr/>
-          <p:nvPr/>
-        </p:nvSpPr>
-        <p:spPr>
-          <a:xfrm>
-            <a:off x="548640" y="3721608"/>
-            <a:ext cx="3593592" cy="1874520"/>
-          </a:xfrm>
-          <a:prstGeom prst="roundRect">
-            <a:avLst>
-              <a:gd name="adj" fmla="val 3415"/>
-            </a:avLst>
-          </a:prstGeom>
-          <a:solidFill>
-            <a:srgbClr val="FFFFFF"/>
-          </a:solidFill>
-          <a:ln/>
-          <a:effectLst>
-            <a:outerShdw sx="100000" sy="100000" kx="0" ky="0" algn="bl" rotWithShape="0" blurRad="88900" dist="38100" dir="5400000">
-              <a:srgbClr val="0E1B33">
-                <a:alpha val="18000"/>
-              </a:srgbClr>
-            </a:outerShdw>
-          </a:effectLst>
-        </p:spPr>
-      </p:sp>
-      <p:sp>
-        <p:nvSpPr>
-          <p:cNvPr id="20" name="Shape 15"/>
-          <p:cNvSpPr/>
-          <p:nvPr/>
-        </p:nvSpPr>
-        <p:spPr>
-          <a:xfrm>
-            <a:off x="841248" y="4041648"/>
-            <a:ext cx="640080" cy="640080"/>
-          </a:xfrm>
-          <a:prstGeom prst="ellipse">
-            <a:avLst/>
-          </a:prstGeom>
-          <a:solidFill>
-            <a:srgbClr val="0E1B33"/>
-          </a:solidFill>
-          <a:ln/>
-        </p:spPr>
-      </p:sp>
-      <p:pic>
-        <p:nvPicPr>
-          <p:cNvPr id="21" name="Image 3" descr="preencoded.png">    </p:cNvPr>
-          <p:cNvPicPr>
-            <a:picLocks noChangeAspect="1"/>
-          </p:cNvPicPr>
-          <p:nvPr/>
-        </p:nvPicPr>
-        <p:blipFill>
-          <a:blip r:embed="rId4"/>
-          <a:stretch>
-            <a:fillRect/>
-          </a:stretch>
-        </p:blipFill>
-        <p:spPr>
-          <a:xfrm>
-            <a:off x="996696" y="4197096"/>
-            <a:ext cx="329184" cy="329184"/>
-          </a:xfrm>
-          <a:prstGeom prst="rect">
-            <a:avLst/>
-          </a:prstGeom>
-        </p:spPr>
-      </p:pic>
-      <p:sp>
-        <p:nvSpPr>
-          <p:cNvPr id="22" name="Text 16"/>
-          <p:cNvSpPr/>
-          <p:nvPr/>
-        </p:nvSpPr>
-        <p:spPr>
-          <a:xfrm>
-            <a:off x="1645920" y="4105656"/>
-            <a:ext cx="2313432" cy="502920"/>
-          </a:xfrm>
-          <a:prstGeom prst="rect">
-            <a:avLst/>
-          </a:prstGeom>
-          <a:noFill/>
-          <a:ln/>
-        </p:spPr>
-        <p:txBody>
-          <a:bodyPr wrap="square" rtlCol="0" anchor="ctr"/>
-          <a:lstStyle/>
-          <a:p>
-            <a:pPr indent="0" marL="0">
-              <a:buNone/>
-            </a:pPr>
-            <a:r>
-              <a:rPr lang="en-US" sz="1700" b="1" dirty="0">
-                <a:solidFill>
-                  <a:srgbClr val="1B2538"/>
-                </a:solidFill>
-                <a:latin typeface="Noto Serif CJK TC" pitchFamily="34" charset="0"/>
-                <a:ea typeface="Noto Serif CJK TC" pitchFamily="34" charset="-122"/>
-                <a:cs typeface="Noto Serif CJK TC" pitchFamily="34" charset="-120"/>
-              </a:rPr>
-              <a:t>Water / 環境</a:t>
-            </a:r>
-            <a:endParaRPr lang="en-US" sz="1700" dirty="0"/>
-          </a:p>
-        </p:txBody>
-      </p:sp>
-      <p:sp>
-        <p:nvSpPr>
-          <p:cNvPr id="23" name="Text 17"/>
-          <p:cNvSpPr/>
-          <p:nvPr/>
-        </p:nvSpPr>
-        <p:spPr>
-          <a:xfrm>
-            <a:off x="868680" y="4818888"/>
-            <a:ext cx="2953512" cy="640080"/>
-          </a:xfrm>
-          <a:prstGeom prst="rect">
-            <a:avLst/>
-          </a:prstGeom>
-          <a:noFill/>
-          <a:ln/>
-        </p:spPr>
-        <p:txBody>
-          <a:bodyPr wrap="square" rtlCol="0" anchor="t"/>
-          <a:lstStyle/>
-          <a:p>
-            <a:pPr indent="0" marL="0">
-              <a:buNone/>
-            </a:pPr>
-            <a:r>
-              <a:rPr lang="en-US" sz="1300" dirty="0">
-                <a:solidFill>
-                  <a:srgbClr val="55617A"/>
-                </a:solidFill>
-                <a:latin typeface="Noto Sans CJK TC" pitchFamily="34" charset="0"/>
-                <a:ea typeface="Noto Sans CJK TC" pitchFamily="34" charset="-122"/>
-                <a:cs typeface="Noto Sans CJK TC" pitchFamily="34" charset="-120"/>
-              </a:rPr>
-              <a:t>水資源、環境與營運條件是否充足？</a:t>
-            </a:r>
-            <a:endParaRPr lang="en-US" sz="1300" dirty="0"/>
-          </a:p>
-        </p:txBody>
-      </p:sp>
-      <p:sp>
-        <p:nvSpPr>
-          <p:cNvPr id="24" name="Shape 18"/>
-          <p:cNvSpPr/>
-          <p:nvPr/>
-        </p:nvSpPr>
-        <p:spPr>
-          <a:xfrm>
-            <a:off x="4325112" y="3721608"/>
-            <a:ext cx="3593592" cy="1874520"/>
-          </a:xfrm>
-          <a:prstGeom prst="roundRect">
-            <a:avLst>
-              <a:gd name="adj" fmla="val 3415"/>
-            </a:avLst>
-          </a:prstGeom>
-          <a:solidFill>
-            <a:srgbClr val="FFFFFF"/>
-          </a:solidFill>
-          <a:ln/>
-          <a:effectLst>
-            <a:outerShdw sx="100000" sy="100000" kx="0" ky="0" algn="bl" rotWithShape="0" blurRad="88900" dist="38100" dir="5400000">
-              <a:srgbClr val="0E1B33">
-                <a:alpha val="18000"/>
-              </a:srgbClr>
-            </a:outerShdw>
-          </a:effectLst>
-        </p:spPr>
-      </p:sp>
-      <p:sp>
-        <p:nvSpPr>
-          <p:cNvPr id="25" name="Shape 19"/>
-          <p:cNvSpPr/>
-          <p:nvPr/>
-        </p:nvSpPr>
-        <p:spPr>
-          <a:xfrm>
-            <a:off x="4617720" y="4041648"/>
-            <a:ext cx="640080" cy="640080"/>
-          </a:xfrm>
-          <a:prstGeom prst="ellipse">
-            <a:avLst/>
-          </a:prstGeom>
-          <a:solidFill>
-            <a:srgbClr val="0E1B33"/>
-          </a:solidFill>
-          <a:ln/>
-        </p:spPr>
-      </p:sp>
-      <p:pic>
-        <p:nvPicPr>
-          <p:cNvPr id="26" name="Image 4" descr="preencoded.png">    </p:cNvPr>
-          <p:cNvPicPr>
-            <a:picLocks noChangeAspect="1"/>
-          </p:cNvPicPr>
-          <p:nvPr/>
-        </p:nvPicPr>
-        <p:blipFill>
-          <a:blip r:embed="rId5"/>
-          <a:stretch>
-            <a:fillRect/>
-          </a:stretch>
-        </p:blipFill>
-        <p:spPr>
-          <a:xfrm>
-            <a:off x="4773168" y="4197096"/>
-            <a:ext cx="329184" cy="329184"/>
-          </a:xfrm>
-          <a:prstGeom prst="rect">
-            <a:avLst/>
-          </a:prstGeom>
-        </p:spPr>
-      </p:pic>
-      <p:sp>
-        <p:nvSpPr>
-          <p:cNvPr id="27" name="Text 20"/>
-          <p:cNvSpPr/>
-          <p:nvPr/>
-        </p:nvSpPr>
-        <p:spPr>
-          <a:xfrm>
-            <a:off x="5422392" y="4105656"/>
-            <a:ext cx="2313432" cy="502920"/>
-          </a:xfrm>
-          <a:prstGeom prst="rect">
-            <a:avLst/>
-          </a:prstGeom>
-          <a:noFill/>
-          <a:ln/>
-        </p:spPr>
-        <p:txBody>
-          <a:bodyPr wrap="square" rtlCol="0" anchor="ctr"/>
-          <a:lstStyle/>
-          <a:p>
-            <a:pPr indent="0" marL="0">
-              <a:buNone/>
-            </a:pPr>
-            <a:r>
-              <a:rPr lang="en-US" sz="1700" b="1" dirty="0">
-                <a:solidFill>
-                  <a:srgbClr val="1B2538"/>
-                </a:solidFill>
-                <a:latin typeface="Noto Serif CJK TC" pitchFamily="34" charset="0"/>
-                <a:ea typeface="Noto Serif CJK TC" pitchFamily="34" charset="-122"/>
-                <a:cs typeface="Noto Serif CJK TC" pitchFamily="34" charset="-120"/>
-              </a:rPr>
-              <a:t>Talent</a:t>
-            </a:r>
-            <a:endParaRPr lang="en-US" sz="1700" dirty="0"/>
-          </a:p>
-        </p:txBody>
-      </p:sp>
-      <p:sp>
-        <p:nvSpPr>
-          <p:cNvPr id="28" name="Text 21"/>
-          <p:cNvSpPr/>
-          <p:nvPr/>
-        </p:nvSpPr>
-        <p:spPr>
-          <a:xfrm>
-            <a:off x="4645152" y="4818888"/>
-            <a:ext cx="2953512" cy="640080"/>
-          </a:xfrm>
-          <a:prstGeom prst="rect">
-            <a:avLst/>
-          </a:prstGeom>
-          <a:noFill/>
-          <a:ln/>
-        </p:spPr>
-        <p:txBody>
-          <a:bodyPr wrap="square" rtlCol="0" anchor="t"/>
-          <a:lstStyle/>
-          <a:p>
-            <a:pPr indent="0" marL="0">
-              <a:buNone/>
-            </a:pPr>
-            <a:r>
-              <a:rPr lang="en-US" sz="1300" dirty="0">
-                <a:solidFill>
-                  <a:srgbClr val="55617A"/>
-                </a:solidFill>
-                <a:latin typeface="Noto Sans CJK TC" pitchFamily="34" charset="0"/>
-                <a:ea typeface="Noto Sans CJK TC" pitchFamily="34" charset="-122"/>
-                <a:cs typeface="Noto Sans CJK TC" pitchFamily="34" charset="-120"/>
-              </a:rPr>
-              <a:t>當地是否能支援 B2B foundry customer engineering？</a:t>
-            </a:r>
-            <a:endParaRPr lang="en-US" sz="1300" dirty="0"/>
-          </a:p>
-        </p:txBody>
-      </p:sp>
-      <p:sp>
-        <p:nvSpPr>
-          <p:cNvPr id="29" name="Shape 22"/>
-          <p:cNvSpPr/>
-          <p:nvPr/>
-        </p:nvSpPr>
-        <p:spPr>
-          <a:xfrm>
-            <a:off x="8101584" y="3721608"/>
-            <a:ext cx="3593592" cy="1874520"/>
-          </a:xfrm>
-          <a:prstGeom prst="roundRect">
-            <a:avLst>
-              <a:gd name="adj" fmla="val 3415"/>
-            </a:avLst>
-          </a:prstGeom>
-          <a:solidFill>
-            <a:srgbClr val="FFFFFF"/>
-          </a:solidFill>
-          <a:ln/>
-          <a:effectLst>
-            <a:outerShdw sx="100000" sy="100000" kx="0" ky="0" algn="bl" rotWithShape="0" blurRad="88900" dist="38100" dir="5400000">
-              <a:srgbClr val="0E1B33">
-                <a:alpha val="18000"/>
-              </a:srgbClr>
-            </a:outerShdw>
-          </a:effectLst>
-        </p:spPr>
-      </p:sp>
-      <p:sp>
-        <p:nvSpPr>
-          <p:cNvPr id="30" name="Shape 23"/>
-          <p:cNvSpPr/>
-          <p:nvPr/>
-        </p:nvSpPr>
-        <p:spPr>
-          <a:xfrm>
-            <a:off x="8394192" y="4041648"/>
-            <a:ext cx="640080" cy="640080"/>
-          </a:xfrm>
-          <a:prstGeom prst="ellipse">
-            <a:avLst/>
-          </a:prstGeom>
-          <a:solidFill>
-            <a:srgbClr val="0E1B33"/>
-          </a:solidFill>
-          <a:ln/>
-        </p:spPr>
-      </p:sp>
-      <p:pic>
-        <p:nvPicPr>
-          <p:cNvPr id="31" name="Image 5" descr="preencoded.png">    </p:cNvPr>
-          <p:cNvPicPr>
-            <a:picLocks noChangeAspect="1"/>
-          </p:cNvPicPr>
-          <p:nvPr/>
-        </p:nvPicPr>
-        <p:blipFill>
-          <a:blip r:embed="rId6"/>
-          <a:stretch>
-            <a:fillRect/>
-          </a:stretch>
-        </p:blipFill>
-        <p:spPr>
-          <a:xfrm>
-            <a:off x="8549640" y="4197096"/>
-            <a:ext cx="329184" cy="329184"/>
-          </a:xfrm>
-          <a:prstGeom prst="rect">
-            <a:avLst/>
-          </a:prstGeom>
-        </p:spPr>
-      </p:pic>
-      <p:sp>
-        <p:nvSpPr>
-          <p:cNvPr id="32" name="Text 24"/>
-          <p:cNvSpPr/>
-          <p:nvPr/>
-        </p:nvSpPr>
-        <p:spPr>
-          <a:xfrm>
-            <a:off x="9198864" y="4105656"/>
-            <a:ext cx="2313432" cy="502920"/>
-          </a:xfrm>
-          <a:prstGeom prst="rect">
-            <a:avLst/>
-          </a:prstGeom>
-          <a:noFill/>
-          <a:ln/>
-        </p:spPr>
-        <p:txBody>
-          <a:bodyPr wrap="square" rtlCol="0" anchor="ctr"/>
-          <a:lstStyle/>
-          <a:p>
-            <a:pPr indent="0" marL="0">
-              <a:buNone/>
-            </a:pPr>
-            <a:r>
-              <a:rPr lang="en-US" sz="1700" b="1" dirty="0">
-                <a:solidFill>
-                  <a:srgbClr val="1B2538"/>
-                </a:solidFill>
-                <a:latin typeface="Noto Serif CJK TC" pitchFamily="34" charset="0"/>
-                <a:ea typeface="Noto Serif CJK TC" pitchFamily="34" charset="-122"/>
-                <a:cs typeface="Noto Serif CJK TC" pitchFamily="34" charset="-120"/>
-              </a:rPr>
-              <a:t>ROIC / Capex</a:t>
-            </a:r>
-            <a:endParaRPr lang="en-US" sz="1700" dirty="0"/>
-          </a:p>
-        </p:txBody>
-      </p:sp>
-      <p:sp>
-        <p:nvSpPr>
-          <p:cNvPr id="33" name="Text 25"/>
-          <p:cNvSpPr/>
-          <p:nvPr/>
-        </p:nvSpPr>
-        <p:spPr>
-          <a:xfrm>
-            <a:off x="8421624" y="4818888"/>
-            <a:ext cx="2953512" cy="640080"/>
-          </a:xfrm>
-          <a:prstGeom prst="rect">
-            <a:avLst/>
-          </a:prstGeom>
-          <a:noFill/>
-          <a:ln/>
-        </p:spPr>
-        <p:txBody>
-          <a:bodyPr wrap="square" rtlCol="0" anchor="t"/>
-          <a:lstStyle/>
-          <a:p>
-            <a:pPr indent="0" marL="0">
-              <a:buNone/>
-            </a:pPr>
-            <a:r>
-              <a:rPr lang="en-US" sz="1300" dirty="0">
-                <a:solidFill>
-                  <a:srgbClr val="55617A"/>
-                </a:solidFill>
-                <a:latin typeface="Noto Sans CJK TC" pitchFamily="34" charset="0"/>
-                <a:ea typeface="Noto Sans CJK TC" pitchFamily="34" charset="-122"/>
-                <a:cs typeface="Noto Sans CJK TC" pitchFamily="34" charset="-120"/>
-              </a:rPr>
-              <a:t>稅務 ruling 與 incentive package 後的回報是否達標？</a:t>
+              <a:t>你的 Country × Mode 矩陣與 commitment-intensity 光譜，正好把這三層映成「國家 × 投入強度」的決策格。建議把每格標上目前所處 Stage（0 篩選 / 1 diligence / 2 投資），讓政策與稅務優惠成為升級門檻，而非加分項。</a:t>
             </a:r>
             <a:endParaRPr lang="en-US" sz="1300" dirty="0"/>
           </a:p>
@@ -9168,6 +10443,1879 @@
 <file path=ppt/slides/slide16.xml><?xml version="1.0" encoding="utf-8"?>
 <p:sld xmlns:a="http://schemas.openxmlformats.org/drawingml/2006/main" xmlns:r="http://schemas.openxmlformats.org/officeDocument/2006/relationships" xmlns:p="http://schemas.openxmlformats.org/presentationml/2006/main">
   <p:cSld name="Slide 16">
+    <p:bg>
+      <p:bgPr>
+        <a:solidFill>
+          <a:srgbClr val="F4F6FA"/>
+        </a:solidFill>
+      </p:bgPr>
+    </p:bg>
+    <p:spTree>
+      <p:nvGrpSpPr>
+        <p:cNvPr id="1" name=""/>
+        <p:cNvGrpSpPr/>
+        <p:nvPr/>
+      </p:nvGrpSpPr>
+      <p:grpSpPr>
+        <a:xfrm>
+          <a:off x="0" y="0"/>
+          <a:ext cx="0" cy="0"/>
+          <a:chOff x="0" y="0"/>
+          <a:chExt cx="0" cy="0"/>
+        </a:xfrm>
+      </p:grpSpPr>
+      <p:sp>
+        <p:nvSpPr>
+          <p:cNvPr id="2" name="Text 0"/>
+          <p:cNvSpPr/>
+          <p:nvPr/>
+        </p:nvSpPr>
+        <p:spPr>
+          <a:xfrm>
+            <a:off x="548640" y="411480"/>
+            <a:ext cx="10058400" cy="274320"/>
+          </a:xfrm>
+          <a:prstGeom prst="rect">
+            <a:avLst/>
+          </a:prstGeom>
+          <a:noFill/>
+          <a:ln/>
+        </p:spPr>
+        <p:txBody>
+          <a:bodyPr wrap="square" rtlCol="0" anchor="ctr"/>
+          <a:lstStyle/>
+          <a:p>
+            <a:pPr indent="0" marL="0">
+              <a:buNone/>
+            </a:pPr>
+            <a:r>
+              <a:rPr lang="en-US" sz="1200" b="1" spc="300" kern="0" dirty="0">
+                <a:solidFill>
+                  <a:srgbClr val="37C7C0"/>
+                </a:solidFill>
+                <a:latin typeface="Noto Sans CJK TC" pitchFamily="34" charset="0"/>
+                <a:ea typeface="Noto Sans CJK TC" pitchFamily="34" charset="-122"/>
+                <a:cs typeface="Noto Sans CJK TC" pitchFamily="34" charset="-120"/>
+              </a:rPr>
+              <a:t>OPERATING MODEL</a:t>
+            </a:r>
+            <a:endParaRPr lang="en-US" sz="1200" dirty="0"/>
+          </a:p>
+        </p:txBody>
+      </p:sp>
+      <p:sp>
+        <p:nvSpPr>
+          <p:cNvPr id="3" name="Text 1"/>
+          <p:cNvSpPr/>
+          <p:nvPr/>
+        </p:nvSpPr>
+        <p:spPr>
+          <a:xfrm>
+            <a:off x="548640" y="676656"/>
+            <a:ext cx="11064240" cy="640080"/>
+          </a:xfrm>
+          <a:prstGeom prst="rect">
+            <a:avLst/>
+          </a:prstGeom>
+          <a:noFill/>
+          <a:ln/>
+        </p:spPr>
+        <p:txBody>
+          <a:bodyPr wrap="square" rtlCol="0" anchor="ctr"/>
+          <a:lstStyle/>
+          <a:p>
+            <a:pPr indent="0" marL="0">
+              <a:buNone/>
+            </a:pPr>
+            <a:r>
+              <a:rPr lang="en-US" sz="3000" b="1" dirty="0">
+                <a:solidFill>
+                  <a:srgbClr val="1B2538"/>
+                </a:solidFill>
+                <a:latin typeface="Noto Serif CJK TC" pitchFamily="34" charset="0"/>
+                <a:ea typeface="Noto Serif CJK TC" pitchFamily="34" charset="-122"/>
+                <a:cs typeface="Noto Serif CJK TC" pitchFamily="34" charset="-120"/>
+              </a:rPr>
+              <a:t>把 Dashboard 變成 decision gate</a:t>
+            </a:r>
+            <a:endParaRPr lang="en-US" sz="3000" dirty="0"/>
+          </a:p>
+        </p:txBody>
+      </p:sp>
+      <p:sp>
+        <p:nvSpPr>
+          <p:cNvPr id="4" name="Shape 2"/>
+          <p:cNvSpPr/>
+          <p:nvPr/>
+        </p:nvSpPr>
+        <p:spPr>
+          <a:xfrm>
+            <a:off x="548640" y="1828800"/>
+            <a:ext cx="3429000" cy="2834640"/>
+          </a:xfrm>
+          <a:prstGeom prst="roundRect">
+            <a:avLst>
+              <a:gd name="adj" fmla="val 2581"/>
+            </a:avLst>
+          </a:prstGeom>
+          <a:solidFill>
+            <a:srgbClr val="FFFFFF"/>
+          </a:solidFill>
+          <a:ln/>
+          <a:effectLst>
+            <a:outerShdw sx="100000" sy="100000" kx="0" ky="0" algn="bl" rotWithShape="0" blurRad="88900" dist="38100" dir="5400000">
+              <a:srgbClr val="0E1B33">
+                <a:alpha val="18000"/>
+              </a:srgbClr>
+            </a:outerShdw>
+          </a:effectLst>
+        </p:spPr>
+      </p:sp>
+      <p:sp>
+        <p:nvSpPr>
+          <p:cNvPr id="5" name="Shape 3"/>
+          <p:cNvSpPr/>
+          <p:nvPr/>
+        </p:nvSpPr>
+        <p:spPr>
+          <a:xfrm>
+            <a:off x="868680" y="2148840"/>
+            <a:ext cx="822960" cy="822960"/>
+          </a:xfrm>
+          <a:prstGeom prst="ellipse">
+            <a:avLst/>
+          </a:prstGeom>
+          <a:solidFill>
+            <a:srgbClr val="274472"/>
+          </a:solidFill>
+          <a:ln/>
+        </p:spPr>
+      </p:sp>
+      <p:sp>
+        <p:nvSpPr>
+          <p:cNvPr id="6" name="Text 4"/>
+          <p:cNvSpPr/>
+          <p:nvPr/>
+        </p:nvSpPr>
+        <p:spPr>
+          <a:xfrm>
+            <a:off x="868680" y="2148840"/>
+            <a:ext cx="822960" cy="822960"/>
+          </a:xfrm>
+          <a:prstGeom prst="rect">
+            <a:avLst/>
+          </a:prstGeom>
+          <a:noFill/>
+          <a:ln/>
+        </p:spPr>
+        <p:txBody>
+          <a:bodyPr wrap="square" rtlCol="0" anchor="ctr"/>
+          <a:lstStyle/>
+          <a:p>
+            <a:pPr algn="ctr" indent="0" marL="0">
+              <a:buNone/>
+            </a:pPr>
+            <a:r>
+              <a:rPr lang="en-US" sz="3000" b="1" dirty="0">
+                <a:solidFill>
+                  <a:srgbClr val="FFFFFF"/>
+                </a:solidFill>
+                <a:latin typeface="Noto Serif CJK TC" pitchFamily="34" charset="0"/>
+                <a:ea typeface="Noto Serif CJK TC" pitchFamily="34" charset="-122"/>
+                <a:cs typeface="Noto Serif CJK TC" pitchFamily="34" charset="-120"/>
+              </a:rPr>
+              <a:t>0</a:t>
+            </a:r>
+            <a:endParaRPr lang="en-US" sz="3000" dirty="0"/>
+          </a:p>
+        </p:txBody>
+      </p:sp>
+      <p:sp>
+        <p:nvSpPr>
+          <p:cNvPr id="7" name="Text 5"/>
+          <p:cNvSpPr/>
+          <p:nvPr/>
+        </p:nvSpPr>
+        <p:spPr>
+          <a:xfrm>
+            <a:off x="1874520" y="2240280"/>
+            <a:ext cx="1920240" cy="365760"/>
+          </a:xfrm>
+          <a:prstGeom prst="rect">
+            <a:avLst/>
+          </a:prstGeom>
+          <a:noFill/>
+          <a:ln/>
+        </p:spPr>
+        <p:txBody>
+          <a:bodyPr wrap="square" rtlCol="0" anchor="ctr"/>
+          <a:lstStyle/>
+          <a:p>
+            <a:pPr indent="0" marL="0">
+              <a:buNone/>
+            </a:pPr>
+            <a:r>
+              <a:rPr lang="en-US" sz="1300" b="1" dirty="0">
+                <a:solidFill>
+                  <a:srgbClr val="274472"/>
+                </a:solidFill>
+                <a:latin typeface="Noto Sans CJK TC" pitchFamily="34" charset="0"/>
+                <a:ea typeface="Noto Sans CJK TC" pitchFamily="34" charset="-122"/>
+                <a:cs typeface="Noto Sans CJK TC" pitchFamily="34" charset="-120"/>
+              </a:rPr>
+              <a:t>Stage 0</a:t>
+            </a:r>
+            <a:endParaRPr lang="en-US" sz="1300" dirty="0"/>
+          </a:p>
+        </p:txBody>
+      </p:sp>
+      <p:sp>
+        <p:nvSpPr>
+          <p:cNvPr id="8" name="Text 6"/>
+          <p:cNvSpPr/>
+          <p:nvPr/>
+        </p:nvSpPr>
+        <p:spPr>
+          <a:xfrm>
+            <a:off x="1874520" y="2578608"/>
+            <a:ext cx="1920240" cy="457200"/>
+          </a:xfrm>
+          <a:prstGeom prst="rect">
+            <a:avLst/>
+          </a:prstGeom>
+          <a:noFill/>
+          <a:ln/>
+        </p:spPr>
+        <p:txBody>
+          <a:bodyPr wrap="square" rtlCol="0" anchor="ctr"/>
+          <a:lstStyle/>
+          <a:p>
+            <a:pPr indent="0" marL="0">
+              <a:buNone/>
+            </a:pPr>
+            <a:r>
+              <a:rPr lang="en-US" sz="1700" b="1" dirty="0">
+                <a:solidFill>
+                  <a:srgbClr val="1B2538"/>
+                </a:solidFill>
+                <a:latin typeface="Noto Serif CJK TC" pitchFamily="34" charset="0"/>
+                <a:ea typeface="Noto Serif CJK TC" pitchFamily="34" charset="-122"/>
+                <a:cs typeface="Noto Serif CJK TC" pitchFamily="34" charset="-120"/>
+              </a:rPr>
+              <a:t>公開政策訊號</a:t>
+            </a:r>
+            <a:endParaRPr lang="en-US" sz="1700" dirty="0"/>
+          </a:p>
+        </p:txBody>
+      </p:sp>
+      <p:sp>
+        <p:nvSpPr>
+          <p:cNvPr id="9" name="Text 7"/>
+          <p:cNvSpPr/>
+          <p:nvPr/>
+        </p:nvSpPr>
+        <p:spPr>
+          <a:xfrm>
+            <a:off x="914400" y="3246120"/>
+            <a:ext cx="2697480" cy="1280160"/>
+          </a:xfrm>
+          <a:prstGeom prst="rect">
+            <a:avLst/>
+          </a:prstGeom>
+          <a:noFill/>
+          <a:ln/>
+        </p:spPr>
+        <p:txBody>
+          <a:bodyPr wrap="square" rtlCol="0" anchor="t"/>
+          <a:lstStyle/>
+          <a:p>
+            <a:pPr indent="0" marL="0">
+              <a:lnSpc>
+                <a:spcPct val="110000"/>
+              </a:lnSpc>
+              <a:buNone/>
+            </a:pPr>
+            <a:r>
+              <a:rPr lang="en-US" sz="1300" dirty="0">
+                <a:solidFill>
+                  <a:srgbClr val="55617A"/>
+                </a:solidFill>
+                <a:latin typeface="Noto Sans CJK TC" pitchFamily="34" charset="0"/>
+                <a:ea typeface="Noto Sans CJK TC" pitchFamily="34" charset="-122"/>
+                <a:cs typeface="Noto Sans CJK TC" pitchFamily="34" charset="-120"/>
+              </a:rPr>
+              <a:t>整理補助、稅務優惠與半導體政策 — 即本份篩選報告。</a:t>
+            </a:r>
+            <a:endParaRPr lang="en-US" sz="1300" dirty="0"/>
+          </a:p>
+        </p:txBody>
+      </p:sp>
+      <p:pic>
+        <p:nvPicPr>
+          <p:cNvPr id="10" name="Image 0" descr="preencoded.png">    </p:cNvPr>
+          <p:cNvPicPr>
+            <a:picLocks noChangeAspect="1"/>
+          </p:cNvPicPr>
+          <p:nvPr/>
+        </p:nvPicPr>
+        <p:blipFill>
+          <a:blip r:embed="rId1"/>
+          <a:stretch>
+            <a:fillRect/>
+          </a:stretch>
+        </p:blipFill>
+        <p:spPr>
+          <a:xfrm>
+            <a:off x="4014216" y="3044952"/>
+            <a:ext cx="402336" cy="402336"/>
+          </a:xfrm>
+          <a:prstGeom prst="rect">
+            <a:avLst/>
+          </a:prstGeom>
+        </p:spPr>
+      </p:pic>
+      <p:sp>
+        <p:nvSpPr>
+          <p:cNvPr id="11" name="Shape 8"/>
+          <p:cNvSpPr/>
+          <p:nvPr/>
+        </p:nvSpPr>
+        <p:spPr>
+          <a:xfrm>
+            <a:off x="4453128" y="1828800"/>
+            <a:ext cx="3429000" cy="2834640"/>
+          </a:xfrm>
+          <a:prstGeom prst="roundRect">
+            <a:avLst>
+              <a:gd name="adj" fmla="val 2581"/>
+            </a:avLst>
+          </a:prstGeom>
+          <a:solidFill>
+            <a:srgbClr val="FFFFFF"/>
+          </a:solidFill>
+          <a:ln/>
+          <a:effectLst>
+            <a:outerShdw sx="100000" sy="100000" kx="0" ky="0" algn="bl" rotWithShape="0" blurRad="88900" dist="38100" dir="5400000">
+              <a:srgbClr val="0E1B33">
+                <a:alpha val="18000"/>
+              </a:srgbClr>
+            </a:outerShdw>
+          </a:effectLst>
+        </p:spPr>
+      </p:sp>
+      <p:sp>
+        <p:nvSpPr>
+          <p:cNvPr id="12" name="Shape 9"/>
+          <p:cNvSpPr/>
+          <p:nvPr/>
+        </p:nvSpPr>
+        <p:spPr>
+          <a:xfrm>
+            <a:off x="4773168" y="2148840"/>
+            <a:ext cx="822960" cy="822960"/>
+          </a:xfrm>
+          <a:prstGeom prst="ellipse">
+            <a:avLst/>
+          </a:prstGeom>
+          <a:solidFill>
+            <a:srgbClr val="E0A458"/>
+          </a:solidFill>
+          <a:ln/>
+        </p:spPr>
+      </p:sp>
+      <p:sp>
+        <p:nvSpPr>
+          <p:cNvPr id="13" name="Text 10"/>
+          <p:cNvSpPr/>
+          <p:nvPr/>
+        </p:nvSpPr>
+        <p:spPr>
+          <a:xfrm>
+            <a:off x="4773168" y="2148840"/>
+            <a:ext cx="822960" cy="822960"/>
+          </a:xfrm>
+          <a:prstGeom prst="rect">
+            <a:avLst/>
+          </a:prstGeom>
+          <a:noFill/>
+          <a:ln/>
+        </p:spPr>
+        <p:txBody>
+          <a:bodyPr wrap="square" rtlCol="0" anchor="ctr"/>
+          <a:lstStyle/>
+          <a:p>
+            <a:pPr algn="ctr" indent="0" marL="0">
+              <a:buNone/>
+            </a:pPr>
+            <a:r>
+              <a:rPr lang="en-US" sz="3000" b="1" dirty="0">
+                <a:solidFill>
+                  <a:srgbClr val="FFFFFF"/>
+                </a:solidFill>
+                <a:latin typeface="Noto Serif CJK TC" pitchFamily="34" charset="0"/>
+                <a:ea typeface="Noto Serif CJK TC" pitchFamily="34" charset="-122"/>
+                <a:cs typeface="Noto Serif CJK TC" pitchFamily="34" charset="-120"/>
+              </a:rPr>
+              <a:t>1</a:t>
+            </a:r>
+            <a:endParaRPr lang="en-US" sz="3000" dirty="0"/>
+          </a:p>
+        </p:txBody>
+      </p:sp>
+      <p:sp>
+        <p:nvSpPr>
+          <p:cNvPr id="14" name="Text 11"/>
+          <p:cNvSpPr/>
+          <p:nvPr/>
+        </p:nvSpPr>
+        <p:spPr>
+          <a:xfrm>
+            <a:off x="5779008" y="2240280"/>
+            <a:ext cx="1920240" cy="365760"/>
+          </a:xfrm>
+          <a:prstGeom prst="rect">
+            <a:avLst/>
+          </a:prstGeom>
+          <a:noFill/>
+          <a:ln/>
+        </p:spPr>
+        <p:txBody>
+          <a:bodyPr wrap="square" rtlCol="0" anchor="ctr"/>
+          <a:lstStyle/>
+          <a:p>
+            <a:pPr indent="0" marL="0">
+              <a:buNone/>
+            </a:pPr>
+            <a:r>
+              <a:rPr lang="en-US" sz="1300" b="1" dirty="0">
+                <a:solidFill>
+                  <a:srgbClr val="E0A458"/>
+                </a:solidFill>
+                <a:latin typeface="Noto Sans CJK TC" pitchFamily="34" charset="0"/>
+                <a:ea typeface="Noto Sans CJK TC" pitchFamily="34" charset="-122"/>
+                <a:cs typeface="Noto Sans CJK TC" pitchFamily="34" charset="-120"/>
+              </a:rPr>
+              <a:t>Stage 1</a:t>
+            </a:r>
+            <a:endParaRPr lang="en-US" sz="1300" dirty="0"/>
+          </a:p>
+        </p:txBody>
+      </p:sp>
+      <p:sp>
+        <p:nvSpPr>
+          <p:cNvPr id="15" name="Text 12"/>
+          <p:cNvSpPr/>
+          <p:nvPr/>
+        </p:nvSpPr>
+        <p:spPr>
+          <a:xfrm>
+            <a:off x="5779008" y="2578608"/>
+            <a:ext cx="1920240" cy="457200"/>
+          </a:xfrm>
+          <a:prstGeom prst="rect">
+            <a:avLst/>
+          </a:prstGeom>
+          <a:noFill/>
+          <a:ln/>
+        </p:spPr>
+        <p:txBody>
+          <a:bodyPr wrap="square" rtlCol="0" anchor="ctr"/>
+          <a:lstStyle/>
+          <a:p>
+            <a:pPr indent="0" marL="0">
+              <a:buNone/>
+            </a:pPr>
+            <a:r>
+              <a:rPr lang="en-US" sz="1700" b="1" dirty="0">
+                <a:solidFill>
+                  <a:srgbClr val="1B2538"/>
+                </a:solidFill>
+                <a:latin typeface="Noto Serif CJK TC" pitchFamily="34" charset="0"/>
+                <a:ea typeface="Noto Serif CJK TC" pitchFamily="34" charset="-122"/>
+                <a:cs typeface="Noto Serif CJK TC" pitchFamily="34" charset="-120"/>
+              </a:rPr>
+              <a:t>Diligence gate</a:t>
+            </a:r>
+            <a:endParaRPr lang="en-US" sz="1700" dirty="0"/>
+          </a:p>
+        </p:txBody>
+      </p:sp>
+      <p:sp>
+        <p:nvSpPr>
+          <p:cNvPr id="16" name="Text 13"/>
+          <p:cNvSpPr/>
+          <p:nvPr/>
+        </p:nvSpPr>
+        <p:spPr>
+          <a:xfrm>
+            <a:off x="4818888" y="3246120"/>
+            <a:ext cx="2697480" cy="1280160"/>
+          </a:xfrm>
+          <a:prstGeom prst="rect">
+            <a:avLst/>
+          </a:prstGeom>
+          <a:noFill/>
+          <a:ln/>
+        </p:spPr>
+        <p:txBody>
+          <a:bodyPr wrap="square" rtlCol="0" anchor="t"/>
+          <a:lstStyle/>
+          <a:p>
+            <a:pPr indent="0" marL="0">
+              <a:lnSpc>
+                <a:spcPct val="110000"/>
+              </a:lnSpc>
+              <a:buNone/>
+            </a:pPr>
+            <a:r>
+              <a:rPr lang="en-US" sz="1300" dirty="0">
+                <a:solidFill>
+                  <a:srgbClr val="55617A"/>
+                </a:solidFill>
+                <a:latin typeface="Noto Sans CJK TC" pitchFamily="34" charset="0"/>
+                <a:ea typeface="Noto Sans CJK TC" pitchFamily="34" charset="-122"/>
+                <a:cs typeface="Noto Sans CJK TC" pitchFamily="34" charset="-120"/>
+              </a:rPr>
+              <a:t>政府 incentive package 明確、稅務條件可量化、客戶需求可驗證。</a:t>
+            </a:r>
+            <a:endParaRPr lang="en-US" sz="1300" dirty="0"/>
+          </a:p>
+        </p:txBody>
+      </p:sp>
+      <p:pic>
+        <p:nvPicPr>
+          <p:cNvPr id="17" name="Image 1" descr="preencoded.png">    </p:cNvPr>
+          <p:cNvPicPr>
+            <a:picLocks noChangeAspect="1"/>
+          </p:cNvPicPr>
+          <p:nvPr/>
+        </p:nvPicPr>
+        <p:blipFill>
+          <a:blip r:embed="rId2"/>
+          <a:stretch>
+            <a:fillRect/>
+          </a:stretch>
+        </p:blipFill>
+        <p:spPr>
+          <a:xfrm>
+            <a:off x="7918704" y="3044952"/>
+            <a:ext cx="402336" cy="402336"/>
+          </a:xfrm>
+          <a:prstGeom prst="rect">
+            <a:avLst/>
+          </a:prstGeom>
+        </p:spPr>
+      </p:pic>
+      <p:sp>
+        <p:nvSpPr>
+          <p:cNvPr id="18" name="Shape 14"/>
+          <p:cNvSpPr/>
+          <p:nvPr/>
+        </p:nvSpPr>
+        <p:spPr>
+          <a:xfrm>
+            <a:off x="8357616" y="1828800"/>
+            <a:ext cx="3429000" cy="2834640"/>
+          </a:xfrm>
+          <a:prstGeom prst="roundRect">
+            <a:avLst>
+              <a:gd name="adj" fmla="val 2581"/>
+            </a:avLst>
+          </a:prstGeom>
+          <a:solidFill>
+            <a:srgbClr val="FFFFFF"/>
+          </a:solidFill>
+          <a:ln/>
+          <a:effectLst>
+            <a:outerShdw sx="100000" sy="100000" kx="0" ky="0" algn="bl" rotWithShape="0" blurRad="88900" dist="38100" dir="5400000">
+              <a:srgbClr val="0E1B33">
+                <a:alpha val="18000"/>
+              </a:srgbClr>
+            </a:outerShdw>
+          </a:effectLst>
+        </p:spPr>
+      </p:sp>
+      <p:sp>
+        <p:nvSpPr>
+          <p:cNvPr id="19" name="Shape 15"/>
+          <p:cNvSpPr/>
+          <p:nvPr/>
+        </p:nvSpPr>
+        <p:spPr>
+          <a:xfrm>
+            <a:off x="8677656" y="2148840"/>
+            <a:ext cx="822960" cy="822960"/>
+          </a:xfrm>
+          <a:prstGeom prst="ellipse">
+            <a:avLst/>
+          </a:prstGeom>
+          <a:solidFill>
+            <a:srgbClr val="37C7C0"/>
+          </a:solidFill>
+          <a:ln/>
+        </p:spPr>
+      </p:sp>
+      <p:sp>
+        <p:nvSpPr>
+          <p:cNvPr id="20" name="Text 16"/>
+          <p:cNvSpPr/>
+          <p:nvPr/>
+        </p:nvSpPr>
+        <p:spPr>
+          <a:xfrm>
+            <a:off x="8677656" y="2148840"/>
+            <a:ext cx="822960" cy="822960"/>
+          </a:xfrm>
+          <a:prstGeom prst="rect">
+            <a:avLst/>
+          </a:prstGeom>
+          <a:noFill/>
+          <a:ln/>
+        </p:spPr>
+        <p:txBody>
+          <a:bodyPr wrap="square" rtlCol="0" anchor="ctr"/>
+          <a:lstStyle/>
+          <a:p>
+            <a:pPr algn="ctr" indent="0" marL="0">
+              <a:buNone/>
+            </a:pPr>
+            <a:r>
+              <a:rPr lang="en-US" sz="3000" b="1" dirty="0">
+                <a:solidFill>
+                  <a:srgbClr val="FFFFFF"/>
+                </a:solidFill>
+                <a:latin typeface="Noto Serif CJK TC" pitchFamily="34" charset="0"/>
+                <a:ea typeface="Noto Serif CJK TC" pitchFamily="34" charset="-122"/>
+                <a:cs typeface="Noto Serif CJK TC" pitchFamily="34" charset="-120"/>
+              </a:rPr>
+              <a:t>2</a:t>
+            </a:r>
+            <a:endParaRPr lang="en-US" sz="3000" dirty="0"/>
+          </a:p>
+        </p:txBody>
+      </p:sp>
+      <p:sp>
+        <p:nvSpPr>
+          <p:cNvPr id="21" name="Text 17"/>
+          <p:cNvSpPr/>
+          <p:nvPr/>
+        </p:nvSpPr>
+        <p:spPr>
+          <a:xfrm>
+            <a:off x="9683496" y="2240280"/>
+            <a:ext cx="1920240" cy="365760"/>
+          </a:xfrm>
+          <a:prstGeom prst="rect">
+            <a:avLst/>
+          </a:prstGeom>
+          <a:noFill/>
+          <a:ln/>
+        </p:spPr>
+        <p:txBody>
+          <a:bodyPr wrap="square" rtlCol="0" anchor="ctr"/>
+          <a:lstStyle/>
+          <a:p>
+            <a:pPr indent="0" marL="0">
+              <a:buNone/>
+            </a:pPr>
+            <a:r>
+              <a:rPr lang="en-US" sz="1300" b="1" dirty="0">
+                <a:solidFill>
+                  <a:srgbClr val="37C7C0"/>
+                </a:solidFill>
+                <a:latin typeface="Noto Sans CJK TC" pitchFamily="34" charset="0"/>
+                <a:ea typeface="Noto Sans CJK TC" pitchFamily="34" charset="-122"/>
+                <a:cs typeface="Noto Sans CJK TC" pitchFamily="34" charset="-120"/>
+              </a:rPr>
+              <a:t>Stage 2</a:t>
+            </a:r>
+            <a:endParaRPr lang="en-US" sz="1300" dirty="0"/>
+          </a:p>
+        </p:txBody>
+      </p:sp>
+      <p:sp>
+        <p:nvSpPr>
+          <p:cNvPr id="22" name="Text 18"/>
+          <p:cNvSpPr/>
+          <p:nvPr/>
+        </p:nvSpPr>
+        <p:spPr>
+          <a:xfrm>
+            <a:off x="9683496" y="2578608"/>
+            <a:ext cx="1920240" cy="457200"/>
+          </a:xfrm>
+          <a:prstGeom prst="rect">
+            <a:avLst/>
+          </a:prstGeom>
+          <a:noFill/>
+          <a:ln/>
+        </p:spPr>
+        <p:txBody>
+          <a:bodyPr wrap="square" rtlCol="0" anchor="ctr"/>
+          <a:lstStyle/>
+          <a:p>
+            <a:pPr indent="0" marL="0">
+              <a:buNone/>
+            </a:pPr>
+            <a:r>
+              <a:rPr lang="en-US" sz="1700" b="1" dirty="0">
+                <a:solidFill>
+                  <a:srgbClr val="1B2538"/>
+                </a:solidFill>
+                <a:latin typeface="Noto Serif CJK TC" pitchFamily="34" charset="0"/>
+                <a:ea typeface="Noto Serif CJK TC" pitchFamily="34" charset="-122"/>
+                <a:cs typeface="Noto Serif CJK TC" pitchFamily="34" charset="-120"/>
+              </a:rPr>
+              <a:t>升級為投資案</a:t>
+            </a:r>
+            <a:endParaRPr lang="en-US" sz="1700" dirty="0"/>
+          </a:p>
+        </p:txBody>
+      </p:sp>
+      <p:sp>
+        <p:nvSpPr>
+          <p:cNvPr id="23" name="Text 19"/>
+          <p:cNvSpPr/>
+          <p:nvPr/>
+        </p:nvSpPr>
+        <p:spPr>
+          <a:xfrm>
+            <a:off x="8723376" y="3246120"/>
+            <a:ext cx="2697480" cy="1280160"/>
+          </a:xfrm>
+          <a:prstGeom prst="rect">
+            <a:avLst/>
+          </a:prstGeom>
+          <a:noFill/>
+          <a:ln/>
+        </p:spPr>
+        <p:txBody>
+          <a:bodyPr wrap="square" rtlCol="0" anchor="t"/>
+          <a:lstStyle/>
+          <a:p>
+            <a:pPr indent="0" marL="0">
+              <a:lnSpc>
+                <a:spcPct val="110000"/>
+              </a:lnSpc>
+              <a:buNone/>
+            </a:pPr>
+            <a:r>
+              <a:rPr lang="en-US" sz="1300" dirty="0">
+                <a:solidFill>
+                  <a:srgbClr val="55617A"/>
+                </a:solidFill>
+                <a:latin typeface="Noto Sans CJK TC" pitchFamily="34" charset="0"/>
+                <a:ea typeface="Noto Sans CJK TC" pitchFamily="34" charset="-122"/>
+                <a:cs typeface="Noto Sans CJK TC" pitchFamily="34" charset="-120"/>
+              </a:rPr>
+              <a:t>通過 ROIC、partner economics、capex/opex、power/water/talent 後才升級。</a:t>
+            </a:r>
+            <a:endParaRPr lang="en-US" sz="1300" dirty="0"/>
+          </a:p>
+        </p:txBody>
+      </p:sp>
+      <p:sp>
+        <p:nvSpPr>
+          <p:cNvPr id="24" name="Shape 20"/>
+          <p:cNvSpPr/>
+          <p:nvPr/>
+        </p:nvSpPr>
+        <p:spPr>
+          <a:xfrm>
+            <a:off x="548640" y="4983480"/>
+            <a:ext cx="11064240" cy="1051560"/>
+          </a:xfrm>
+          <a:prstGeom prst="roundRect">
+            <a:avLst>
+              <a:gd name="adj" fmla="val 6087"/>
+            </a:avLst>
+          </a:prstGeom>
+          <a:solidFill>
+            <a:srgbClr val="0E1B33"/>
+          </a:solidFill>
+          <a:ln/>
+        </p:spPr>
+      </p:sp>
+      <p:sp>
+        <p:nvSpPr>
+          <p:cNvPr id="25" name="Text 21"/>
+          <p:cNvSpPr/>
+          <p:nvPr/>
+        </p:nvSpPr>
+        <p:spPr>
+          <a:xfrm>
+            <a:off x="914400" y="4983480"/>
+            <a:ext cx="10332720" cy="1051560"/>
+          </a:xfrm>
+          <a:prstGeom prst="rect">
+            <a:avLst/>
+          </a:prstGeom>
+          <a:noFill/>
+          <a:ln/>
+        </p:spPr>
+        <p:txBody>
+          <a:bodyPr wrap="square" rtlCol="0" anchor="ctr"/>
+          <a:lstStyle/>
+          <a:p>
+            <a:pPr indent="0" marL="0">
+              <a:buNone/>
+            </a:pPr>
+            <a:r>
+              <a:rPr lang="en-US" sz="1500" b="1" dirty="0">
+                <a:solidFill>
+                  <a:srgbClr val="37C7C0"/>
+                </a:solidFill>
+                <a:latin typeface="Noto Sans CJK TC" pitchFamily="34" charset="0"/>
+                <a:ea typeface="Noto Sans CJK TC" pitchFamily="34" charset="-122"/>
+                <a:cs typeface="Noto Sans CJK TC" pitchFamily="34" charset="-120"/>
+              </a:rPr>
+              <a:t>原則：  </a:t>
+            </a:r>
+            <a:pPr indent="0" marL="0">
+              <a:buNone/>
+            </a:pPr>
+            <a:r>
+              <a:rPr lang="en-US" sz="1500" dirty="0">
+                <a:solidFill>
+                  <a:srgbClr val="AFC6E9"/>
+                </a:solidFill>
+                <a:latin typeface="Noto Sans CJK TC" pitchFamily="34" charset="0"/>
+                <a:ea typeface="Noto Sans CJK TC" pitchFamily="34" charset="-122"/>
+                <a:cs typeface="Noto Sans CJK TC" pitchFamily="34" charset="-120"/>
+              </a:rPr>
+              <a:t>只有在補助條件明確、稅務可量化、需求可驗證時，才把 watchlist 升級成投資案。補助只改善 economics，不創造需求。</a:t>
+            </a:r>
+            <a:endParaRPr lang="en-US" sz="1500" dirty="0"/>
+          </a:p>
+        </p:txBody>
+      </p:sp>
+    </p:spTree>
+  </p:cSld>
+  <p:clrMapOvr>
+    <a:masterClrMapping/>
+  </p:clrMapOvr>
+</p:sld>
+</file>
+
+<file path=ppt/slides/slide17.xml><?xml version="1.0" encoding="utf-8"?>
+<p:sld xmlns:a="http://schemas.openxmlformats.org/drawingml/2006/main" xmlns:r="http://schemas.openxmlformats.org/officeDocument/2006/relationships" xmlns:p="http://schemas.openxmlformats.org/presentationml/2006/main">
+  <p:cSld name="Slide 17">
+    <p:bg>
+      <p:bgPr>
+        <a:solidFill>
+          <a:srgbClr val="F4F6FA"/>
+        </a:solidFill>
+      </p:bgPr>
+    </p:bg>
+    <p:spTree>
+      <p:nvGrpSpPr>
+        <p:cNvPr id="1" name=""/>
+        <p:cNvGrpSpPr/>
+        <p:nvPr/>
+      </p:nvGrpSpPr>
+      <p:grpSpPr>
+        <a:xfrm>
+          <a:off x="0" y="0"/>
+          <a:ext cx="0" cy="0"/>
+          <a:chOff x="0" y="0"/>
+          <a:chExt cx="0" cy="0"/>
+        </a:xfrm>
+      </p:grpSpPr>
+      <p:sp>
+        <p:nvSpPr>
+          <p:cNvPr id="2" name="Text 0"/>
+          <p:cNvSpPr/>
+          <p:nvPr/>
+        </p:nvSpPr>
+        <p:spPr>
+          <a:xfrm>
+            <a:off x="548640" y="411480"/>
+            <a:ext cx="10058400" cy="274320"/>
+          </a:xfrm>
+          <a:prstGeom prst="rect">
+            <a:avLst/>
+          </a:prstGeom>
+          <a:noFill/>
+          <a:ln/>
+        </p:spPr>
+        <p:txBody>
+          <a:bodyPr wrap="square" rtlCol="0" anchor="ctr"/>
+          <a:lstStyle/>
+          <a:p>
+            <a:pPr indent="0" marL="0">
+              <a:buNone/>
+            </a:pPr>
+            <a:r>
+              <a:rPr lang="en-US" sz="1200" b="1" spc="300" kern="0" dirty="0">
+                <a:solidFill>
+                  <a:srgbClr val="37C7C0"/>
+                </a:solidFill>
+                <a:latin typeface="Noto Sans CJK TC" pitchFamily="34" charset="0"/>
+                <a:ea typeface="Noto Sans CJK TC" pitchFamily="34" charset="-122"/>
+                <a:cs typeface="Noto Sans CJK TC" pitchFamily="34" charset="-120"/>
+              </a:rPr>
+              <a:t>DILIGENCE CHECKLIST</a:t>
+            </a:r>
+            <a:endParaRPr lang="en-US" sz="1200" dirty="0"/>
+          </a:p>
+        </p:txBody>
+      </p:sp>
+      <p:sp>
+        <p:nvSpPr>
+          <p:cNvPr id="3" name="Text 1"/>
+          <p:cNvSpPr/>
+          <p:nvPr/>
+        </p:nvSpPr>
+        <p:spPr>
+          <a:xfrm>
+            <a:off x="548640" y="676656"/>
+            <a:ext cx="11064240" cy="640080"/>
+          </a:xfrm>
+          <a:prstGeom prst="rect">
+            <a:avLst/>
+          </a:prstGeom>
+          <a:noFill/>
+          <a:ln/>
+        </p:spPr>
+        <p:txBody>
+          <a:bodyPr wrap="square" rtlCol="0" anchor="ctr"/>
+          <a:lstStyle/>
+          <a:p>
+            <a:pPr indent="0" marL="0">
+              <a:buNone/>
+            </a:pPr>
+            <a:r>
+              <a:rPr lang="en-US" sz="3000" b="1" dirty="0">
+                <a:solidFill>
+                  <a:srgbClr val="1B2538"/>
+                </a:solidFill>
+                <a:latin typeface="Noto Serif CJK TC" pitchFamily="34" charset="0"/>
+                <a:ea typeface="Noto Serif CJK TC" pitchFamily="34" charset="-122"/>
+                <a:cs typeface="Noto Serif CJK TC" pitchFamily="34" charset="-120"/>
+              </a:rPr>
+              <a:t>升級為投資案前仍須驗證的條件</a:t>
+            </a:r>
+            <a:endParaRPr lang="en-US" sz="3000" dirty="0"/>
+          </a:p>
+        </p:txBody>
+      </p:sp>
+      <p:sp>
+        <p:nvSpPr>
+          <p:cNvPr id="4" name="Shape 2"/>
+          <p:cNvSpPr/>
+          <p:nvPr/>
+        </p:nvSpPr>
+        <p:spPr>
+          <a:xfrm>
+            <a:off x="548640" y="1645920"/>
+            <a:ext cx="3593592" cy="1874520"/>
+          </a:xfrm>
+          <a:prstGeom prst="roundRect">
+            <a:avLst>
+              <a:gd name="adj" fmla="val 3415"/>
+            </a:avLst>
+          </a:prstGeom>
+          <a:solidFill>
+            <a:srgbClr val="FFFFFF"/>
+          </a:solidFill>
+          <a:ln/>
+          <a:effectLst>
+            <a:outerShdw sx="100000" sy="100000" kx="0" ky="0" algn="bl" rotWithShape="0" blurRad="88900" dist="38100" dir="5400000">
+              <a:srgbClr val="0E1B33">
+                <a:alpha val="18000"/>
+              </a:srgbClr>
+            </a:outerShdw>
+          </a:effectLst>
+        </p:spPr>
+      </p:sp>
+      <p:sp>
+        <p:nvSpPr>
+          <p:cNvPr id="5" name="Shape 3"/>
+          <p:cNvSpPr/>
+          <p:nvPr/>
+        </p:nvSpPr>
+        <p:spPr>
+          <a:xfrm>
+            <a:off x="841248" y="1965960"/>
+            <a:ext cx="640080" cy="640080"/>
+          </a:xfrm>
+          <a:prstGeom prst="ellipse">
+            <a:avLst/>
+          </a:prstGeom>
+          <a:solidFill>
+            <a:srgbClr val="0E1B33"/>
+          </a:solidFill>
+          <a:ln/>
+        </p:spPr>
+      </p:sp>
+      <p:pic>
+        <p:nvPicPr>
+          <p:cNvPr id="6" name="Image 0" descr="preencoded.png">    </p:cNvPr>
+          <p:cNvPicPr>
+            <a:picLocks noChangeAspect="1"/>
+          </p:cNvPicPr>
+          <p:nvPr/>
+        </p:nvPicPr>
+        <p:blipFill>
+          <a:blip r:embed="rId1"/>
+          <a:stretch>
+            <a:fillRect/>
+          </a:stretch>
+        </p:blipFill>
+        <p:spPr>
+          <a:xfrm>
+            <a:off x="996696" y="2121408"/>
+            <a:ext cx="329184" cy="329184"/>
+          </a:xfrm>
+          <a:prstGeom prst="rect">
+            <a:avLst/>
+          </a:prstGeom>
+        </p:spPr>
+      </p:pic>
+      <p:sp>
+        <p:nvSpPr>
+          <p:cNvPr id="7" name="Text 4"/>
+          <p:cNvSpPr/>
+          <p:nvPr/>
+        </p:nvSpPr>
+        <p:spPr>
+          <a:xfrm>
+            <a:off x="1645920" y="2029968"/>
+            <a:ext cx="2313432" cy="502920"/>
+          </a:xfrm>
+          <a:prstGeom prst="rect">
+            <a:avLst/>
+          </a:prstGeom>
+          <a:noFill/>
+          <a:ln/>
+        </p:spPr>
+        <p:txBody>
+          <a:bodyPr wrap="square" rtlCol="0" anchor="ctr"/>
+          <a:lstStyle/>
+          <a:p>
+            <a:pPr indent="0" marL="0">
+              <a:buNone/>
+            </a:pPr>
+            <a:r>
+              <a:rPr lang="en-US" sz="1700" b="1" dirty="0">
+                <a:solidFill>
+                  <a:srgbClr val="1B2538"/>
+                </a:solidFill>
+                <a:latin typeface="Noto Serif CJK TC" pitchFamily="34" charset="0"/>
+                <a:ea typeface="Noto Serif CJK TC" pitchFamily="34" charset="-122"/>
+                <a:cs typeface="Noto Serif CJK TC" pitchFamily="34" charset="-120"/>
+              </a:rPr>
+              <a:t>客戶需求</a:t>
+            </a:r>
+            <a:endParaRPr lang="en-US" sz="1700" dirty="0"/>
+          </a:p>
+        </p:txBody>
+      </p:sp>
+      <p:sp>
+        <p:nvSpPr>
+          <p:cNvPr id="8" name="Text 5"/>
+          <p:cNvSpPr/>
+          <p:nvPr/>
+        </p:nvSpPr>
+        <p:spPr>
+          <a:xfrm>
+            <a:off x="868680" y="2743200"/>
+            <a:ext cx="2953512" cy="640080"/>
+          </a:xfrm>
+          <a:prstGeom prst="rect">
+            <a:avLst/>
+          </a:prstGeom>
+          <a:noFill/>
+          <a:ln/>
+        </p:spPr>
+        <p:txBody>
+          <a:bodyPr wrap="square" rtlCol="0" anchor="t"/>
+          <a:lstStyle/>
+          <a:p>
+            <a:pPr indent="0" marL="0">
+              <a:buNone/>
+            </a:pPr>
+            <a:r>
+              <a:rPr lang="en-US" sz="1300" dirty="0">
+                <a:solidFill>
+                  <a:srgbClr val="55617A"/>
+                </a:solidFill>
+                <a:latin typeface="Noto Sans CJK TC" pitchFamily="34" charset="0"/>
+                <a:ea typeface="Noto Sans CJK TC" pitchFamily="34" charset="-122"/>
+                <a:cs typeface="Noto Sans CJK TC" pitchFamily="34" charset="-120"/>
+              </a:rPr>
+              <a:t>Fab 12i 客戶是否真的需要該國 support？</a:t>
+            </a:r>
+            <a:endParaRPr lang="en-US" sz="1300" dirty="0"/>
+          </a:p>
+        </p:txBody>
+      </p:sp>
+      <p:sp>
+        <p:nvSpPr>
+          <p:cNvPr id="9" name="Shape 6"/>
+          <p:cNvSpPr/>
+          <p:nvPr/>
+        </p:nvSpPr>
+        <p:spPr>
+          <a:xfrm>
+            <a:off x="4325112" y="1645920"/>
+            <a:ext cx="3593592" cy="1874520"/>
+          </a:xfrm>
+          <a:prstGeom prst="roundRect">
+            <a:avLst>
+              <a:gd name="adj" fmla="val 3415"/>
+            </a:avLst>
+          </a:prstGeom>
+          <a:solidFill>
+            <a:srgbClr val="FFFFFF"/>
+          </a:solidFill>
+          <a:ln/>
+          <a:effectLst>
+            <a:outerShdw sx="100000" sy="100000" kx="0" ky="0" algn="bl" rotWithShape="0" blurRad="88900" dist="38100" dir="5400000">
+              <a:srgbClr val="0E1B33">
+                <a:alpha val="18000"/>
+              </a:srgbClr>
+            </a:outerShdw>
+          </a:effectLst>
+        </p:spPr>
+      </p:sp>
+      <p:sp>
+        <p:nvSpPr>
+          <p:cNvPr id="10" name="Shape 7"/>
+          <p:cNvSpPr/>
+          <p:nvPr/>
+        </p:nvSpPr>
+        <p:spPr>
+          <a:xfrm>
+            <a:off x="4617720" y="1965960"/>
+            <a:ext cx="640080" cy="640080"/>
+          </a:xfrm>
+          <a:prstGeom prst="ellipse">
+            <a:avLst/>
+          </a:prstGeom>
+          <a:solidFill>
+            <a:srgbClr val="0E1B33"/>
+          </a:solidFill>
+          <a:ln/>
+        </p:spPr>
+      </p:sp>
+      <p:pic>
+        <p:nvPicPr>
+          <p:cNvPr id="11" name="Image 1" descr="preencoded.png">    </p:cNvPr>
+          <p:cNvPicPr>
+            <a:picLocks noChangeAspect="1"/>
+          </p:cNvPicPr>
+          <p:nvPr/>
+        </p:nvPicPr>
+        <p:blipFill>
+          <a:blip r:embed="rId2"/>
+          <a:stretch>
+            <a:fillRect/>
+          </a:stretch>
+        </p:blipFill>
+        <p:spPr>
+          <a:xfrm>
+            <a:off x="4773168" y="2121408"/>
+            <a:ext cx="329184" cy="329184"/>
+          </a:xfrm>
+          <a:prstGeom prst="rect">
+            <a:avLst/>
+          </a:prstGeom>
+        </p:spPr>
+      </p:pic>
+      <p:sp>
+        <p:nvSpPr>
+          <p:cNvPr id="12" name="Text 8"/>
+          <p:cNvSpPr/>
+          <p:nvPr/>
+        </p:nvSpPr>
+        <p:spPr>
+          <a:xfrm>
+            <a:off x="5422392" y="2029968"/>
+            <a:ext cx="2313432" cy="502920"/>
+          </a:xfrm>
+          <a:prstGeom prst="rect">
+            <a:avLst/>
+          </a:prstGeom>
+          <a:noFill/>
+          <a:ln/>
+        </p:spPr>
+        <p:txBody>
+          <a:bodyPr wrap="square" rtlCol="0" anchor="ctr"/>
+          <a:lstStyle/>
+          <a:p>
+            <a:pPr indent="0" marL="0">
+              <a:buNone/>
+            </a:pPr>
+            <a:r>
+              <a:rPr lang="en-US" sz="1700" b="1" dirty="0">
+                <a:solidFill>
+                  <a:srgbClr val="1B2538"/>
+                </a:solidFill>
+                <a:latin typeface="Noto Serif CJK TC" pitchFamily="34" charset="0"/>
+                <a:ea typeface="Noto Serif CJK TC" pitchFamily="34" charset="-122"/>
+                <a:cs typeface="Noto Serif CJK TC" pitchFamily="34" charset="-120"/>
+              </a:rPr>
+              <a:t>Partner economics</a:t>
+            </a:r>
+            <a:endParaRPr lang="en-US" sz="1700" dirty="0"/>
+          </a:p>
+        </p:txBody>
+      </p:sp>
+      <p:sp>
+        <p:nvSpPr>
+          <p:cNvPr id="13" name="Text 9"/>
+          <p:cNvSpPr/>
+          <p:nvPr/>
+        </p:nvSpPr>
+        <p:spPr>
+          <a:xfrm>
+            <a:off x="4645152" y="2743200"/>
+            <a:ext cx="2953512" cy="640080"/>
+          </a:xfrm>
+          <a:prstGeom prst="rect">
+            <a:avLst/>
+          </a:prstGeom>
+          <a:noFill/>
+          <a:ln/>
+        </p:spPr>
+        <p:txBody>
+          <a:bodyPr wrap="square" rtlCol="0" anchor="t"/>
+          <a:lstStyle/>
+          <a:p>
+            <a:pPr indent="0" marL="0">
+              <a:buNone/>
+            </a:pPr>
+            <a:r>
+              <a:rPr lang="en-US" sz="1300" dirty="0">
+                <a:solidFill>
+                  <a:srgbClr val="55617A"/>
+                </a:solidFill>
+                <a:latin typeface="Noto Sans CJK TC" pitchFamily="34" charset="0"/>
+                <a:ea typeface="Noto Sans CJK TC" pitchFamily="34" charset="-122"/>
+                <a:cs typeface="Noto Sans CJK TC" pitchFamily="34" charset="-120"/>
+              </a:rPr>
+              <a:t>合作方條件與 customer overlap 是否成立？</a:t>
+            </a:r>
+            <a:endParaRPr lang="en-US" sz="1300" dirty="0"/>
+          </a:p>
+        </p:txBody>
+      </p:sp>
+      <p:sp>
+        <p:nvSpPr>
+          <p:cNvPr id="14" name="Shape 10"/>
+          <p:cNvSpPr/>
+          <p:nvPr/>
+        </p:nvSpPr>
+        <p:spPr>
+          <a:xfrm>
+            <a:off x="8101584" y="1645920"/>
+            <a:ext cx="3593592" cy="1874520"/>
+          </a:xfrm>
+          <a:prstGeom prst="roundRect">
+            <a:avLst>
+              <a:gd name="adj" fmla="val 3415"/>
+            </a:avLst>
+          </a:prstGeom>
+          <a:solidFill>
+            <a:srgbClr val="FFFFFF"/>
+          </a:solidFill>
+          <a:ln/>
+          <a:effectLst>
+            <a:outerShdw sx="100000" sy="100000" kx="0" ky="0" algn="bl" rotWithShape="0" blurRad="88900" dist="38100" dir="5400000">
+              <a:srgbClr val="0E1B33">
+                <a:alpha val="18000"/>
+              </a:srgbClr>
+            </a:outerShdw>
+          </a:effectLst>
+        </p:spPr>
+      </p:sp>
+      <p:sp>
+        <p:nvSpPr>
+          <p:cNvPr id="15" name="Shape 11"/>
+          <p:cNvSpPr/>
+          <p:nvPr/>
+        </p:nvSpPr>
+        <p:spPr>
+          <a:xfrm>
+            <a:off x="8394192" y="1965960"/>
+            <a:ext cx="640080" cy="640080"/>
+          </a:xfrm>
+          <a:prstGeom prst="ellipse">
+            <a:avLst/>
+          </a:prstGeom>
+          <a:solidFill>
+            <a:srgbClr val="0E1B33"/>
+          </a:solidFill>
+          <a:ln/>
+        </p:spPr>
+      </p:sp>
+      <p:pic>
+        <p:nvPicPr>
+          <p:cNvPr id="16" name="Image 2" descr="preencoded.png">    </p:cNvPr>
+          <p:cNvPicPr>
+            <a:picLocks noChangeAspect="1"/>
+          </p:cNvPicPr>
+          <p:nvPr/>
+        </p:nvPicPr>
+        <p:blipFill>
+          <a:blip r:embed="rId3"/>
+          <a:stretch>
+            <a:fillRect/>
+          </a:stretch>
+        </p:blipFill>
+        <p:spPr>
+          <a:xfrm>
+            <a:off x="8549640" y="2121408"/>
+            <a:ext cx="329184" cy="329184"/>
+          </a:xfrm>
+          <a:prstGeom prst="rect">
+            <a:avLst/>
+          </a:prstGeom>
+        </p:spPr>
+      </p:pic>
+      <p:sp>
+        <p:nvSpPr>
+          <p:cNvPr id="17" name="Text 12"/>
+          <p:cNvSpPr/>
+          <p:nvPr/>
+        </p:nvSpPr>
+        <p:spPr>
+          <a:xfrm>
+            <a:off x="9198864" y="2029968"/>
+            <a:ext cx="2313432" cy="502920"/>
+          </a:xfrm>
+          <a:prstGeom prst="rect">
+            <a:avLst/>
+          </a:prstGeom>
+          <a:noFill/>
+          <a:ln/>
+        </p:spPr>
+        <p:txBody>
+          <a:bodyPr wrap="square" rtlCol="0" anchor="ctr"/>
+          <a:lstStyle/>
+          <a:p>
+            <a:pPr indent="0" marL="0">
+              <a:buNone/>
+            </a:pPr>
+            <a:r>
+              <a:rPr lang="en-US" sz="1700" b="1" dirty="0">
+                <a:solidFill>
+                  <a:srgbClr val="1B2538"/>
+                </a:solidFill>
+                <a:latin typeface="Noto Serif CJK TC" pitchFamily="34" charset="0"/>
+                <a:ea typeface="Noto Serif CJK TC" pitchFamily="34" charset="-122"/>
+                <a:cs typeface="Noto Serif CJK TC" pitchFamily="34" charset="-120"/>
+              </a:rPr>
+              <a:t>Power / 基礎建設</a:t>
+            </a:r>
+            <a:endParaRPr lang="en-US" sz="1700" dirty="0"/>
+          </a:p>
+        </p:txBody>
+      </p:sp>
+      <p:sp>
+        <p:nvSpPr>
+          <p:cNvPr id="18" name="Text 13"/>
+          <p:cNvSpPr/>
+          <p:nvPr/>
+        </p:nvSpPr>
+        <p:spPr>
+          <a:xfrm>
+            <a:off x="8421624" y="2743200"/>
+            <a:ext cx="2953512" cy="640080"/>
+          </a:xfrm>
+          <a:prstGeom prst="rect">
+            <a:avLst/>
+          </a:prstGeom>
+          <a:noFill/>
+          <a:ln/>
+        </p:spPr>
+        <p:txBody>
+          <a:bodyPr wrap="square" rtlCol="0" anchor="t"/>
+          <a:lstStyle/>
+          <a:p>
+            <a:pPr indent="0" marL="0">
+              <a:buNone/>
+            </a:pPr>
+            <a:r>
+              <a:rPr lang="en-US" sz="1300" dirty="0">
+                <a:solidFill>
+                  <a:srgbClr val="55617A"/>
+                </a:solidFill>
+                <a:latin typeface="Noto Sans CJK TC" pitchFamily="34" charset="0"/>
+                <a:ea typeface="Noto Sans CJK TC" pitchFamily="34" charset="-122"/>
+                <a:cs typeface="Noto Sans CJK TC" pitchFamily="34" charset="-120"/>
+              </a:rPr>
+              <a:t>電力供應與穩定度能否支撐製造負載？</a:t>
+            </a:r>
+            <a:endParaRPr lang="en-US" sz="1300" dirty="0"/>
+          </a:p>
+        </p:txBody>
+      </p:sp>
+      <p:sp>
+        <p:nvSpPr>
+          <p:cNvPr id="19" name="Shape 14"/>
+          <p:cNvSpPr/>
+          <p:nvPr/>
+        </p:nvSpPr>
+        <p:spPr>
+          <a:xfrm>
+            <a:off x="548640" y="3721608"/>
+            <a:ext cx="3593592" cy="1874520"/>
+          </a:xfrm>
+          <a:prstGeom prst="roundRect">
+            <a:avLst>
+              <a:gd name="adj" fmla="val 3415"/>
+            </a:avLst>
+          </a:prstGeom>
+          <a:solidFill>
+            <a:srgbClr val="FFFFFF"/>
+          </a:solidFill>
+          <a:ln/>
+          <a:effectLst>
+            <a:outerShdw sx="100000" sy="100000" kx="0" ky="0" algn="bl" rotWithShape="0" blurRad="88900" dist="38100" dir="5400000">
+              <a:srgbClr val="0E1B33">
+                <a:alpha val="18000"/>
+              </a:srgbClr>
+            </a:outerShdw>
+          </a:effectLst>
+        </p:spPr>
+      </p:sp>
+      <p:sp>
+        <p:nvSpPr>
+          <p:cNvPr id="20" name="Shape 15"/>
+          <p:cNvSpPr/>
+          <p:nvPr/>
+        </p:nvSpPr>
+        <p:spPr>
+          <a:xfrm>
+            <a:off x="841248" y="4041648"/>
+            <a:ext cx="640080" cy="640080"/>
+          </a:xfrm>
+          <a:prstGeom prst="ellipse">
+            <a:avLst/>
+          </a:prstGeom>
+          <a:solidFill>
+            <a:srgbClr val="0E1B33"/>
+          </a:solidFill>
+          <a:ln/>
+        </p:spPr>
+      </p:sp>
+      <p:pic>
+        <p:nvPicPr>
+          <p:cNvPr id="21" name="Image 3" descr="preencoded.png">    </p:cNvPr>
+          <p:cNvPicPr>
+            <a:picLocks noChangeAspect="1"/>
+          </p:cNvPicPr>
+          <p:nvPr/>
+        </p:nvPicPr>
+        <p:blipFill>
+          <a:blip r:embed="rId4"/>
+          <a:stretch>
+            <a:fillRect/>
+          </a:stretch>
+        </p:blipFill>
+        <p:spPr>
+          <a:xfrm>
+            <a:off x="996696" y="4197096"/>
+            <a:ext cx="329184" cy="329184"/>
+          </a:xfrm>
+          <a:prstGeom prst="rect">
+            <a:avLst/>
+          </a:prstGeom>
+        </p:spPr>
+      </p:pic>
+      <p:sp>
+        <p:nvSpPr>
+          <p:cNvPr id="22" name="Text 16"/>
+          <p:cNvSpPr/>
+          <p:nvPr/>
+        </p:nvSpPr>
+        <p:spPr>
+          <a:xfrm>
+            <a:off x="1645920" y="4105656"/>
+            <a:ext cx="2313432" cy="502920"/>
+          </a:xfrm>
+          <a:prstGeom prst="rect">
+            <a:avLst/>
+          </a:prstGeom>
+          <a:noFill/>
+          <a:ln/>
+        </p:spPr>
+        <p:txBody>
+          <a:bodyPr wrap="square" rtlCol="0" anchor="ctr"/>
+          <a:lstStyle/>
+          <a:p>
+            <a:pPr indent="0" marL="0">
+              <a:buNone/>
+            </a:pPr>
+            <a:r>
+              <a:rPr lang="en-US" sz="1700" b="1" dirty="0">
+                <a:solidFill>
+                  <a:srgbClr val="1B2538"/>
+                </a:solidFill>
+                <a:latin typeface="Noto Serif CJK TC" pitchFamily="34" charset="0"/>
+                <a:ea typeface="Noto Serif CJK TC" pitchFamily="34" charset="-122"/>
+                <a:cs typeface="Noto Serif CJK TC" pitchFamily="34" charset="-120"/>
+              </a:rPr>
+              <a:t>Water / 環境</a:t>
+            </a:r>
+            <a:endParaRPr lang="en-US" sz="1700" dirty="0"/>
+          </a:p>
+        </p:txBody>
+      </p:sp>
+      <p:sp>
+        <p:nvSpPr>
+          <p:cNvPr id="23" name="Text 17"/>
+          <p:cNvSpPr/>
+          <p:nvPr/>
+        </p:nvSpPr>
+        <p:spPr>
+          <a:xfrm>
+            <a:off x="868680" y="4818888"/>
+            <a:ext cx="2953512" cy="640080"/>
+          </a:xfrm>
+          <a:prstGeom prst="rect">
+            <a:avLst/>
+          </a:prstGeom>
+          <a:noFill/>
+          <a:ln/>
+        </p:spPr>
+        <p:txBody>
+          <a:bodyPr wrap="square" rtlCol="0" anchor="t"/>
+          <a:lstStyle/>
+          <a:p>
+            <a:pPr indent="0" marL="0">
+              <a:buNone/>
+            </a:pPr>
+            <a:r>
+              <a:rPr lang="en-US" sz="1300" dirty="0">
+                <a:solidFill>
+                  <a:srgbClr val="55617A"/>
+                </a:solidFill>
+                <a:latin typeface="Noto Sans CJK TC" pitchFamily="34" charset="0"/>
+                <a:ea typeface="Noto Sans CJK TC" pitchFamily="34" charset="-122"/>
+                <a:cs typeface="Noto Sans CJK TC" pitchFamily="34" charset="-120"/>
+              </a:rPr>
+              <a:t>水資源、環境與營運條件是否充足？</a:t>
+            </a:r>
+            <a:endParaRPr lang="en-US" sz="1300" dirty="0"/>
+          </a:p>
+        </p:txBody>
+      </p:sp>
+      <p:sp>
+        <p:nvSpPr>
+          <p:cNvPr id="24" name="Shape 18"/>
+          <p:cNvSpPr/>
+          <p:nvPr/>
+        </p:nvSpPr>
+        <p:spPr>
+          <a:xfrm>
+            <a:off x="4325112" y="3721608"/>
+            <a:ext cx="3593592" cy="1874520"/>
+          </a:xfrm>
+          <a:prstGeom prst="roundRect">
+            <a:avLst>
+              <a:gd name="adj" fmla="val 3415"/>
+            </a:avLst>
+          </a:prstGeom>
+          <a:solidFill>
+            <a:srgbClr val="FFFFFF"/>
+          </a:solidFill>
+          <a:ln/>
+          <a:effectLst>
+            <a:outerShdw sx="100000" sy="100000" kx="0" ky="0" algn="bl" rotWithShape="0" blurRad="88900" dist="38100" dir="5400000">
+              <a:srgbClr val="0E1B33">
+                <a:alpha val="18000"/>
+              </a:srgbClr>
+            </a:outerShdw>
+          </a:effectLst>
+        </p:spPr>
+      </p:sp>
+      <p:sp>
+        <p:nvSpPr>
+          <p:cNvPr id="25" name="Shape 19"/>
+          <p:cNvSpPr/>
+          <p:nvPr/>
+        </p:nvSpPr>
+        <p:spPr>
+          <a:xfrm>
+            <a:off x="4617720" y="4041648"/>
+            <a:ext cx="640080" cy="640080"/>
+          </a:xfrm>
+          <a:prstGeom prst="ellipse">
+            <a:avLst/>
+          </a:prstGeom>
+          <a:solidFill>
+            <a:srgbClr val="0E1B33"/>
+          </a:solidFill>
+          <a:ln/>
+        </p:spPr>
+      </p:sp>
+      <p:pic>
+        <p:nvPicPr>
+          <p:cNvPr id="26" name="Image 4" descr="preencoded.png">    </p:cNvPr>
+          <p:cNvPicPr>
+            <a:picLocks noChangeAspect="1"/>
+          </p:cNvPicPr>
+          <p:nvPr/>
+        </p:nvPicPr>
+        <p:blipFill>
+          <a:blip r:embed="rId5"/>
+          <a:stretch>
+            <a:fillRect/>
+          </a:stretch>
+        </p:blipFill>
+        <p:spPr>
+          <a:xfrm>
+            <a:off x="4773168" y="4197096"/>
+            <a:ext cx="329184" cy="329184"/>
+          </a:xfrm>
+          <a:prstGeom prst="rect">
+            <a:avLst/>
+          </a:prstGeom>
+        </p:spPr>
+      </p:pic>
+      <p:sp>
+        <p:nvSpPr>
+          <p:cNvPr id="27" name="Text 20"/>
+          <p:cNvSpPr/>
+          <p:nvPr/>
+        </p:nvSpPr>
+        <p:spPr>
+          <a:xfrm>
+            <a:off x="5422392" y="4105656"/>
+            <a:ext cx="2313432" cy="502920"/>
+          </a:xfrm>
+          <a:prstGeom prst="rect">
+            <a:avLst/>
+          </a:prstGeom>
+          <a:noFill/>
+          <a:ln/>
+        </p:spPr>
+        <p:txBody>
+          <a:bodyPr wrap="square" rtlCol="0" anchor="ctr"/>
+          <a:lstStyle/>
+          <a:p>
+            <a:pPr indent="0" marL="0">
+              <a:buNone/>
+            </a:pPr>
+            <a:r>
+              <a:rPr lang="en-US" sz="1700" b="1" dirty="0">
+                <a:solidFill>
+                  <a:srgbClr val="1B2538"/>
+                </a:solidFill>
+                <a:latin typeface="Noto Serif CJK TC" pitchFamily="34" charset="0"/>
+                <a:ea typeface="Noto Serif CJK TC" pitchFamily="34" charset="-122"/>
+                <a:cs typeface="Noto Serif CJK TC" pitchFamily="34" charset="-120"/>
+              </a:rPr>
+              <a:t>Talent</a:t>
+            </a:r>
+            <a:endParaRPr lang="en-US" sz="1700" dirty="0"/>
+          </a:p>
+        </p:txBody>
+      </p:sp>
+      <p:sp>
+        <p:nvSpPr>
+          <p:cNvPr id="28" name="Text 21"/>
+          <p:cNvSpPr/>
+          <p:nvPr/>
+        </p:nvSpPr>
+        <p:spPr>
+          <a:xfrm>
+            <a:off x="4645152" y="4818888"/>
+            <a:ext cx="2953512" cy="640080"/>
+          </a:xfrm>
+          <a:prstGeom prst="rect">
+            <a:avLst/>
+          </a:prstGeom>
+          <a:noFill/>
+          <a:ln/>
+        </p:spPr>
+        <p:txBody>
+          <a:bodyPr wrap="square" rtlCol="0" anchor="t"/>
+          <a:lstStyle/>
+          <a:p>
+            <a:pPr indent="0" marL="0">
+              <a:buNone/>
+            </a:pPr>
+            <a:r>
+              <a:rPr lang="en-US" sz="1300" dirty="0">
+                <a:solidFill>
+                  <a:srgbClr val="55617A"/>
+                </a:solidFill>
+                <a:latin typeface="Noto Sans CJK TC" pitchFamily="34" charset="0"/>
+                <a:ea typeface="Noto Sans CJK TC" pitchFamily="34" charset="-122"/>
+                <a:cs typeface="Noto Sans CJK TC" pitchFamily="34" charset="-120"/>
+              </a:rPr>
+              <a:t>當地是否能支援 B2B foundry customer engineering？</a:t>
+            </a:r>
+            <a:endParaRPr lang="en-US" sz="1300" dirty="0"/>
+          </a:p>
+        </p:txBody>
+      </p:sp>
+      <p:sp>
+        <p:nvSpPr>
+          <p:cNvPr id="29" name="Shape 22"/>
+          <p:cNvSpPr/>
+          <p:nvPr/>
+        </p:nvSpPr>
+        <p:spPr>
+          <a:xfrm>
+            <a:off x="8101584" y="3721608"/>
+            <a:ext cx="3593592" cy="1874520"/>
+          </a:xfrm>
+          <a:prstGeom prst="roundRect">
+            <a:avLst>
+              <a:gd name="adj" fmla="val 3415"/>
+            </a:avLst>
+          </a:prstGeom>
+          <a:solidFill>
+            <a:srgbClr val="FFFFFF"/>
+          </a:solidFill>
+          <a:ln/>
+          <a:effectLst>
+            <a:outerShdw sx="100000" sy="100000" kx="0" ky="0" algn="bl" rotWithShape="0" blurRad="88900" dist="38100" dir="5400000">
+              <a:srgbClr val="0E1B33">
+                <a:alpha val="18000"/>
+              </a:srgbClr>
+            </a:outerShdw>
+          </a:effectLst>
+        </p:spPr>
+      </p:sp>
+      <p:sp>
+        <p:nvSpPr>
+          <p:cNvPr id="30" name="Shape 23"/>
+          <p:cNvSpPr/>
+          <p:nvPr/>
+        </p:nvSpPr>
+        <p:spPr>
+          <a:xfrm>
+            <a:off x="8394192" y="4041648"/>
+            <a:ext cx="640080" cy="640080"/>
+          </a:xfrm>
+          <a:prstGeom prst="ellipse">
+            <a:avLst/>
+          </a:prstGeom>
+          <a:solidFill>
+            <a:srgbClr val="0E1B33"/>
+          </a:solidFill>
+          <a:ln/>
+        </p:spPr>
+      </p:sp>
+      <p:pic>
+        <p:nvPicPr>
+          <p:cNvPr id="31" name="Image 5" descr="preencoded.png">    </p:cNvPr>
+          <p:cNvPicPr>
+            <a:picLocks noChangeAspect="1"/>
+          </p:cNvPicPr>
+          <p:nvPr/>
+        </p:nvPicPr>
+        <p:blipFill>
+          <a:blip r:embed="rId6"/>
+          <a:stretch>
+            <a:fillRect/>
+          </a:stretch>
+        </p:blipFill>
+        <p:spPr>
+          <a:xfrm>
+            <a:off x="8549640" y="4197096"/>
+            <a:ext cx="329184" cy="329184"/>
+          </a:xfrm>
+          <a:prstGeom prst="rect">
+            <a:avLst/>
+          </a:prstGeom>
+        </p:spPr>
+      </p:pic>
+      <p:sp>
+        <p:nvSpPr>
+          <p:cNvPr id="32" name="Text 24"/>
+          <p:cNvSpPr/>
+          <p:nvPr/>
+        </p:nvSpPr>
+        <p:spPr>
+          <a:xfrm>
+            <a:off x="9198864" y="4105656"/>
+            <a:ext cx="2313432" cy="502920"/>
+          </a:xfrm>
+          <a:prstGeom prst="rect">
+            <a:avLst/>
+          </a:prstGeom>
+          <a:noFill/>
+          <a:ln/>
+        </p:spPr>
+        <p:txBody>
+          <a:bodyPr wrap="square" rtlCol="0" anchor="ctr"/>
+          <a:lstStyle/>
+          <a:p>
+            <a:pPr indent="0" marL="0">
+              <a:buNone/>
+            </a:pPr>
+            <a:r>
+              <a:rPr lang="en-US" sz="1700" b="1" dirty="0">
+                <a:solidFill>
+                  <a:srgbClr val="1B2538"/>
+                </a:solidFill>
+                <a:latin typeface="Noto Serif CJK TC" pitchFamily="34" charset="0"/>
+                <a:ea typeface="Noto Serif CJK TC" pitchFamily="34" charset="-122"/>
+                <a:cs typeface="Noto Serif CJK TC" pitchFamily="34" charset="-120"/>
+              </a:rPr>
+              <a:t>ROIC / Capex</a:t>
+            </a:r>
+            <a:endParaRPr lang="en-US" sz="1700" dirty="0"/>
+          </a:p>
+        </p:txBody>
+      </p:sp>
+      <p:sp>
+        <p:nvSpPr>
+          <p:cNvPr id="33" name="Text 25"/>
+          <p:cNvSpPr/>
+          <p:nvPr/>
+        </p:nvSpPr>
+        <p:spPr>
+          <a:xfrm>
+            <a:off x="8421624" y="4818888"/>
+            <a:ext cx="2953512" cy="640080"/>
+          </a:xfrm>
+          <a:prstGeom prst="rect">
+            <a:avLst/>
+          </a:prstGeom>
+          <a:noFill/>
+          <a:ln/>
+        </p:spPr>
+        <p:txBody>
+          <a:bodyPr wrap="square" rtlCol="0" anchor="t"/>
+          <a:lstStyle/>
+          <a:p>
+            <a:pPr indent="0" marL="0">
+              <a:buNone/>
+            </a:pPr>
+            <a:r>
+              <a:rPr lang="en-US" sz="1300" dirty="0">
+                <a:solidFill>
+                  <a:srgbClr val="55617A"/>
+                </a:solidFill>
+                <a:latin typeface="Noto Sans CJK TC" pitchFamily="34" charset="0"/>
+                <a:ea typeface="Noto Sans CJK TC" pitchFamily="34" charset="-122"/>
+                <a:cs typeface="Noto Sans CJK TC" pitchFamily="34" charset="-120"/>
+              </a:rPr>
+              <a:t>稅務 ruling 與 incentive package 後的回報是否達標？</a:t>
+            </a:r>
+            <a:endParaRPr lang="en-US" sz="1300" dirty="0"/>
+          </a:p>
+        </p:txBody>
+      </p:sp>
+    </p:spTree>
+  </p:cSld>
+  <p:clrMapOvr>
+    <a:masterClrMapping/>
+  </p:clrMapOvr>
+</p:sld>
+</file>
+
+<file path=ppt/slides/slide18.xml><?xml version="1.0" encoding="utf-8"?>
+<p:sld xmlns:a="http://schemas.openxmlformats.org/drawingml/2006/main" xmlns:r="http://schemas.openxmlformats.org/officeDocument/2006/relationships" xmlns:p="http://schemas.openxmlformats.org/presentationml/2006/main">
+  <p:cSld name="Slide 18">
     <p:bg>
       <p:bgPr>
         <a:solidFill>
@@ -9695,9 +12843,9 @@
 </p:sld>
 </file>
 
-<file path=ppt/slides/slide17.xml><?xml version="1.0" encoding="utf-8"?>
+<file path=ppt/slides/slide19.xml><?xml version="1.0" encoding="utf-8"?>
 <p:sld xmlns:a="http://schemas.openxmlformats.org/drawingml/2006/main" xmlns:r="http://schemas.openxmlformats.org/officeDocument/2006/relationships" xmlns:p="http://schemas.openxmlformats.org/presentationml/2006/main">
-  <p:cSld name="Slide 17">
+  <p:cSld name="Slide 19">
     <p:bg>
       <p:bgPr>
         <a:solidFill>
@@ -17956,7 +21104,7 @@
                 <a:ea typeface="Noto Sans CJK TC" pitchFamily="34" charset="-122"/>
                 <a:cs typeface="Noto Sans CJK TC" pitchFamily="34" charset="-120"/>
               </a:rPr>
-              <a:t>對 Amkor 是客戶（EMIB 外包）</a:t>
+              <a:t>製造巨人：先進製程 + 美國 fab</a:t>
             </a:r>
             <a:endParaRPr lang="en-US" sz="1250" dirty="0"/>
           </a:p>
@@ -17977,7 +21125,7 @@
                 <a:ea typeface="Noto Sans CJK TC" pitchFamily="34" charset="-122"/>
                 <a:cs typeface="Noto Sans CJK TC" pitchFamily="34" charset="-120"/>
               </a:rPr>
-              <a:t>對外又是封裝競爭者（EMIB / Foveros）</a:t>
+              <a:t>外部 foundry service 經驗仍在建立</a:t>
             </a:r>
             <a:endParaRPr lang="en-US" sz="1250" dirty="0"/>
           </a:p>
@@ -17998,7 +21146,7 @@
                 <a:ea typeface="Noto Sans CJK TC" pitchFamily="34" charset="-122"/>
                 <a:cs typeface="Noto Sans CJK TC" pitchFamily="34" charset="-120"/>
               </a:rPr>
-              <a:t>把 advanced packaging 當 foundry 切入點</a:t>
+              <a:t>與 UMC 合作 12nm 補服務能力</a:t>
             </a:r>
             <a:endParaRPr lang="en-US" sz="1250" dirty="0"/>
           </a:p>
